--- a/Plan de travail prévisionnel POC.pptx
+++ b/Plan de travail prévisionnel POC.pptx
@@ -8,7 +8,12 @@
     <p:sldId id="256" r:id="rId2"/>
     <p:sldId id="257" r:id="rId3"/>
     <p:sldId id="258" r:id="rId4"/>
-    <p:sldId id="259" r:id="rId5"/>
+    <p:sldId id="263" r:id="rId5"/>
+    <p:sldId id="264" r:id="rId6"/>
+    <p:sldId id="259" r:id="rId7"/>
+    <p:sldId id="260" r:id="rId8"/>
+    <p:sldId id="262" r:id="rId9"/>
+    <p:sldId id="261" r:id="rId10"/>
   </p:sldIdLst>
   <p:sldSz cx="12192000" cy="6858000"/>
   <p:notesSz cx="6858000" cy="9144000"/>
@@ -113,6 +118,6591 @@
     </p:ext>
   </p:extLst>
 </p:presentation>
+</file>
+
+<file path=ppt/changesInfos/changesInfo1.xml><?xml version="1.0" encoding="utf-8"?>
+<pc:chgInfo xmlns:a="http://schemas.openxmlformats.org/drawingml/2006/main" xmlns:r="http://schemas.openxmlformats.org/officeDocument/2006/relationships" xmlns:ac="http://schemas.microsoft.com/office/drawing/2013/main/command" xmlns:pc="http://schemas.microsoft.com/office/powerpoint/2013/main/command">
+  <pc:docChgLst>
+    <pc:chgData name="GOLDSTEIN Ludivine" userId="94097dde-c6ed-4b55-b7be-82589a3be72f" providerId="ADAL" clId="{0829D6BF-FF9E-4D7E-A4EB-C7DFCF3D9694}"/>
+    <pc:docChg chg="custSel modSld">
+      <pc:chgData name="GOLDSTEIN Ludivine" userId="94097dde-c6ed-4b55-b7be-82589a3be72f" providerId="ADAL" clId="{0829D6BF-FF9E-4D7E-A4EB-C7DFCF3D9694}" dt="2026-03-11T07:47:35.516" v="3" actId="313"/>
+      <pc:docMkLst>
+        <pc:docMk/>
+      </pc:docMkLst>
+      <pc:sldChg chg="modSp mod">
+        <pc:chgData name="GOLDSTEIN Ludivine" userId="94097dde-c6ed-4b55-b7be-82589a3be72f" providerId="ADAL" clId="{0829D6BF-FF9E-4D7E-A4EB-C7DFCF3D9694}" dt="2026-03-11T07:47:35.516" v="3" actId="313"/>
+        <pc:sldMkLst>
+          <pc:docMk/>
+          <pc:sldMk cId="4181619831" sldId="263"/>
+        </pc:sldMkLst>
+        <pc:spChg chg="mod">
+          <ac:chgData name="GOLDSTEIN Ludivine" userId="94097dde-c6ed-4b55-b7be-82589a3be72f" providerId="ADAL" clId="{0829D6BF-FF9E-4D7E-A4EB-C7DFCF3D9694}" dt="2026-03-11T07:47:35.516" v="3" actId="313"/>
+          <ac:spMkLst>
+            <pc:docMk/>
+            <pc:sldMk cId="4181619831" sldId="263"/>
+            <ac:spMk id="3" creationId="{0C7F0CE0-CA19-E3AC-6D6F-2A775556E04B}"/>
+          </ac:spMkLst>
+        </pc:spChg>
+      </pc:sldChg>
+    </pc:docChg>
+  </pc:docChgLst>
+</pc:chgInfo>
+</file>
+
+<file path=ppt/diagrams/colors1.xml><?xml version="1.0" encoding="utf-8"?>
+<dgm:colorsDef xmlns:dgm="http://schemas.openxmlformats.org/drawingml/2006/diagram" xmlns:a="http://schemas.openxmlformats.org/drawingml/2006/main" uniqueId="urn:microsoft.com/office/officeart/2005/8/colors/accent1_2">
+  <dgm:title val=""/>
+  <dgm:desc val=""/>
+  <dgm:catLst>
+    <dgm:cat type="accent1" pri="11200"/>
+  </dgm:catLst>
+  <dgm:styleLbl name="node0">
+    <dgm:fillClrLst meth="repeat">
+      <a:schemeClr val="accent1"/>
+    </dgm:fillClrLst>
+    <dgm:linClrLst meth="repeat">
+      <a:schemeClr val="lt1"/>
+    </dgm:linClrLst>
+    <dgm:effectClrLst/>
+    <dgm:txLinClrLst/>
+    <dgm:txFillClrLst/>
+    <dgm:txEffectClrLst/>
+  </dgm:styleLbl>
+  <dgm:styleLbl name="alignNode1">
+    <dgm:fillClrLst meth="repeat">
+      <a:schemeClr val="accent1"/>
+    </dgm:fillClrLst>
+    <dgm:linClrLst meth="repeat">
+      <a:schemeClr val="accent1"/>
+    </dgm:linClrLst>
+    <dgm:effectClrLst/>
+    <dgm:txLinClrLst/>
+    <dgm:txFillClrLst/>
+    <dgm:txEffectClrLst/>
+  </dgm:styleLbl>
+  <dgm:styleLbl name="node1">
+    <dgm:fillClrLst meth="repeat">
+      <a:schemeClr val="accent1"/>
+    </dgm:fillClrLst>
+    <dgm:linClrLst meth="repeat">
+      <a:schemeClr val="lt1"/>
+    </dgm:linClrLst>
+    <dgm:effectClrLst/>
+    <dgm:txLinClrLst/>
+    <dgm:txFillClrLst/>
+    <dgm:txEffectClrLst/>
+  </dgm:styleLbl>
+  <dgm:styleLbl name="lnNode1">
+    <dgm:fillClrLst meth="repeat">
+      <a:schemeClr val="accent1"/>
+    </dgm:fillClrLst>
+    <dgm:linClrLst meth="repeat">
+      <a:schemeClr val="lt1"/>
+    </dgm:linClrLst>
+    <dgm:effectClrLst/>
+    <dgm:txLinClrLst/>
+    <dgm:txFillClrLst/>
+    <dgm:txEffectClrLst/>
+  </dgm:styleLbl>
+  <dgm:styleLbl name="vennNode1">
+    <dgm:fillClrLst meth="repeat">
+      <a:schemeClr val="accent1">
+        <a:alpha val="50000"/>
+      </a:schemeClr>
+    </dgm:fillClrLst>
+    <dgm:linClrLst meth="repeat">
+      <a:schemeClr val="lt1"/>
+    </dgm:linClrLst>
+    <dgm:effectClrLst/>
+    <dgm:txLinClrLst/>
+    <dgm:txFillClrLst/>
+    <dgm:txEffectClrLst/>
+  </dgm:styleLbl>
+  <dgm:styleLbl name="node2">
+    <dgm:fillClrLst meth="repeat">
+      <a:schemeClr val="accent1"/>
+    </dgm:fillClrLst>
+    <dgm:linClrLst meth="repeat">
+      <a:schemeClr val="lt1"/>
+    </dgm:linClrLst>
+    <dgm:effectClrLst/>
+    <dgm:txLinClrLst/>
+    <dgm:txFillClrLst/>
+    <dgm:txEffectClrLst/>
+  </dgm:styleLbl>
+  <dgm:styleLbl name="node3">
+    <dgm:fillClrLst meth="repeat">
+      <a:schemeClr val="accent1"/>
+    </dgm:fillClrLst>
+    <dgm:linClrLst meth="repeat">
+      <a:schemeClr val="lt1"/>
+    </dgm:linClrLst>
+    <dgm:effectClrLst/>
+    <dgm:txLinClrLst/>
+    <dgm:txFillClrLst/>
+    <dgm:txEffectClrLst/>
+  </dgm:styleLbl>
+  <dgm:styleLbl name="node4">
+    <dgm:fillClrLst meth="repeat">
+      <a:schemeClr val="accent1"/>
+    </dgm:fillClrLst>
+    <dgm:linClrLst meth="repeat">
+      <a:schemeClr val="lt1"/>
+    </dgm:linClrLst>
+    <dgm:effectClrLst/>
+    <dgm:txLinClrLst/>
+    <dgm:txFillClrLst/>
+    <dgm:txEffectClrLst/>
+  </dgm:styleLbl>
+  <dgm:styleLbl name="fgImgPlace1">
+    <dgm:fillClrLst meth="repeat">
+      <a:schemeClr val="accent1">
+        <a:tint val="50000"/>
+      </a:schemeClr>
+    </dgm:fillClrLst>
+    <dgm:linClrLst meth="repeat">
+      <a:schemeClr val="lt1"/>
+    </dgm:linClrLst>
+    <dgm:effectClrLst/>
+    <dgm:txLinClrLst/>
+    <dgm:txFillClrLst meth="repeat">
+      <a:schemeClr val="lt1"/>
+    </dgm:txFillClrLst>
+    <dgm:txEffectClrLst/>
+  </dgm:styleLbl>
+  <dgm:styleLbl name="alignImgPlace1">
+    <dgm:fillClrLst meth="repeat">
+      <a:schemeClr val="accent1">
+        <a:tint val="50000"/>
+      </a:schemeClr>
+    </dgm:fillClrLst>
+    <dgm:linClrLst meth="repeat">
+      <a:schemeClr val="lt1"/>
+    </dgm:linClrLst>
+    <dgm:effectClrLst/>
+    <dgm:txLinClrLst/>
+    <dgm:txFillClrLst meth="repeat">
+      <a:schemeClr val="lt1"/>
+    </dgm:txFillClrLst>
+    <dgm:txEffectClrLst/>
+  </dgm:styleLbl>
+  <dgm:styleLbl name="bgImgPlace1">
+    <dgm:fillClrLst meth="repeat">
+      <a:schemeClr val="accent1">
+        <a:tint val="50000"/>
+      </a:schemeClr>
+    </dgm:fillClrLst>
+    <dgm:linClrLst meth="repeat">
+      <a:schemeClr val="lt1"/>
+    </dgm:linClrLst>
+    <dgm:effectClrLst/>
+    <dgm:txLinClrLst/>
+    <dgm:txFillClrLst meth="repeat">
+      <a:schemeClr val="lt1"/>
+    </dgm:txFillClrLst>
+    <dgm:txEffectClrLst/>
+  </dgm:styleLbl>
+  <dgm:styleLbl name="sibTrans2D1">
+    <dgm:fillClrLst meth="repeat">
+      <a:schemeClr val="accent1">
+        <a:tint val="60000"/>
+      </a:schemeClr>
+    </dgm:fillClrLst>
+    <dgm:linClrLst meth="repeat">
+      <a:schemeClr val="accent1">
+        <a:tint val="60000"/>
+      </a:schemeClr>
+    </dgm:linClrLst>
+    <dgm:effectClrLst/>
+    <dgm:txLinClrLst/>
+    <dgm:txFillClrLst/>
+    <dgm:txEffectClrLst/>
+  </dgm:styleLbl>
+  <dgm:styleLbl name="fgSibTrans2D1">
+    <dgm:fillClrLst meth="repeat">
+      <a:schemeClr val="accent1">
+        <a:tint val="60000"/>
+      </a:schemeClr>
+    </dgm:fillClrLst>
+    <dgm:linClrLst meth="repeat">
+      <a:schemeClr val="accent1">
+        <a:tint val="60000"/>
+      </a:schemeClr>
+    </dgm:linClrLst>
+    <dgm:effectClrLst/>
+    <dgm:txLinClrLst/>
+    <dgm:txFillClrLst/>
+    <dgm:txEffectClrLst/>
+  </dgm:styleLbl>
+  <dgm:styleLbl name="bgSibTrans2D1">
+    <dgm:fillClrLst meth="repeat">
+      <a:schemeClr val="accent1">
+        <a:tint val="60000"/>
+      </a:schemeClr>
+    </dgm:fillClrLst>
+    <dgm:linClrLst meth="repeat">
+      <a:schemeClr val="accent1">
+        <a:tint val="60000"/>
+      </a:schemeClr>
+    </dgm:linClrLst>
+    <dgm:effectClrLst/>
+    <dgm:txLinClrLst/>
+    <dgm:txFillClrLst/>
+    <dgm:txEffectClrLst/>
+  </dgm:styleLbl>
+  <dgm:styleLbl name="sibTrans1D1">
+    <dgm:fillClrLst meth="repeat">
+      <a:schemeClr val="accent1"/>
+    </dgm:fillClrLst>
+    <dgm:linClrLst meth="repeat">
+      <a:schemeClr val="accent1"/>
+    </dgm:linClrLst>
+    <dgm:effectClrLst/>
+    <dgm:txLinClrLst/>
+    <dgm:txFillClrLst meth="repeat">
+      <a:schemeClr val="tx1"/>
+    </dgm:txFillClrLst>
+    <dgm:txEffectClrLst/>
+  </dgm:styleLbl>
+  <dgm:styleLbl name="callout">
+    <dgm:fillClrLst meth="repeat">
+      <a:schemeClr val="accent1"/>
+    </dgm:fillClrLst>
+    <dgm:linClrLst meth="repeat">
+      <a:schemeClr val="accent1">
+        <a:tint val="50000"/>
+      </a:schemeClr>
+    </dgm:linClrLst>
+    <dgm:effectClrLst/>
+    <dgm:txLinClrLst/>
+    <dgm:txFillClrLst meth="repeat">
+      <a:schemeClr val="tx1"/>
+    </dgm:txFillClrLst>
+    <dgm:txEffectClrLst/>
+  </dgm:styleLbl>
+  <dgm:styleLbl name="asst0">
+    <dgm:fillClrLst meth="repeat">
+      <a:schemeClr val="accent1"/>
+    </dgm:fillClrLst>
+    <dgm:linClrLst meth="repeat">
+      <a:schemeClr val="lt1"/>
+    </dgm:linClrLst>
+    <dgm:effectClrLst/>
+    <dgm:txLinClrLst/>
+    <dgm:txFillClrLst/>
+    <dgm:txEffectClrLst/>
+  </dgm:styleLbl>
+  <dgm:styleLbl name="asst1">
+    <dgm:fillClrLst meth="repeat">
+      <a:schemeClr val="accent1"/>
+    </dgm:fillClrLst>
+    <dgm:linClrLst meth="repeat">
+      <a:schemeClr val="lt1"/>
+    </dgm:linClrLst>
+    <dgm:effectClrLst/>
+    <dgm:txLinClrLst/>
+    <dgm:txFillClrLst/>
+    <dgm:txEffectClrLst/>
+  </dgm:styleLbl>
+  <dgm:styleLbl name="asst2">
+    <dgm:fillClrLst meth="repeat">
+      <a:schemeClr val="accent1"/>
+    </dgm:fillClrLst>
+    <dgm:linClrLst meth="repeat">
+      <a:schemeClr val="lt1"/>
+    </dgm:linClrLst>
+    <dgm:effectClrLst/>
+    <dgm:txLinClrLst/>
+    <dgm:txFillClrLst/>
+    <dgm:txEffectClrLst/>
+  </dgm:styleLbl>
+  <dgm:styleLbl name="asst3">
+    <dgm:fillClrLst meth="repeat">
+      <a:schemeClr val="accent1"/>
+    </dgm:fillClrLst>
+    <dgm:linClrLst meth="repeat">
+      <a:schemeClr val="lt1"/>
+    </dgm:linClrLst>
+    <dgm:effectClrLst/>
+    <dgm:txLinClrLst/>
+    <dgm:txFillClrLst/>
+    <dgm:txEffectClrLst/>
+  </dgm:styleLbl>
+  <dgm:styleLbl name="asst4">
+    <dgm:fillClrLst meth="repeat">
+      <a:schemeClr val="accent1"/>
+    </dgm:fillClrLst>
+    <dgm:linClrLst meth="repeat">
+      <a:schemeClr val="lt1"/>
+    </dgm:linClrLst>
+    <dgm:effectClrLst/>
+    <dgm:txLinClrLst/>
+    <dgm:txFillClrLst/>
+    <dgm:txEffectClrLst/>
+  </dgm:styleLbl>
+  <dgm:styleLbl name="parChTrans2D1">
+    <dgm:fillClrLst meth="repeat">
+      <a:schemeClr val="accent1">
+        <a:tint val="60000"/>
+      </a:schemeClr>
+    </dgm:fillClrLst>
+    <dgm:linClrLst meth="repeat">
+      <a:schemeClr val="accent1">
+        <a:tint val="60000"/>
+      </a:schemeClr>
+    </dgm:linClrLst>
+    <dgm:effectClrLst/>
+    <dgm:txLinClrLst/>
+    <dgm:txFillClrLst meth="repeat">
+      <a:schemeClr val="lt1"/>
+    </dgm:txFillClrLst>
+    <dgm:txEffectClrLst/>
+  </dgm:styleLbl>
+  <dgm:styleLbl name="parChTrans2D2">
+    <dgm:fillClrLst meth="repeat">
+      <a:schemeClr val="accent1"/>
+    </dgm:fillClrLst>
+    <dgm:linClrLst meth="repeat">
+      <a:schemeClr val="accent1"/>
+    </dgm:linClrLst>
+    <dgm:effectClrLst/>
+    <dgm:txLinClrLst/>
+    <dgm:txFillClrLst meth="repeat">
+      <a:schemeClr val="lt1"/>
+    </dgm:txFillClrLst>
+    <dgm:txEffectClrLst/>
+  </dgm:styleLbl>
+  <dgm:styleLbl name="parChTrans2D3">
+    <dgm:fillClrLst meth="repeat">
+      <a:schemeClr val="accent1"/>
+    </dgm:fillClrLst>
+    <dgm:linClrLst meth="repeat">
+      <a:schemeClr val="accent1"/>
+    </dgm:linClrLst>
+    <dgm:effectClrLst/>
+    <dgm:txLinClrLst/>
+    <dgm:txFillClrLst meth="repeat">
+      <a:schemeClr val="lt1"/>
+    </dgm:txFillClrLst>
+    <dgm:txEffectClrLst/>
+  </dgm:styleLbl>
+  <dgm:styleLbl name="parChTrans2D4">
+    <dgm:fillClrLst meth="repeat">
+      <a:schemeClr val="accent1"/>
+    </dgm:fillClrLst>
+    <dgm:linClrLst meth="repeat">
+      <a:schemeClr val="accent1"/>
+    </dgm:linClrLst>
+    <dgm:effectClrLst/>
+    <dgm:txLinClrLst/>
+    <dgm:txFillClrLst meth="repeat">
+      <a:schemeClr val="lt1"/>
+    </dgm:txFillClrLst>
+    <dgm:txEffectClrLst/>
+  </dgm:styleLbl>
+  <dgm:styleLbl name="parChTrans1D1">
+    <dgm:fillClrLst meth="repeat">
+      <a:schemeClr val="accent1"/>
+    </dgm:fillClrLst>
+    <dgm:linClrLst meth="repeat">
+      <a:schemeClr val="accent1">
+        <a:shade val="60000"/>
+      </a:schemeClr>
+    </dgm:linClrLst>
+    <dgm:effectClrLst/>
+    <dgm:txLinClrLst/>
+    <dgm:txFillClrLst meth="repeat">
+      <a:schemeClr val="tx1"/>
+    </dgm:txFillClrLst>
+    <dgm:txEffectClrLst/>
+  </dgm:styleLbl>
+  <dgm:styleLbl name="parChTrans1D2">
+    <dgm:fillClrLst meth="repeat">
+      <a:schemeClr val="accent1"/>
+    </dgm:fillClrLst>
+    <dgm:linClrLst meth="repeat">
+      <a:schemeClr val="accent1">
+        <a:shade val="60000"/>
+      </a:schemeClr>
+    </dgm:linClrLst>
+    <dgm:effectClrLst/>
+    <dgm:txLinClrLst/>
+    <dgm:txFillClrLst meth="repeat">
+      <a:schemeClr val="tx1"/>
+    </dgm:txFillClrLst>
+    <dgm:txEffectClrLst/>
+  </dgm:styleLbl>
+  <dgm:styleLbl name="parChTrans1D3">
+    <dgm:fillClrLst meth="repeat">
+      <a:schemeClr val="accent1"/>
+    </dgm:fillClrLst>
+    <dgm:linClrLst meth="repeat">
+      <a:schemeClr val="accent1">
+        <a:shade val="80000"/>
+      </a:schemeClr>
+    </dgm:linClrLst>
+    <dgm:effectClrLst/>
+    <dgm:txLinClrLst/>
+    <dgm:txFillClrLst meth="repeat">
+      <a:schemeClr val="tx1"/>
+    </dgm:txFillClrLst>
+    <dgm:txEffectClrLst/>
+  </dgm:styleLbl>
+  <dgm:styleLbl name="parChTrans1D4">
+    <dgm:fillClrLst meth="repeat">
+      <a:schemeClr val="accent1"/>
+    </dgm:fillClrLst>
+    <dgm:linClrLst meth="repeat">
+      <a:schemeClr val="accent1">
+        <a:shade val="80000"/>
+      </a:schemeClr>
+    </dgm:linClrLst>
+    <dgm:effectClrLst/>
+    <dgm:txLinClrLst/>
+    <dgm:txFillClrLst meth="repeat">
+      <a:schemeClr val="tx1"/>
+    </dgm:txFillClrLst>
+    <dgm:txEffectClrLst/>
+  </dgm:styleLbl>
+  <dgm:styleLbl name="fgAcc1">
+    <dgm:fillClrLst meth="repeat">
+      <a:schemeClr val="lt1">
+        <a:alpha val="90000"/>
+      </a:schemeClr>
+    </dgm:fillClrLst>
+    <dgm:linClrLst meth="repeat">
+      <a:schemeClr val="accent1"/>
+    </dgm:linClrLst>
+    <dgm:effectClrLst/>
+    <dgm:txLinClrLst/>
+    <dgm:txFillClrLst meth="repeat">
+      <a:schemeClr val="dk1"/>
+    </dgm:txFillClrLst>
+    <dgm:txEffectClrLst/>
+  </dgm:styleLbl>
+  <dgm:styleLbl name="conFgAcc1">
+    <dgm:fillClrLst meth="repeat">
+      <a:schemeClr val="lt1">
+        <a:alpha val="90000"/>
+      </a:schemeClr>
+    </dgm:fillClrLst>
+    <dgm:linClrLst meth="repeat">
+      <a:schemeClr val="accent1"/>
+    </dgm:linClrLst>
+    <dgm:effectClrLst/>
+    <dgm:txLinClrLst/>
+    <dgm:txFillClrLst meth="repeat">
+      <a:schemeClr val="dk1"/>
+    </dgm:txFillClrLst>
+    <dgm:txEffectClrLst/>
+  </dgm:styleLbl>
+  <dgm:styleLbl name="alignAcc1">
+    <dgm:fillClrLst meth="repeat">
+      <a:schemeClr val="lt1">
+        <a:alpha val="90000"/>
+      </a:schemeClr>
+    </dgm:fillClrLst>
+    <dgm:linClrLst meth="repeat">
+      <a:schemeClr val="accent1"/>
+    </dgm:linClrLst>
+    <dgm:effectClrLst/>
+    <dgm:txLinClrLst/>
+    <dgm:txFillClrLst meth="repeat">
+      <a:schemeClr val="dk1"/>
+    </dgm:txFillClrLst>
+    <dgm:txEffectClrLst/>
+  </dgm:styleLbl>
+  <dgm:styleLbl name="trAlignAcc1">
+    <dgm:fillClrLst meth="repeat">
+      <a:schemeClr val="lt1">
+        <a:alpha val="40000"/>
+      </a:schemeClr>
+    </dgm:fillClrLst>
+    <dgm:linClrLst meth="repeat">
+      <a:schemeClr val="accent1"/>
+    </dgm:linClrLst>
+    <dgm:effectClrLst/>
+    <dgm:txLinClrLst/>
+    <dgm:txFillClrLst meth="repeat">
+      <a:schemeClr val="dk1"/>
+    </dgm:txFillClrLst>
+    <dgm:txEffectClrLst/>
+  </dgm:styleLbl>
+  <dgm:styleLbl name="bgAcc1">
+    <dgm:fillClrLst meth="repeat">
+      <a:schemeClr val="lt1">
+        <a:alpha val="90000"/>
+      </a:schemeClr>
+    </dgm:fillClrLst>
+    <dgm:linClrLst meth="repeat">
+      <a:schemeClr val="accent1"/>
+    </dgm:linClrLst>
+    <dgm:effectClrLst/>
+    <dgm:txLinClrLst/>
+    <dgm:txFillClrLst meth="repeat">
+      <a:schemeClr val="dk1"/>
+    </dgm:txFillClrLst>
+    <dgm:txEffectClrLst/>
+  </dgm:styleLbl>
+  <dgm:styleLbl name="solidFgAcc1">
+    <dgm:fillClrLst meth="repeat">
+      <a:schemeClr val="lt1"/>
+    </dgm:fillClrLst>
+    <dgm:linClrLst meth="repeat">
+      <a:schemeClr val="accent1"/>
+    </dgm:linClrLst>
+    <dgm:effectClrLst/>
+    <dgm:txLinClrLst/>
+    <dgm:txFillClrLst meth="repeat">
+      <a:schemeClr val="dk1"/>
+    </dgm:txFillClrLst>
+    <dgm:txEffectClrLst/>
+  </dgm:styleLbl>
+  <dgm:styleLbl name="solidAlignAcc1">
+    <dgm:fillClrLst meth="repeat">
+      <a:schemeClr val="lt1"/>
+    </dgm:fillClrLst>
+    <dgm:linClrLst meth="repeat">
+      <a:schemeClr val="accent1"/>
+    </dgm:linClrLst>
+    <dgm:effectClrLst/>
+    <dgm:txLinClrLst/>
+    <dgm:txFillClrLst meth="repeat">
+      <a:schemeClr val="dk1"/>
+    </dgm:txFillClrLst>
+    <dgm:txEffectClrLst/>
+  </dgm:styleLbl>
+  <dgm:styleLbl name="solidBgAcc1">
+    <dgm:fillClrLst meth="repeat">
+      <a:schemeClr val="lt1"/>
+    </dgm:fillClrLst>
+    <dgm:linClrLst meth="repeat">
+      <a:schemeClr val="accent1"/>
+    </dgm:linClrLst>
+    <dgm:effectClrLst/>
+    <dgm:txLinClrLst/>
+    <dgm:txFillClrLst meth="repeat">
+      <a:schemeClr val="dk1"/>
+    </dgm:txFillClrLst>
+    <dgm:txEffectClrLst/>
+  </dgm:styleLbl>
+  <dgm:styleLbl name="fgAccFollowNode1">
+    <dgm:fillClrLst meth="repeat">
+      <a:schemeClr val="accent1">
+        <a:alpha val="90000"/>
+        <a:tint val="40000"/>
+      </a:schemeClr>
+    </dgm:fillClrLst>
+    <dgm:linClrLst meth="repeat">
+      <a:schemeClr val="accent1">
+        <a:alpha val="90000"/>
+        <a:tint val="40000"/>
+      </a:schemeClr>
+    </dgm:linClrLst>
+    <dgm:effectClrLst/>
+    <dgm:txLinClrLst/>
+    <dgm:txFillClrLst meth="repeat">
+      <a:schemeClr val="dk1"/>
+    </dgm:txFillClrLst>
+    <dgm:txEffectClrLst/>
+  </dgm:styleLbl>
+  <dgm:styleLbl name="alignAccFollowNode1">
+    <dgm:fillClrLst meth="repeat">
+      <a:schemeClr val="accent1">
+        <a:alpha val="90000"/>
+        <a:tint val="40000"/>
+      </a:schemeClr>
+    </dgm:fillClrLst>
+    <dgm:linClrLst meth="repeat">
+      <a:schemeClr val="accent1">
+        <a:alpha val="90000"/>
+        <a:tint val="40000"/>
+      </a:schemeClr>
+    </dgm:linClrLst>
+    <dgm:effectClrLst/>
+    <dgm:txLinClrLst/>
+    <dgm:txFillClrLst meth="repeat">
+      <a:schemeClr val="dk1"/>
+    </dgm:txFillClrLst>
+    <dgm:txEffectClrLst/>
+  </dgm:styleLbl>
+  <dgm:styleLbl name="bgAccFollowNode1">
+    <dgm:fillClrLst meth="repeat">
+      <a:schemeClr val="accent1">
+        <a:alpha val="90000"/>
+        <a:tint val="40000"/>
+      </a:schemeClr>
+    </dgm:fillClrLst>
+    <dgm:linClrLst meth="repeat">
+      <a:schemeClr val="accent1">
+        <a:alpha val="90000"/>
+        <a:tint val="40000"/>
+      </a:schemeClr>
+    </dgm:linClrLst>
+    <dgm:effectClrLst/>
+    <dgm:txLinClrLst/>
+    <dgm:txFillClrLst meth="repeat">
+      <a:schemeClr val="dk1"/>
+    </dgm:txFillClrLst>
+    <dgm:txEffectClrLst/>
+  </dgm:styleLbl>
+  <dgm:styleLbl name="fgAcc0">
+    <dgm:fillClrLst meth="repeat">
+      <a:schemeClr val="lt1">
+        <a:alpha val="90000"/>
+      </a:schemeClr>
+    </dgm:fillClrLst>
+    <dgm:linClrLst meth="repeat">
+      <a:schemeClr val="accent1"/>
+    </dgm:linClrLst>
+    <dgm:effectClrLst/>
+    <dgm:txLinClrLst/>
+    <dgm:txFillClrLst meth="repeat">
+      <a:schemeClr val="dk1"/>
+    </dgm:txFillClrLst>
+    <dgm:txEffectClrLst/>
+  </dgm:styleLbl>
+  <dgm:styleLbl name="fgAcc2">
+    <dgm:fillClrLst meth="repeat">
+      <a:schemeClr val="lt1">
+        <a:alpha val="90000"/>
+      </a:schemeClr>
+    </dgm:fillClrLst>
+    <dgm:linClrLst meth="repeat">
+      <a:schemeClr val="accent1"/>
+    </dgm:linClrLst>
+    <dgm:effectClrLst/>
+    <dgm:txLinClrLst/>
+    <dgm:txFillClrLst meth="repeat">
+      <a:schemeClr val="dk1"/>
+    </dgm:txFillClrLst>
+    <dgm:txEffectClrLst/>
+  </dgm:styleLbl>
+  <dgm:styleLbl name="fgAcc3">
+    <dgm:fillClrLst meth="repeat">
+      <a:schemeClr val="lt1">
+        <a:alpha val="90000"/>
+      </a:schemeClr>
+    </dgm:fillClrLst>
+    <dgm:linClrLst meth="repeat">
+      <a:schemeClr val="accent1"/>
+    </dgm:linClrLst>
+    <dgm:effectClrLst/>
+    <dgm:txLinClrLst/>
+    <dgm:txFillClrLst meth="repeat">
+      <a:schemeClr val="dk1"/>
+    </dgm:txFillClrLst>
+    <dgm:txEffectClrLst/>
+  </dgm:styleLbl>
+  <dgm:styleLbl name="fgAcc4">
+    <dgm:fillClrLst meth="repeat">
+      <a:schemeClr val="lt1">
+        <a:alpha val="90000"/>
+      </a:schemeClr>
+    </dgm:fillClrLst>
+    <dgm:linClrLst meth="repeat">
+      <a:schemeClr val="accent1"/>
+    </dgm:linClrLst>
+    <dgm:effectClrLst/>
+    <dgm:txLinClrLst/>
+    <dgm:txFillClrLst meth="repeat">
+      <a:schemeClr val="dk1"/>
+    </dgm:txFillClrLst>
+    <dgm:txEffectClrLst/>
+  </dgm:styleLbl>
+  <dgm:styleLbl name="bgShp">
+    <dgm:fillClrLst meth="repeat">
+      <a:schemeClr val="accent1">
+        <a:tint val="40000"/>
+      </a:schemeClr>
+    </dgm:fillClrLst>
+    <dgm:linClrLst meth="repeat">
+      <a:schemeClr val="accent1"/>
+    </dgm:linClrLst>
+    <dgm:effectClrLst/>
+    <dgm:txLinClrLst/>
+    <dgm:txFillClrLst meth="repeat">
+      <a:schemeClr val="dk1"/>
+    </dgm:txFillClrLst>
+    <dgm:txEffectClrLst/>
+  </dgm:styleLbl>
+  <dgm:styleLbl name="dkBgShp">
+    <dgm:fillClrLst meth="repeat">
+      <a:schemeClr val="accent1">
+        <a:shade val="80000"/>
+      </a:schemeClr>
+    </dgm:fillClrLst>
+    <dgm:linClrLst meth="repeat">
+      <a:schemeClr val="accent1"/>
+    </dgm:linClrLst>
+    <dgm:effectClrLst/>
+    <dgm:txLinClrLst/>
+    <dgm:txFillClrLst meth="repeat">
+      <a:schemeClr val="lt1"/>
+    </dgm:txFillClrLst>
+    <dgm:txEffectClrLst/>
+  </dgm:styleLbl>
+  <dgm:styleLbl name="trBgShp">
+    <dgm:fillClrLst meth="repeat">
+      <a:schemeClr val="accent1">
+        <a:tint val="50000"/>
+        <a:alpha val="40000"/>
+      </a:schemeClr>
+    </dgm:fillClrLst>
+    <dgm:linClrLst meth="repeat">
+      <a:schemeClr val="accent1"/>
+    </dgm:linClrLst>
+    <dgm:effectClrLst/>
+    <dgm:txLinClrLst/>
+    <dgm:txFillClrLst meth="repeat">
+      <a:schemeClr val="lt1"/>
+    </dgm:txFillClrLst>
+    <dgm:txEffectClrLst/>
+  </dgm:styleLbl>
+  <dgm:styleLbl name="fgShp">
+    <dgm:fillClrLst meth="repeat">
+      <a:schemeClr val="accent1">
+        <a:tint val="60000"/>
+      </a:schemeClr>
+    </dgm:fillClrLst>
+    <dgm:linClrLst meth="repeat">
+      <a:schemeClr val="lt1"/>
+    </dgm:linClrLst>
+    <dgm:effectClrLst/>
+    <dgm:txLinClrLst/>
+    <dgm:txFillClrLst meth="repeat">
+      <a:schemeClr val="dk1"/>
+    </dgm:txFillClrLst>
+    <dgm:txEffectClrLst/>
+  </dgm:styleLbl>
+  <dgm:styleLbl name="revTx">
+    <dgm:fillClrLst meth="repeat">
+      <a:schemeClr val="lt1">
+        <a:alpha val="0"/>
+      </a:schemeClr>
+    </dgm:fillClrLst>
+    <dgm:linClrLst meth="repeat">
+      <a:schemeClr val="dk1">
+        <a:alpha val="0"/>
+      </a:schemeClr>
+    </dgm:linClrLst>
+    <dgm:effectClrLst/>
+    <dgm:txLinClrLst/>
+    <dgm:txFillClrLst meth="repeat">
+      <a:schemeClr val="tx1"/>
+    </dgm:txFillClrLst>
+    <dgm:txEffectClrLst/>
+  </dgm:styleLbl>
+</dgm:colorsDef>
+</file>
+
+<file path=ppt/diagrams/colors2.xml><?xml version="1.0" encoding="utf-8"?>
+<dgm:colorsDef xmlns:dgm="http://schemas.openxmlformats.org/drawingml/2006/diagram" xmlns:a="http://schemas.openxmlformats.org/drawingml/2006/main" uniqueId="urn:microsoft.com/office/officeart/2005/8/colors/accent1_2">
+  <dgm:title val=""/>
+  <dgm:desc val=""/>
+  <dgm:catLst>
+    <dgm:cat type="accent1" pri="11200"/>
+  </dgm:catLst>
+  <dgm:styleLbl name="node0">
+    <dgm:fillClrLst meth="repeat">
+      <a:schemeClr val="accent1"/>
+    </dgm:fillClrLst>
+    <dgm:linClrLst meth="repeat">
+      <a:schemeClr val="lt1"/>
+    </dgm:linClrLst>
+    <dgm:effectClrLst/>
+    <dgm:txLinClrLst/>
+    <dgm:txFillClrLst/>
+    <dgm:txEffectClrLst/>
+  </dgm:styleLbl>
+  <dgm:styleLbl name="alignNode1">
+    <dgm:fillClrLst meth="repeat">
+      <a:schemeClr val="accent1"/>
+    </dgm:fillClrLst>
+    <dgm:linClrLst meth="repeat">
+      <a:schemeClr val="accent1"/>
+    </dgm:linClrLst>
+    <dgm:effectClrLst/>
+    <dgm:txLinClrLst/>
+    <dgm:txFillClrLst/>
+    <dgm:txEffectClrLst/>
+  </dgm:styleLbl>
+  <dgm:styleLbl name="node1">
+    <dgm:fillClrLst meth="repeat">
+      <a:schemeClr val="accent1"/>
+    </dgm:fillClrLst>
+    <dgm:linClrLst meth="repeat">
+      <a:schemeClr val="lt1"/>
+    </dgm:linClrLst>
+    <dgm:effectClrLst/>
+    <dgm:txLinClrLst/>
+    <dgm:txFillClrLst/>
+    <dgm:txEffectClrLst/>
+  </dgm:styleLbl>
+  <dgm:styleLbl name="lnNode1">
+    <dgm:fillClrLst meth="repeat">
+      <a:schemeClr val="accent1"/>
+    </dgm:fillClrLst>
+    <dgm:linClrLst meth="repeat">
+      <a:schemeClr val="lt1"/>
+    </dgm:linClrLst>
+    <dgm:effectClrLst/>
+    <dgm:txLinClrLst/>
+    <dgm:txFillClrLst/>
+    <dgm:txEffectClrLst/>
+  </dgm:styleLbl>
+  <dgm:styleLbl name="vennNode1">
+    <dgm:fillClrLst meth="repeat">
+      <a:schemeClr val="accent1">
+        <a:alpha val="50000"/>
+      </a:schemeClr>
+    </dgm:fillClrLst>
+    <dgm:linClrLst meth="repeat">
+      <a:schemeClr val="lt1"/>
+    </dgm:linClrLst>
+    <dgm:effectClrLst/>
+    <dgm:txLinClrLst/>
+    <dgm:txFillClrLst/>
+    <dgm:txEffectClrLst/>
+  </dgm:styleLbl>
+  <dgm:styleLbl name="node2">
+    <dgm:fillClrLst meth="repeat">
+      <a:schemeClr val="accent1"/>
+    </dgm:fillClrLst>
+    <dgm:linClrLst meth="repeat">
+      <a:schemeClr val="lt1"/>
+    </dgm:linClrLst>
+    <dgm:effectClrLst/>
+    <dgm:txLinClrLst/>
+    <dgm:txFillClrLst/>
+    <dgm:txEffectClrLst/>
+  </dgm:styleLbl>
+  <dgm:styleLbl name="node3">
+    <dgm:fillClrLst meth="repeat">
+      <a:schemeClr val="accent1"/>
+    </dgm:fillClrLst>
+    <dgm:linClrLst meth="repeat">
+      <a:schemeClr val="lt1"/>
+    </dgm:linClrLst>
+    <dgm:effectClrLst/>
+    <dgm:txLinClrLst/>
+    <dgm:txFillClrLst/>
+    <dgm:txEffectClrLst/>
+  </dgm:styleLbl>
+  <dgm:styleLbl name="node4">
+    <dgm:fillClrLst meth="repeat">
+      <a:schemeClr val="accent1"/>
+    </dgm:fillClrLst>
+    <dgm:linClrLst meth="repeat">
+      <a:schemeClr val="lt1"/>
+    </dgm:linClrLst>
+    <dgm:effectClrLst/>
+    <dgm:txLinClrLst/>
+    <dgm:txFillClrLst/>
+    <dgm:txEffectClrLst/>
+  </dgm:styleLbl>
+  <dgm:styleLbl name="fgImgPlace1">
+    <dgm:fillClrLst meth="repeat">
+      <a:schemeClr val="accent1">
+        <a:tint val="50000"/>
+      </a:schemeClr>
+    </dgm:fillClrLst>
+    <dgm:linClrLst meth="repeat">
+      <a:schemeClr val="lt1"/>
+    </dgm:linClrLst>
+    <dgm:effectClrLst/>
+    <dgm:txLinClrLst/>
+    <dgm:txFillClrLst meth="repeat">
+      <a:schemeClr val="lt1"/>
+    </dgm:txFillClrLst>
+    <dgm:txEffectClrLst/>
+  </dgm:styleLbl>
+  <dgm:styleLbl name="alignImgPlace1">
+    <dgm:fillClrLst meth="repeat">
+      <a:schemeClr val="accent1">
+        <a:tint val="50000"/>
+      </a:schemeClr>
+    </dgm:fillClrLst>
+    <dgm:linClrLst meth="repeat">
+      <a:schemeClr val="lt1"/>
+    </dgm:linClrLst>
+    <dgm:effectClrLst/>
+    <dgm:txLinClrLst/>
+    <dgm:txFillClrLst meth="repeat">
+      <a:schemeClr val="lt1"/>
+    </dgm:txFillClrLst>
+    <dgm:txEffectClrLst/>
+  </dgm:styleLbl>
+  <dgm:styleLbl name="bgImgPlace1">
+    <dgm:fillClrLst meth="repeat">
+      <a:schemeClr val="accent1">
+        <a:tint val="50000"/>
+      </a:schemeClr>
+    </dgm:fillClrLst>
+    <dgm:linClrLst meth="repeat">
+      <a:schemeClr val="lt1"/>
+    </dgm:linClrLst>
+    <dgm:effectClrLst/>
+    <dgm:txLinClrLst/>
+    <dgm:txFillClrLst meth="repeat">
+      <a:schemeClr val="lt1"/>
+    </dgm:txFillClrLst>
+    <dgm:txEffectClrLst/>
+  </dgm:styleLbl>
+  <dgm:styleLbl name="sibTrans2D1">
+    <dgm:fillClrLst meth="repeat">
+      <a:schemeClr val="accent1">
+        <a:tint val="60000"/>
+      </a:schemeClr>
+    </dgm:fillClrLst>
+    <dgm:linClrLst meth="repeat">
+      <a:schemeClr val="accent1">
+        <a:tint val="60000"/>
+      </a:schemeClr>
+    </dgm:linClrLst>
+    <dgm:effectClrLst/>
+    <dgm:txLinClrLst/>
+    <dgm:txFillClrLst/>
+    <dgm:txEffectClrLst/>
+  </dgm:styleLbl>
+  <dgm:styleLbl name="fgSibTrans2D1">
+    <dgm:fillClrLst meth="repeat">
+      <a:schemeClr val="accent1">
+        <a:tint val="60000"/>
+      </a:schemeClr>
+    </dgm:fillClrLst>
+    <dgm:linClrLst meth="repeat">
+      <a:schemeClr val="accent1">
+        <a:tint val="60000"/>
+      </a:schemeClr>
+    </dgm:linClrLst>
+    <dgm:effectClrLst/>
+    <dgm:txLinClrLst/>
+    <dgm:txFillClrLst/>
+    <dgm:txEffectClrLst/>
+  </dgm:styleLbl>
+  <dgm:styleLbl name="bgSibTrans2D1">
+    <dgm:fillClrLst meth="repeat">
+      <a:schemeClr val="accent1">
+        <a:tint val="60000"/>
+      </a:schemeClr>
+    </dgm:fillClrLst>
+    <dgm:linClrLst meth="repeat">
+      <a:schemeClr val="accent1">
+        <a:tint val="60000"/>
+      </a:schemeClr>
+    </dgm:linClrLst>
+    <dgm:effectClrLst/>
+    <dgm:txLinClrLst/>
+    <dgm:txFillClrLst/>
+    <dgm:txEffectClrLst/>
+  </dgm:styleLbl>
+  <dgm:styleLbl name="sibTrans1D1">
+    <dgm:fillClrLst meth="repeat">
+      <a:schemeClr val="accent1"/>
+    </dgm:fillClrLst>
+    <dgm:linClrLst meth="repeat">
+      <a:schemeClr val="accent1"/>
+    </dgm:linClrLst>
+    <dgm:effectClrLst/>
+    <dgm:txLinClrLst/>
+    <dgm:txFillClrLst meth="repeat">
+      <a:schemeClr val="tx1"/>
+    </dgm:txFillClrLst>
+    <dgm:txEffectClrLst/>
+  </dgm:styleLbl>
+  <dgm:styleLbl name="callout">
+    <dgm:fillClrLst meth="repeat">
+      <a:schemeClr val="accent1"/>
+    </dgm:fillClrLst>
+    <dgm:linClrLst meth="repeat">
+      <a:schemeClr val="accent1">
+        <a:tint val="50000"/>
+      </a:schemeClr>
+    </dgm:linClrLst>
+    <dgm:effectClrLst/>
+    <dgm:txLinClrLst/>
+    <dgm:txFillClrLst meth="repeat">
+      <a:schemeClr val="tx1"/>
+    </dgm:txFillClrLst>
+    <dgm:txEffectClrLst/>
+  </dgm:styleLbl>
+  <dgm:styleLbl name="asst0">
+    <dgm:fillClrLst meth="repeat">
+      <a:schemeClr val="accent1"/>
+    </dgm:fillClrLst>
+    <dgm:linClrLst meth="repeat">
+      <a:schemeClr val="lt1"/>
+    </dgm:linClrLst>
+    <dgm:effectClrLst/>
+    <dgm:txLinClrLst/>
+    <dgm:txFillClrLst/>
+    <dgm:txEffectClrLst/>
+  </dgm:styleLbl>
+  <dgm:styleLbl name="asst1">
+    <dgm:fillClrLst meth="repeat">
+      <a:schemeClr val="accent1"/>
+    </dgm:fillClrLst>
+    <dgm:linClrLst meth="repeat">
+      <a:schemeClr val="lt1"/>
+    </dgm:linClrLst>
+    <dgm:effectClrLst/>
+    <dgm:txLinClrLst/>
+    <dgm:txFillClrLst/>
+    <dgm:txEffectClrLst/>
+  </dgm:styleLbl>
+  <dgm:styleLbl name="asst2">
+    <dgm:fillClrLst meth="repeat">
+      <a:schemeClr val="accent1"/>
+    </dgm:fillClrLst>
+    <dgm:linClrLst meth="repeat">
+      <a:schemeClr val="lt1"/>
+    </dgm:linClrLst>
+    <dgm:effectClrLst/>
+    <dgm:txLinClrLst/>
+    <dgm:txFillClrLst/>
+    <dgm:txEffectClrLst/>
+  </dgm:styleLbl>
+  <dgm:styleLbl name="asst3">
+    <dgm:fillClrLst meth="repeat">
+      <a:schemeClr val="accent1"/>
+    </dgm:fillClrLst>
+    <dgm:linClrLst meth="repeat">
+      <a:schemeClr val="lt1"/>
+    </dgm:linClrLst>
+    <dgm:effectClrLst/>
+    <dgm:txLinClrLst/>
+    <dgm:txFillClrLst/>
+    <dgm:txEffectClrLst/>
+  </dgm:styleLbl>
+  <dgm:styleLbl name="asst4">
+    <dgm:fillClrLst meth="repeat">
+      <a:schemeClr val="accent1"/>
+    </dgm:fillClrLst>
+    <dgm:linClrLst meth="repeat">
+      <a:schemeClr val="lt1"/>
+    </dgm:linClrLst>
+    <dgm:effectClrLst/>
+    <dgm:txLinClrLst/>
+    <dgm:txFillClrLst/>
+    <dgm:txEffectClrLst/>
+  </dgm:styleLbl>
+  <dgm:styleLbl name="parChTrans2D1">
+    <dgm:fillClrLst meth="repeat">
+      <a:schemeClr val="accent1">
+        <a:tint val="60000"/>
+      </a:schemeClr>
+    </dgm:fillClrLst>
+    <dgm:linClrLst meth="repeat">
+      <a:schemeClr val="accent1">
+        <a:tint val="60000"/>
+      </a:schemeClr>
+    </dgm:linClrLst>
+    <dgm:effectClrLst/>
+    <dgm:txLinClrLst/>
+    <dgm:txFillClrLst meth="repeat">
+      <a:schemeClr val="lt1"/>
+    </dgm:txFillClrLst>
+    <dgm:txEffectClrLst/>
+  </dgm:styleLbl>
+  <dgm:styleLbl name="parChTrans2D2">
+    <dgm:fillClrLst meth="repeat">
+      <a:schemeClr val="accent1"/>
+    </dgm:fillClrLst>
+    <dgm:linClrLst meth="repeat">
+      <a:schemeClr val="accent1"/>
+    </dgm:linClrLst>
+    <dgm:effectClrLst/>
+    <dgm:txLinClrLst/>
+    <dgm:txFillClrLst meth="repeat">
+      <a:schemeClr val="lt1"/>
+    </dgm:txFillClrLst>
+    <dgm:txEffectClrLst/>
+  </dgm:styleLbl>
+  <dgm:styleLbl name="parChTrans2D3">
+    <dgm:fillClrLst meth="repeat">
+      <a:schemeClr val="accent1"/>
+    </dgm:fillClrLst>
+    <dgm:linClrLst meth="repeat">
+      <a:schemeClr val="accent1"/>
+    </dgm:linClrLst>
+    <dgm:effectClrLst/>
+    <dgm:txLinClrLst/>
+    <dgm:txFillClrLst meth="repeat">
+      <a:schemeClr val="lt1"/>
+    </dgm:txFillClrLst>
+    <dgm:txEffectClrLst/>
+  </dgm:styleLbl>
+  <dgm:styleLbl name="parChTrans2D4">
+    <dgm:fillClrLst meth="repeat">
+      <a:schemeClr val="accent1"/>
+    </dgm:fillClrLst>
+    <dgm:linClrLst meth="repeat">
+      <a:schemeClr val="accent1"/>
+    </dgm:linClrLst>
+    <dgm:effectClrLst/>
+    <dgm:txLinClrLst/>
+    <dgm:txFillClrLst meth="repeat">
+      <a:schemeClr val="lt1"/>
+    </dgm:txFillClrLst>
+    <dgm:txEffectClrLst/>
+  </dgm:styleLbl>
+  <dgm:styleLbl name="parChTrans1D1">
+    <dgm:fillClrLst meth="repeat">
+      <a:schemeClr val="accent1"/>
+    </dgm:fillClrLst>
+    <dgm:linClrLst meth="repeat">
+      <a:schemeClr val="accent1">
+        <a:shade val="60000"/>
+      </a:schemeClr>
+    </dgm:linClrLst>
+    <dgm:effectClrLst/>
+    <dgm:txLinClrLst/>
+    <dgm:txFillClrLst meth="repeat">
+      <a:schemeClr val="tx1"/>
+    </dgm:txFillClrLst>
+    <dgm:txEffectClrLst/>
+  </dgm:styleLbl>
+  <dgm:styleLbl name="parChTrans1D2">
+    <dgm:fillClrLst meth="repeat">
+      <a:schemeClr val="accent1"/>
+    </dgm:fillClrLst>
+    <dgm:linClrLst meth="repeat">
+      <a:schemeClr val="accent1">
+        <a:shade val="60000"/>
+      </a:schemeClr>
+    </dgm:linClrLst>
+    <dgm:effectClrLst/>
+    <dgm:txLinClrLst/>
+    <dgm:txFillClrLst meth="repeat">
+      <a:schemeClr val="tx1"/>
+    </dgm:txFillClrLst>
+    <dgm:txEffectClrLst/>
+  </dgm:styleLbl>
+  <dgm:styleLbl name="parChTrans1D3">
+    <dgm:fillClrLst meth="repeat">
+      <a:schemeClr val="accent1"/>
+    </dgm:fillClrLst>
+    <dgm:linClrLst meth="repeat">
+      <a:schemeClr val="accent1">
+        <a:shade val="80000"/>
+      </a:schemeClr>
+    </dgm:linClrLst>
+    <dgm:effectClrLst/>
+    <dgm:txLinClrLst/>
+    <dgm:txFillClrLst meth="repeat">
+      <a:schemeClr val="tx1"/>
+    </dgm:txFillClrLst>
+    <dgm:txEffectClrLst/>
+  </dgm:styleLbl>
+  <dgm:styleLbl name="parChTrans1D4">
+    <dgm:fillClrLst meth="repeat">
+      <a:schemeClr val="accent1"/>
+    </dgm:fillClrLst>
+    <dgm:linClrLst meth="repeat">
+      <a:schemeClr val="accent1">
+        <a:shade val="80000"/>
+      </a:schemeClr>
+    </dgm:linClrLst>
+    <dgm:effectClrLst/>
+    <dgm:txLinClrLst/>
+    <dgm:txFillClrLst meth="repeat">
+      <a:schemeClr val="tx1"/>
+    </dgm:txFillClrLst>
+    <dgm:txEffectClrLst/>
+  </dgm:styleLbl>
+  <dgm:styleLbl name="fgAcc1">
+    <dgm:fillClrLst meth="repeat">
+      <a:schemeClr val="lt1">
+        <a:alpha val="90000"/>
+      </a:schemeClr>
+    </dgm:fillClrLst>
+    <dgm:linClrLst meth="repeat">
+      <a:schemeClr val="accent1"/>
+    </dgm:linClrLst>
+    <dgm:effectClrLst/>
+    <dgm:txLinClrLst/>
+    <dgm:txFillClrLst meth="repeat">
+      <a:schemeClr val="dk1"/>
+    </dgm:txFillClrLst>
+    <dgm:txEffectClrLst/>
+  </dgm:styleLbl>
+  <dgm:styleLbl name="conFgAcc1">
+    <dgm:fillClrLst meth="repeat">
+      <a:schemeClr val="lt1">
+        <a:alpha val="90000"/>
+      </a:schemeClr>
+    </dgm:fillClrLst>
+    <dgm:linClrLst meth="repeat">
+      <a:schemeClr val="accent1"/>
+    </dgm:linClrLst>
+    <dgm:effectClrLst/>
+    <dgm:txLinClrLst/>
+    <dgm:txFillClrLst meth="repeat">
+      <a:schemeClr val="dk1"/>
+    </dgm:txFillClrLst>
+    <dgm:txEffectClrLst/>
+  </dgm:styleLbl>
+  <dgm:styleLbl name="alignAcc1">
+    <dgm:fillClrLst meth="repeat">
+      <a:schemeClr val="lt1">
+        <a:alpha val="90000"/>
+      </a:schemeClr>
+    </dgm:fillClrLst>
+    <dgm:linClrLst meth="repeat">
+      <a:schemeClr val="accent1"/>
+    </dgm:linClrLst>
+    <dgm:effectClrLst/>
+    <dgm:txLinClrLst/>
+    <dgm:txFillClrLst meth="repeat">
+      <a:schemeClr val="dk1"/>
+    </dgm:txFillClrLst>
+    <dgm:txEffectClrLst/>
+  </dgm:styleLbl>
+  <dgm:styleLbl name="trAlignAcc1">
+    <dgm:fillClrLst meth="repeat">
+      <a:schemeClr val="lt1">
+        <a:alpha val="40000"/>
+      </a:schemeClr>
+    </dgm:fillClrLst>
+    <dgm:linClrLst meth="repeat">
+      <a:schemeClr val="accent1"/>
+    </dgm:linClrLst>
+    <dgm:effectClrLst/>
+    <dgm:txLinClrLst/>
+    <dgm:txFillClrLst meth="repeat">
+      <a:schemeClr val="dk1"/>
+    </dgm:txFillClrLst>
+    <dgm:txEffectClrLst/>
+  </dgm:styleLbl>
+  <dgm:styleLbl name="bgAcc1">
+    <dgm:fillClrLst meth="repeat">
+      <a:schemeClr val="lt1">
+        <a:alpha val="90000"/>
+      </a:schemeClr>
+    </dgm:fillClrLst>
+    <dgm:linClrLst meth="repeat">
+      <a:schemeClr val="accent1"/>
+    </dgm:linClrLst>
+    <dgm:effectClrLst/>
+    <dgm:txLinClrLst/>
+    <dgm:txFillClrLst meth="repeat">
+      <a:schemeClr val="dk1"/>
+    </dgm:txFillClrLst>
+    <dgm:txEffectClrLst/>
+  </dgm:styleLbl>
+  <dgm:styleLbl name="solidFgAcc1">
+    <dgm:fillClrLst meth="repeat">
+      <a:schemeClr val="lt1"/>
+    </dgm:fillClrLst>
+    <dgm:linClrLst meth="repeat">
+      <a:schemeClr val="accent1"/>
+    </dgm:linClrLst>
+    <dgm:effectClrLst/>
+    <dgm:txLinClrLst/>
+    <dgm:txFillClrLst meth="repeat">
+      <a:schemeClr val="dk1"/>
+    </dgm:txFillClrLst>
+    <dgm:txEffectClrLst/>
+  </dgm:styleLbl>
+  <dgm:styleLbl name="solidAlignAcc1">
+    <dgm:fillClrLst meth="repeat">
+      <a:schemeClr val="lt1"/>
+    </dgm:fillClrLst>
+    <dgm:linClrLst meth="repeat">
+      <a:schemeClr val="accent1"/>
+    </dgm:linClrLst>
+    <dgm:effectClrLst/>
+    <dgm:txLinClrLst/>
+    <dgm:txFillClrLst meth="repeat">
+      <a:schemeClr val="dk1"/>
+    </dgm:txFillClrLst>
+    <dgm:txEffectClrLst/>
+  </dgm:styleLbl>
+  <dgm:styleLbl name="solidBgAcc1">
+    <dgm:fillClrLst meth="repeat">
+      <a:schemeClr val="lt1"/>
+    </dgm:fillClrLst>
+    <dgm:linClrLst meth="repeat">
+      <a:schemeClr val="accent1"/>
+    </dgm:linClrLst>
+    <dgm:effectClrLst/>
+    <dgm:txLinClrLst/>
+    <dgm:txFillClrLst meth="repeat">
+      <a:schemeClr val="dk1"/>
+    </dgm:txFillClrLst>
+    <dgm:txEffectClrLst/>
+  </dgm:styleLbl>
+  <dgm:styleLbl name="fgAccFollowNode1">
+    <dgm:fillClrLst meth="repeat">
+      <a:schemeClr val="accent1">
+        <a:alpha val="90000"/>
+        <a:tint val="40000"/>
+      </a:schemeClr>
+    </dgm:fillClrLst>
+    <dgm:linClrLst meth="repeat">
+      <a:schemeClr val="accent1">
+        <a:alpha val="90000"/>
+        <a:tint val="40000"/>
+      </a:schemeClr>
+    </dgm:linClrLst>
+    <dgm:effectClrLst/>
+    <dgm:txLinClrLst/>
+    <dgm:txFillClrLst meth="repeat">
+      <a:schemeClr val="dk1"/>
+    </dgm:txFillClrLst>
+    <dgm:txEffectClrLst/>
+  </dgm:styleLbl>
+  <dgm:styleLbl name="alignAccFollowNode1">
+    <dgm:fillClrLst meth="repeat">
+      <a:schemeClr val="accent1">
+        <a:alpha val="90000"/>
+        <a:tint val="40000"/>
+      </a:schemeClr>
+    </dgm:fillClrLst>
+    <dgm:linClrLst meth="repeat">
+      <a:schemeClr val="accent1">
+        <a:alpha val="90000"/>
+        <a:tint val="40000"/>
+      </a:schemeClr>
+    </dgm:linClrLst>
+    <dgm:effectClrLst/>
+    <dgm:txLinClrLst/>
+    <dgm:txFillClrLst meth="repeat">
+      <a:schemeClr val="dk1"/>
+    </dgm:txFillClrLst>
+    <dgm:txEffectClrLst/>
+  </dgm:styleLbl>
+  <dgm:styleLbl name="bgAccFollowNode1">
+    <dgm:fillClrLst meth="repeat">
+      <a:schemeClr val="accent1">
+        <a:alpha val="90000"/>
+        <a:tint val="40000"/>
+      </a:schemeClr>
+    </dgm:fillClrLst>
+    <dgm:linClrLst meth="repeat">
+      <a:schemeClr val="accent1">
+        <a:alpha val="90000"/>
+        <a:tint val="40000"/>
+      </a:schemeClr>
+    </dgm:linClrLst>
+    <dgm:effectClrLst/>
+    <dgm:txLinClrLst/>
+    <dgm:txFillClrLst meth="repeat">
+      <a:schemeClr val="dk1"/>
+    </dgm:txFillClrLst>
+    <dgm:txEffectClrLst/>
+  </dgm:styleLbl>
+  <dgm:styleLbl name="fgAcc0">
+    <dgm:fillClrLst meth="repeat">
+      <a:schemeClr val="lt1">
+        <a:alpha val="90000"/>
+      </a:schemeClr>
+    </dgm:fillClrLst>
+    <dgm:linClrLst meth="repeat">
+      <a:schemeClr val="accent1"/>
+    </dgm:linClrLst>
+    <dgm:effectClrLst/>
+    <dgm:txLinClrLst/>
+    <dgm:txFillClrLst meth="repeat">
+      <a:schemeClr val="dk1"/>
+    </dgm:txFillClrLst>
+    <dgm:txEffectClrLst/>
+  </dgm:styleLbl>
+  <dgm:styleLbl name="fgAcc2">
+    <dgm:fillClrLst meth="repeat">
+      <a:schemeClr val="lt1">
+        <a:alpha val="90000"/>
+      </a:schemeClr>
+    </dgm:fillClrLst>
+    <dgm:linClrLst meth="repeat">
+      <a:schemeClr val="accent1"/>
+    </dgm:linClrLst>
+    <dgm:effectClrLst/>
+    <dgm:txLinClrLst/>
+    <dgm:txFillClrLst meth="repeat">
+      <a:schemeClr val="dk1"/>
+    </dgm:txFillClrLst>
+    <dgm:txEffectClrLst/>
+  </dgm:styleLbl>
+  <dgm:styleLbl name="fgAcc3">
+    <dgm:fillClrLst meth="repeat">
+      <a:schemeClr val="lt1">
+        <a:alpha val="90000"/>
+      </a:schemeClr>
+    </dgm:fillClrLst>
+    <dgm:linClrLst meth="repeat">
+      <a:schemeClr val="accent1"/>
+    </dgm:linClrLst>
+    <dgm:effectClrLst/>
+    <dgm:txLinClrLst/>
+    <dgm:txFillClrLst meth="repeat">
+      <a:schemeClr val="dk1"/>
+    </dgm:txFillClrLst>
+    <dgm:txEffectClrLst/>
+  </dgm:styleLbl>
+  <dgm:styleLbl name="fgAcc4">
+    <dgm:fillClrLst meth="repeat">
+      <a:schemeClr val="lt1">
+        <a:alpha val="90000"/>
+      </a:schemeClr>
+    </dgm:fillClrLst>
+    <dgm:linClrLst meth="repeat">
+      <a:schemeClr val="accent1"/>
+    </dgm:linClrLst>
+    <dgm:effectClrLst/>
+    <dgm:txLinClrLst/>
+    <dgm:txFillClrLst meth="repeat">
+      <a:schemeClr val="dk1"/>
+    </dgm:txFillClrLst>
+    <dgm:txEffectClrLst/>
+  </dgm:styleLbl>
+  <dgm:styleLbl name="bgShp">
+    <dgm:fillClrLst meth="repeat">
+      <a:schemeClr val="accent1">
+        <a:tint val="40000"/>
+      </a:schemeClr>
+    </dgm:fillClrLst>
+    <dgm:linClrLst meth="repeat">
+      <a:schemeClr val="accent1"/>
+    </dgm:linClrLst>
+    <dgm:effectClrLst/>
+    <dgm:txLinClrLst/>
+    <dgm:txFillClrLst meth="repeat">
+      <a:schemeClr val="dk1"/>
+    </dgm:txFillClrLst>
+    <dgm:txEffectClrLst/>
+  </dgm:styleLbl>
+  <dgm:styleLbl name="dkBgShp">
+    <dgm:fillClrLst meth="repeat">
+      <a:schemeClr val="accent1">
+        <a:shade val="80000"/>
+      </a:schemeClr>
+    </dgm:fillClrLst>
+    <dgm:linClrLst meth="repeat">
+      <a:schemeClr val="accent1"/>
+    </dgm:linClrLst>
+    <dgm:effectClrLst/>
+    <dgm:txLinClrLst/>
+    <dgm:txFillClrLst meth="repeat">
+      <a:schemeClr val="lt1"/>
+    </dgm:txFillClrLst>
+    <dgm:txEffectClrLst/>
+  </dgm:styleLbl>
+  <dgm:styleLbl name="trBgShp">
+    <dgm:fillClrLst meth="repeat">
+      <a:schemeClr val="accent1">
+        <a:tint val="50000"/>
+        <a:alpha val="40000"/>
+      </a:schemeClr>
+    </dgm:fillClrLst>
+    <dgm:linClrLst meth="repeat">
+      <a:schemeClr val="accent1"/>
+    </dgm:linClrLst>
+    <dgm:effectClrLst/>
+    <dgm:txLinClrLst/>
+    <dgm:txFillClrLst meth="repeat">
+      <a:schemeClr val="lt1"/>
+    </dgm:txFillClrLst>
+    <dgm:txEffectClrLst/>
+  </dgm:styleLbl>
+  <dgm:styleLbl name="fgShp">
+    <dgm:fillClrLst meth="repeat">
+      <a:schemeClr val="accent1">
+        <a:tint val="60000"/>
+      </a:schemeClr>
+    </dgm:fillClrLst>
+    <dgm:linClrLst meth="repeat">
+      <a:schemeClr val="lt1"/>
+    </dgm:linClrLst>
+    <dgm:effectClrLst/>
+    <dgm:txLinClrLst/>
+    <dgm:txFillClrLst meth="repeat">
+      <a:schemeClr val="dk1"/>
+    </dgm:txFillClrLst>
+    <dgm:txEffectClrLst/>
+  </dgm:styleLbl>
+  <dgm:styleLbl name="revTx">
+    <dgm:fillClrLst meth="repeat">
+      <a:schemeClr val="lt1">
+        <a:alpha val="0"/>
+      </a:schemeClr>
+    </dgm:fillClrLst>
+    <dgm:linClrLst meth="repeat">
+      <a:schemeClr val="dk1">
+        <a:alpha val="0"/>
+      </a:schemeClr>
+    </dgm:linClrLst>
+    <dgm:effectClrLst/>
+    <dgm:txLinClrLst/>
+    <dgm:txFillClrLst meth="repeat">
+      <a:schemeClr val="tx1"/>
+    </dgm:txFillClrLst>
+    <dgm:txEffectClrLst/>
+  </dgm:styleLbl>
+</dgm:colorsDef>
+</file>
+
+<file path=ppt/diagrams/data1.xml><?xml version="1.0" encoding="utf-8"?>
+<dgm:dataModel xmlns:dgm="http://schemas.openxmlformats.org/drawingml/2006/diagram" xmlns:a="http://schemas.openxmlformats.org/drawingml/2006/main">
+  <dgm:ptLst>
+    <dgm:pt modelId="{95D8496A-34C5-4580-A71E-43C7E7D2EF4D}" type="doc">
+      <dgm:prSet loTypeId="urn:microsoft.com/office/officeart/2005/8/layout/hList2" loCatId="list" qsTypeId="urn:microsoft.com/office/officeart/2005/8/quickstyle/simple1" qsCatId="simple" csTypeId="urn:microsoft.com/office/officeart/2005/8/colors/accent1_2" csCatId="accent1" phldr="1"/>
+      <dgm:spPr/>
+      <dgm:t>
+        <a:bodyPr/>
+        <a:lstStyle/>
+        <a:p>
+          <a:endParaRPr lang="fr-FR"/>
+        </a:p>
+      </dgm:t>
+    </dgm:pt>
+    <dgm:pt modelId="{57B3C823-9F53-4DFD-A409-62F0C927A71A}">
+      <dgm:prSet phldrT="[Texte]" phldr="0"/>
+      <dgm:spPr/>
+      <dgm:t>
+        <a:bodyPr/>
+        <a:lstStyle/>
+        <a:p>
+          <a:r>
+            <a:rPr lang="fr-FR" dirty="0"/>
+            <a:t>MINUS</a:t>
+          </a:r>
+        </a:p>
+      </dgm:t>
+    </dgm:pt>
+    <dgm:pt modelId="{65A6F5E5-4EC0-4BB3-9950-88B8BDEACDFF}" type="parTrans" cxnId="{D6B06087-4A3D-45F7-A65D-238094D9F9DC}">
+      <dgm:prSet/>
+      <dgm:spPr/>
+      <dgm:t>
+        <a:bodyPr/>
+        <a:lstStyle/>
+        <a:p>
+          <a:endParaRPr lang="fr-FR"/>
+        </a:p>
+      </dgm:t>
+    </dgm:pt>
+    <dgm:pt modelId="{8EE9A102-5F61-4378-BDF5-69D461FAE704}" type="sibTrans" cxnId="{D6B06087-4A3D-45F7-A65D-238094D9F9DC}">
+      <dgm:prSet/>
+      <dgm:spPr/>
+      <dgm:t>
+        <a:bodyPr/>
+        <a:lstStyle/>
+        <a:p>
+          <a:endParaRPr lang="fr-FR"/>
+        </a:p>
+      </dgm:t>
+    </dgm:pt>
+    <dgm:pt modelId="{D9F91AD2-EDB5-4FBB-937E-A0C054CF5037}">
+      <dgm:prSet phldrT="[Texte]" phldr="1"/>
+      <dgm:spPr/>
+      <dgm:t>
+        <a:bodyPr/>
+        <a:lstStyle/>
+        <a:p>
+          <a:endParaRPr lang="fr-FR"/>
+        </a:p>
+      </dgm:t>
+    </dgm:pt>
+    <dgm:pt modelId="{3804E0FD-2077-4F53-BBA5-DB0F7BB07399}" type="parTrans" cxnId="{796DB1A8-9871-459C-B687-E3A5E30BADA5}">
+      <dgm:prSet/>
+      <dgm:spPr/>
+      <dgm:t>
+        <a:bodyPr/>
+        <a:lstStyle/>
+        <a:p>
+          <a:endParaRPr lang="fr-FR"/>
+        </a:p>
+      </dgm:t>
+    </dgm:pt>
+    <dgm:pt modelId="{318793A9-0974-4A6B-AB6C-B17C12E53183}" type="sibTrans" cxnId="{796DB1A8-9871-459C-B687-E3A5E30BADA5}">
+      <dgm:prSet/>
+      <dgm:spPr/>
+      <dgm:t>
+        <a:bodyPr/>
+        <a:lstStyle/>
+        <a:p>
+          <a:endParaRPr lang="fr-FR"/>
+        </a:p>
+      </dgm:t>
+    </dgm:pt>
+    <dgm:pt modelId="{4B9ABEEF-6CA9-4321-B915-4C43171FD9E9}">
+      <dgm:prSet phldrT="[Texte]"/>
+      <dgm:spPr/>
+      <dgm:t>
+        <a:bodyPr/>
+        <a:lstStyle/>
+        <a:p>
+          <a:r>
+            <a:rPr lang="fr-FR" dirty="0"/>
+            <a:t>2026	10	0	6 177	9504
+2026	11	0	6 877	10581
+2026	12	0	7 184	11053
+2026	13	0	7 149	10999
+2026	14	0	7 474	11499
+2026	15	0	6 572	10112
+2026	16	0	7 568	11644
+2026	17	0	7 928	12198
+2026	18	0	7 049	10845
+2026	19	0	6 704	10315
+2026	20	0	5 746	8841
+2026	21	0	6 870	10570
+2026	22	0	5 813	8943
+2026	23	0	6 061	9325
+2026	24	0	6 541	10063
+2026	25	0	6 587	10135
+2026	26	0	6 137	9443
+2026	27	0	6 159	9476
+2026	28	0	6 475	9962
+2026	29	0	5 479	8430
+2026	30	0	7 316	11257
+2026	31	0	8 414	12946
+</a:t>
+          </a:r>
+        </a:p>
+      </dgm:t>
+    </dgm:pt>
+    <dgm:pt modelId="{BE1B3F04-CF99-4CEF-84D6-54DDEE990E79}" type="parTrans" cxnId="{988446B4-BBCA-403F-B1D2-FD2FD17EE83E}">
+      <dgm:prSet/>
+      <dgm:spPr/>
+      <dgm:t>
+        <a:bodyPr/>
+        <a:lstStyle/>
+        <a:p>
+          <a:endParaRPr lang="fr-FR"/>
+        </a:p>
+      </dgm:t>
+    </dgm:pt>
+    <dgm:pt modelId="{91117F8C-9529-471A-A24D-AF1640FF7F82}" type="sibTrans" cxnId="{988446B4-BBCA-403F-B1D2-FD2FD17EE83E}">
+      <dgm:prSet/>
+      <dgm:spPr/>
+      <dgm:t>
+        <a:bodyPr/>
+        <a:lstStyle/>
+        <a:p>
+          <a:endParaRPr lang="fr-FR"/>
+        </a:p>
+      </dgm:t>
+    </dgm:pt>
+    <dgm:pt modelId="{8B5165E9-BB20-4551-A0DD-D76DC5E9119D}">
+      <dgm:prSet phldrT="[Texte]" phldr="0"/>
+      <dgm:spPr/>
+      <dgm:t>
+        <a:bodyPr/>
+        <a:lstStyle/>
+        <a:p>
+          <a:r>
+            <a:rPr lang="fr-FR" dirty="0"/>
+            <a:t>CORTEX EXOG</a:t>
+          </a:r>
+        </a:p>
+      </dgm:t>
+    </dgm:pt>
+    <dgm:pt modelId="{BBE6117F-8FFB-443B-840C-50AD00AEA176}" type="parTrans" cxnId="{6314D077-1695-4E69-B0EB-CE6DA3C3C31F}">
+      <dgm:prSet/>
+      <dgm:spPr/>
+      <dgm:t>
+        <a:bodyPr/>
+        <a:lstStyle/>
+        <a:p>
+          <a:endParaRPr lang="fr-FR"/>
+        </a:p>
+      </dgm:t>
+    </dgm:pt>
+    <dgm:pt modelId="{BBAF371F-F667-4949-9133-1C9223D42986}" type="sibTrans" cxnId="{6314D077-1695-4E69-B0EB-CE6DA3C3C31F}">
+      <dgm:prSet/>
+      <dgm:spPr/>
+      <dgm:t>
+        <a:bodyPr/>
+        <a:lstStyle/>
+        <a:p>
+          <a:endParaRPr lang="fr-FR"/>
+        </a:p>
+      </dgm:t>
+    </dgm:pt>
+    <dgm:pt modelId="{69FD442A-F1B0-4109-9716-F765C73610C3}">
+      <dgm:prSet phldrT="[Texte]"/>
+      <dgm:spPr/>
+      <dgm:t>
+        <a:bodyPr/>
+        <a:lstStyle/>
+        <a:p>
+          <a:r>
+            <a:rPr lang="fr-FR" dirty="0"/>
+            <a:t>2026	10	0	6 108	9398
+2026	11	0	6 726	10348
+2026	12	0	7 012	10788
+2026	13	0	6 985	10747
+2026	14	0	7 183	11052
+2026	15	0	6 234	9592
+2026	16	0	7 148	10997
+2026	17	0	7 568	11643
+2026	18	0	6 919	10646
+2026	19	0	6 785	10439
+2026	20	0	5 983	9206
+2026	21	0	7 075	10886
+2026	22	0	6 009	9246
+2026	23	0	6 355	9778
+2026	24	0	6 895	10608
+2026	25	0	6 960	10709
+2026	26	0	6 412	9865
+2026	27	0	6 230	9585
+2026	28	0	6 381	9818
+2026	29	0	5 344	8222
+2026	30	0	7 184	11053
+2026	31	0	8 264	12715
+</a:t>
+          </a:r>
+        </a:p>
+      </dgm:t>
+    </dgm:pt>
+    <dgm:pt modelId="{A0295612-DAC2-4D5F-94E1-E3477784FE7A}" type="parTrans" cxnId="{6B5971E7-B11C-49E5-9F23-7B1C92ADFA94}">
+      <dgm:prSet/>
+      <dgm:spPr/>
+      <dgm:t>
+        <a:bodyPr/>
+        <a:lstStyle/>
+        <a:p>
+          <a:endParaRPr lang="fr-FR"/>
+        </a:p>
+      </dgm:t>
+    </dgm:pt>
+    <dgm:pt modelId="{1A4E7CFB-1D7D-4FFC-A88E-A43999F8F0F6}" type="sibTrans" cxnId="{6B5971E7-B11C-49E5-9F23-7B1C92ADFA94}">
+      <dgm:prSet/>
+      <dgm:spPr/>
+      <dgm:t>
+        <a:bodyPr/>
+        <a:lstStyle/>
+        <a:p>
+          <a:endParaRPr lang="fr-FR"/>
+        </a:p>
+      </dgm:t>
+    </dgm:pt>
+    <dgm:pt modelId="{1F2709E7-1F3A-4150-8441-756D6FCC9C96}">
+      <dgm:prSet phldrT="[Texte]" phldr="0"/>
+      <dgm:spPr/>
+      <dgm:t>
+        <a:bodyPr/>
+        <a:lstStyle/>
+        <a:p>
+          <a:r>
+            <a:rPr lang="fr-FR" dirty="0"/>
+            <a:t>CORTEXEXOGTarifs2026</a:t>
+          </a:r>
+        </a:p>
+      </dgm:t>
+    </dgm:pt>
+    <dgm:pt modelId="{97BFAB63-AFC8-4E1C-BB3E-A279C5FA7613}" type="parTrans" cxnId="{FD351750-4724-4756-959E-8A8AD3237FE2}">
+      <dgm:prSet/>
+      <dgm:spPr/>
+      <dgm:t>
+        <a:bodyPr/>
+        <a:lstStyle/>
+        <a:p>
+          <a:endParaRPr lang="fr-FR"/>
+        </a:p>
+      </dgm:t>
+    </dgm:pt>
+    <dgm:pt modelId="{70ADF957-6A54-45A2-A300-0D254B1A4D5E}" type="sibTrans" cxnId="{FD351750-4724-4756-959E-8A8AD3237FE2}">
+      <dgm:prSet/>
+      <dgm:spPr/>
+      <dgm:t>
+        <a:bodyPr/>
+        <a:lstStyle/>
+        <a:p>
+          <a:endParaRPr lang="fr-FR"/>
+        </a:p>
+      </dgm:t>
+    </dgm:pt>
+    <dgm:pt modelId="{1CE63668-52C3-4C98-B455-15E3EE2941E1}">
+      <dgm:prSet phldrT="[Texte]" phldr="1"/>
+      <dgm:spPr/>
+      <dgm:t>
+        <a:bodyPr/>
+        <a:lstStyle/>
+        <a:p>
+          <a:endParaRPr lang="fr-FR"/>
+        </a:p>
+      </dgm:t>
+    </dgm:pt>
+    <dgm:pt modelId="{24400AFA-CCFD-474F-BD5C-917610F53DD1}" type="parTrans" cxnId="{2446DA80-768C-4C94-A965-9AE9D5F3ED6D}">
+      <dgm:prSet/>
+      <dgm:spPr/>
+      <dgm:t>
+        <a:bodyPr/>
+        <a:lstStyle/>
+        <a:p>
+          <a:endParaRPr lang="fr-FR"/>
+        </a:p>
+      </dgm:t>
+    </dgm:pt>
+    <dgm:pt modelId="{49F765D1-2590-4D47-89AD-A5716FE5128F}" type="sibTrans" cxnId="{2446DA80-768C-4C94-A965-9AE9D5F3ED6D}">
+      <dgm:prSet/>
+      <dgm:spPr/>
+      <dgm:t>
+        <a:bodyPr/>
+        <a:lstStyle/>
+        <a:p>
+          <a:endParaRPr lang="fr-FR"/>
+        </a:p>
+      </dgm:t>
+    </dgm:pt>
+    <dgm:pt modelId="{D430A6C7-70A6-4120-B1A5-C8A35F78FC56}">
+      <dgm:prSet/>
+      <dgm:spPr/>
+      <dgm:t>
+        <a:bodyPr/>
+        <a:lstStyle/>
+        <a:p>
+          <a:r>
+            <a:rPr lang="fr-FR" dirty="0"/>
+            <a:t>2026	10	0	6 122	9420
+2026	11	0	6 760	10400
+2026	12	0	7 061	10863
+2026	13	0	7 048	10843
+2026	14	0	7 208	11091
+2026	15	0	6 254	9622
+2026	16	0	7 190	11062
+2026	17	0	7 616	11718
+2026	18	0	6 945	10686
+2026	19	0	6 793	10451
+2026	20	0	6 030	9278
+2026	21	0	7 128	10966
+2026	22	0	6 074	9346
+2026	23	0	6 394	9837
+2026	24	0	6 946	10687
+2026	25	0	7 030	10816
+2026	26	0	6 503	10005
+2026	27	0	6 279	9661
+2026	28	0	6 415	9871
+2026	29	0	5 403	8313
+2026	30	0	7 246	11148
+2026	31	0	8 342	12835</a:t>
+          </a:r>
+        </a:p>
+      </dgm:t>
+    </dgm:pt>
+    <dgm:pt modelId="{46404BD7-5DC0-483F-8FAA-5A82E16FD04A}" type="parTrans" cxnId="{8A2B44DD-8BEC-4026-9504-5D2245E7BE76}">
+      <dgm:prSet/>
+      <dgm:spPr/>
+      <dgm:t>
+        <a:bodyPr/>
+        <a:lstStyle/>
+        <a:p>
+          <a:endParaRPr lang="fr-FR"/>
+        </a:p>
+      </dgm:t>
+    </dgm:pt>
+    <dgm:pt modelId="{5FD5B52F-EF00-4B80-B4AC-BD36339E7417}" type="sibTrans" cxnId="{8A2B44DD-8BEC-4026-9504-5D2245E7BE76}">
+      <dgm:prSet/>
+      <dgm:spPr/>
+      <dgm:t>
+        <a:bodyPr/>
+        <a:lstStyle/>
+        <a:p>
+          <a:endParaRPr lang="fr-FR"/>
+        </a:p>
+      </dgm:t>
+    </dgm:pt>
+    <dgm:pt modelId="{22486675-CCF5-4F87-84D7-DE3C99A63C4C}" type="pres">
+      <dgm:prSet presAssocID="{95D8496A-34C5-4580-A71E-43C7E7D2EF4D}" presName="linearFlow" presStyleCnt="0">
+        <dgm:presLayoutVars>
+          <dgm:dir/>
+          <dgm:animLvl val="lvl"/>
+          <dgm:resizeHandles/>
+        </dgm:presLayoutVars>
+      </dgm:prSet>
+      <dgm:spPr/>
+    </dgm:pt>
+    <dgm:pt modelId="{C6A6AA99-3929-4E5A-8767-207FC7478BFD}" type="pres">
+      <dgm:prSet presAssocID="{57B3C823-9F53-4DFD-A409-62F0C927A71A}" presName="compositeNode" presStyleCnt="0">
+        <dgm:presLayoutVars>
+          <dgm:bulletEnabled val="1"/>
+        </dgm:presLayoutVars>
+      </dgm:prSet>
+      <dgm:spPr/>
+    </dgm:pt>
+    <dgm:pt modelId="{9BDFA353-ED46-4D80-AFC8-9E7076AE0655}" type="pres">
+      <dgm:prSet presAssocID="{57B3C823-9F53-4DFD-A409-62F0C927A71A}" presName="image" presStyleLbl="fgImgPlace1" presStyleIdx="0" presStyleCnt="3"/>
+      <dgm:spPr/>
+    </dgm:pt>
+    <dgm:pt modelId="{CAA7D2F3-A00D-4477-B9B5-17D2D64B5048}" type="pres">
+      <dgm:prSet presAssocID="{57B3C823-9F53-4DFD-A409-62F0C927A71A}" presName="childNode" presStyleLbl="node1" presStyleIdx="0" presStyleCnt="3">
+        <dgm:presLayoutVars>
+          <dgm:bulletEnabled val="1"/>
+        </dgm:presLayoutVars>
+      </dgm:prSet>
+      <dgm:spPr/>
+    </dgm:pt>
+    <dgm:pt modelId="{4EA6228C-5F7F-437E-8652-266501A24519}" type="pres">
+      <dgm:prSet presAssocID="{57B3C823-9F53-4DFD-A409-62F0C927A71A}" presName="parentNode" presStyleLbl="revTx" presStyleIdx="0" presStyleCnt="3">
+        <dgm:presLayoutVars>
+          <dgm:chMax val="0"/>
+          <dgm:bulletEnabled val="1"/>
+        </dgm:presLayoutVars>
+      </dgm:prSet>
+      <dgm:spPr/>
+    </dgm:pt>
+    <dgm:pt modelId="{54273939-EA2F-4380-8745-1AB803948945}" type="pres">
+      <dgm:prSet presAssocID="{8EE9A102-5F61-4378-BDF5-69D461FAE704}" presName="sibTrans" presStyleCnt="0"/>
+      <dgm:spPr/>
+    </dgm:pt>
+    <dgm:pt modelId="{F129FC97-4600-4F34-B7D3-5E5B419237C8}" type="pres">
+      <dgm:prSet presAssocID="{8B5165E9-BB20-4551-A0DD-D76DC5E9119D}" presName="compositeNode" presStyleCnt="0">
+        <dgm:presLayoutVars>
+          <dgm:bulletEnabled val="1"/>
+        </dgm:presLayoutVars>
+      </dgm:prSet>
+      <dgm:spPr/>
+    </dgm:pt>
+    <dgm:pt modelId="{1C790D66-7CC3-4ED2-AAD4-4678E365CD15}" type="pres">
+      <dgm:prSet presAssocID="{8B5165E9-BB20-4551-A0DD-D76DC5E9119D}" presName="image" presStyleLbl="fgImgPlace1" presStyleIdx="1" presStyleCnt="3"/>
+      <dgm:spPr/>
+    </dgm:pt>
+    <dgm:pt modelId="{7BDD2A7D-3816-4835-92DA-E10DA3112046}" type="pres">
+      <dgm:prSet presAssocID="{8B5165E9-BB20-4551-A0DD-D76DC5E9119D}" presName="childNode" presStyleLbl="node1" presStyleIdx="1" presStyleCnt="3">
+        <dgm:presLayoutVars>
+          <dgm:bulletEnabled val="1"/>
+        </dgm:presLayoutVars>
+      </dgm:prSet>
+      <dgm:spPr/>
+    </dgm:pt>
+    <dgm:pt modelId="{E6FABDBA-9B9C-4369-A77C-27ACEEB55CC2}" type="pres">
+      <dgm:prSet presAssocID="{8B5165E9-BB20-4551-A0DD-D76DC5E9119D}" presName="parentNode" presStyleLbl="revTx" presStyleIdx="1" presStyleCnt="3">
+        <dgm:presLayoutVars>
+          <dgm:chMax val="0"/>
+          <dgm:bulletEnabled val="1"/>
+        </dgm:presLayoutVars>
+      </dgm:prSet>
+      <dgm:spPr/>
+    </dgm:pt>
+    <dgm:pt modelId="{C45082B4-1DFC-4307-A6EE-E02D3C71C17D}" type="pres">
+      <dgm:prSet presAssocID="{BBAF371F-F667-4949-9133-1C9223D42986}" presName="sibTrans" presStyleCnt="0"/>
+      <dgm:spPr/>
+    </dgm:pt>
+    <dgm:pt modelId="{6BEC9142-7E3E-4FA2-BE9E-585FBDD76038}" type="pres">
+      <dgm:prSet presAssocID="{1F2709E7-1F3A-4150-8441-756D6FCC9C96}" presName="compositeNode" presStyleCnt="0">
+        <dgm:presLayoutVars>
+          <dgm:bulletEnabled val="1"/>
+        </dgm:presLayoutVars>
+      </dgm:prSet>
+      <dgm:spPr/>
+    </dgm:pt>
+    <dgm:pt modelId="{7257F43F-E963-4FCC-A8E2-C9A3A2C7BA70}" type="pres">
+      <dgm:prSet presAssocID="{1F2709E7-1F3A-4150-8441-756D6FCC9C96}" presName="image" presStyleLbl="fgImgPlace1" presStyleIdx="2" presStyleCnt="3"/>
+      <dgm:spPr/>
+    </dgm:pt>
+    <dgm:pt modelId="{F2D1B3E5-758F-4DB7-8CB8-E4EBF0632939}" type="pres">
+      <dgm:prSet presAssocID="{1F2709E7-1F3A-4150-8441-756D6FCC9C96}" presName="childNode" presStyleLbl="node1" presStyleIdx="2" presStyleCnt="3">
+        <dgm:presLayoutVars>
+          <dgm:bulletEnabled val="1"/>
+        </dgm:presLayoutVars>
+      </dgm:prSet>
+      <dgm:spPr/>
+    </dgm:pt>
+    <dgm:pt modelId="{396EE9A6-0AAF-4EE7-8F0B-C63AC0E6E912}" type="pres">
+      <dgm:prSet presAssocID="{1F2709E7-1F3A-4150-8441-756D6FCC9C96}" presName="parentNode" presStyleLbl="revTx" presStyleIdx="2" presStyleCnt="3">
+        <dgm:presLayoutVars>
+          <dgm:chMax val="0"/>
+          <dgm:bulletEnabled val="1"/>
+        </dgm:presLayoutVars>
+      </dgm:prSet>
+      <dgm:spPr/>
+    </dgm:pt>
+  </dgm:ptLst>
+  <dgm:cxnLst>
+    <dgm:cxn modelId="{DBFF4904-904B-45F2-A4F9-8A65CC50A1F7}" type="presOf" srcId="{1CE63668-52C3-4C98-B455-15E3EE2941E1}" destId="{F2D1B3E5-758F-4DB7-8CB8-E4EBF0632939}" srcOrd="0" destOrd="0" presId="urn:microsoft.com/office/officeart/2005/8/layout/hList2"/>
+    <dgm:cxn modelId="{D067EE13-BD63-4302-B6FD-79DD7FF05EA5}" type="presOf" srcId="{8B5165E9-BB20-4551-A0DD-D76DC5E9119D}" destId="{E6FABDBA-9B9C-4369-A77C-27ACEEB55CC2}" srcOrd="0" destOrd="0" presId="urn:microsoft.com/office/officeart/2005/8/layout/hList2"/>
+    <dgm:cxn modelId="{FF21756B-2869-433F-8801-8649CC679535}" type="presOf" srcId="{D9F91AD2-EDB5-4FBB-937E-A0C054CF5037}" destId="{CAA7D2F3-A00D-4477-B9B5-17D2D64B5048}" srcOrd="0" destOrd="0" presId="urn:microsoft.com/office/officeart/2005/8/layout/hList2"/>
+    <dgm:cxn modelId="{FD351750-4724-4756-959E-8A8AD3237FE2}" srcId="{95D8496A-34C5-4580-A71E-43C7E7D2EF4D}" destId="{1F2709E7-1F3A-4150-8441-756D6FCC9C96}" srcOrd="2" destOrd="0" parTransId="{97BFAB63-AFC8-4E1C-BB3E-A279C5FA7613}" sibTransId="{70ADF957-6A54-45A2-A300-0D254B1A4D5E}"/>
+    <dgm:cxn modelId="{0C3D8373-B204-4303-8EBA-91D18CBCA36B}" type="presOf" srcId="{1F2709E7-1F3A-4150-8441-756D6FCC9C96}" destId="{396EE9A6-0AAF-4EE7-8F0B-C63AC0E6E912}" srcOrd="0" destOrd="0" presId="urn:microsoft.com/office/officeart/2005/8/layout/hList2"/>
+    <dgm:cxn modelId="{6314D077-1695-4E69-B0EB-CE6DA3C3C31F}" srcId="{95D8496A-34C5-4580-A71E-43C7E7D2EF4D}" destId="{8B5165E9-BB20-4551-A0DD-D76DC5E9119D}" srcOrd="1" destOrd="0" parTransId="{BBE6117F-8FFB-443B-840C-50AD00AEA176}" sibTransId="{BBAF371F-F667-4949-9133-1C9223D42986}"/>
+    <dgm:cxn modelId="{2446DA80-768C-4C94-A965-9AE9D5F3ED6D}" srcId="{1F2709E7-1F3A-4150-8441-756D6FCC9C96}" destId="{1CE63668-52C3-4C98-B455-15E3EE2941E1}" srcOrd="0" destOrd="0" parTransId="{24400AFA-CCFD-474F-BD5C-917610F53DD1}" sibTransId="{49F765D1-2590-4D47-89AD-A5716FE5128F}"/>
+    <dgm:cxn modelId="{D6B06087-4A3D-45F7-A65D-238094D9F9DC}" srcId="{95D8496A-34C5-4580-A71E-43C7E7D2EF4D}" destId="{57B3C823-9F53-4DFD-A409-62F0C927A71A}" srcOrd="0" destOrd="0" parTransId="{65A6F5E5-4EC0-4BB3-9950-88B8BDEACDFF}" sibTransId="{8EE9A102-5F61-4378-BDF5-69D461FAE704}"/>
+    <dgm:cxn modelId="{796DB1A8-9871-459C-B687-E3A5E30BADA5}" srcId="{57B3C823-9F53-4DFD-A409-62F0C927A71A}" destId="{D9F91AD2-EDB5-4FBB-937E-A0C054CF5037}" srcOrd="0" destOrd="0" parTransId="{3804E0FD-2077-4F53-BBA5-DB0F7BB07399}" sibTransId="{318793A9-0974-4A6B-AB6C-B17C12E53183}"/>
+    <dgm:cxn modelId="{1A2196B2-60E7-4036-96C7-1ABE64E192FA}" type="presOf" srcId="{D430A6C7-70A6-4120-B1A5-C8A35F78FC56}" destId="{F2D1B3E5-758F-4DB7-8CB8-E4EBF0632939}" srcOrd="0" destOrd="1" presId="urn:microsoft.com/office/officeart/2005/8/layout/hList2"/>
+    <dgm:cxn modelId="{988446B4-BBCA-403F-B1D2-FD2FD17EE83E}" srcId="{57B3C823-9F53-4DFD-A409-62F0C927A71A}" destId="{4B9ABEEF-6CA9-4321-B915-4C43171FD9E9}" srcOrd="1" destOrd="0" parTransId="{BE1B3F04-CF99-4CEF-84D6-54DDEE990E79}" sibTransId="{91117F8C-9529-471A-A24D-AF1640FF7F82}"/>
+    <dgm:cxn modelId="{1876A7B5-707C-4107-A1EC-BACB25CF488B}" type="presOf" srcId="{69FD442A-F1B0-4109-9716-F765C73610C3}" destId="{7BDD2A7D-3816-4835-92DA-E10DA3112046}" srcOrd="0" destOrd="0" presId="urn:microsoft.com/office/officeart/2005/8/layout/hList2"/>
+    <dgm:cxn modelId="{B2DAA3D9-1C94-4BEF-B803-09C52B14A5D6}" type="presOf" srcId="{95D8496A-34C5-4580-A71E-43C7E7D2EF4D}" destId="{22486675-CCF5-4F87-84D7-DE3C99A63C4C}" srcOrd="0" destOrd="0" presId="urn:microsoft.com/office/officeart/2005/8/layout/hList2"/>
+    <dgm:cxn modelId="{8A2B44DD-8BEC-4026-9504-5D2245E7BE76}" srcId="{1F2709E7-1F3A-4150-8441-756D6FCC9C96}" destId="{D430A6C7-70A6-4120-B1A5-C8A35F78FC56}" srcOrd="1" destOrd="0" parTransId="{46404BD7-5DC0-483F-8FAA-5A82E16FD04A}" sibTransId="{5FD5B52F-EF00-4B80-B4AC-BD36339E7417}"/>
+    <dgm:cxn modelId="{6B5971E7-B11C-49E5-9F23-7B1C92ADFA94}" srcId="{8B5165E9-BB20-4551-A0DD-D76DC5E9119D}" destId="{69FD442A-F1B0-4109-9716-F765C73610C3}" srcOrd="0" destOrd="0" parTransId="{A0295612-DAC2-4D5F-94E1-E3477784FE7A}" sibTransId="{1A4E7CFB-1D7D-4FFC-A88E-A43999F8F0F6}"/>
+    <dgm:cxn modelId="{EBA0FCF1-617B-45C2-9699-AC00A942B6BD}" type="presOf" srcId="{57B3C823-9F53-4DFD-A409-62F0C927A71A}" destId="{4EA6228C-5F7F-437E-8652-266501A24519}" srcOrd="0" destOrd="0" presId="urn:microsoft.com/office/officeart/2005/8/layout/hList2"/>
+    <dgm:cxn modelId="{436A21F2-759B-4C91-8043-649FB6E8DC2D}" type="presOf" srcId="{4B9ABEEF-6CA9-4321-B915-4C43171FD9E9}" destId="{CAA7D2F3-A00D-4477-B9B5-17D2D64B5048}" srcOrd="0" destOrd="1" presId="urn:microsoft.com/office/officeart/2005/8/layout/hList2"/>
+    <dgm:cxn modelId="{8B67B165-6E63-4DFC-9806-301ECF517CFD}" type="presParOf" srcId="{22486675-CCF5-4F87-84D7-DE3C99A63C4C}" destId="{C6A6AA99-3929-4E5A-8767-207FC7478BFD}" srcOrd="0" destOrd="0" presId="urn:microsoft.com/office/officeart/2005/8/layout/hList2"/>
+    <dgm:cxn modelId="{7AD43293-EB50-4B08-813A-AD0FE6E37D82}" type="presParOf" srcId="{C6A6AA99-3929-4E5A-8767-207FC7478BFD}" destId="{9BDFA353-ED46-4D80-AFC8-9E7076AE0655}" srcOrd="0" destOrd="0" presId="urn:microsoft.com/office/officeart/2005/8/layout/hList2"/>
+    <dgm:cxn modelId="{9EF162E2-E4CD-44FF-B200-B4680BB392AC}" type="presParOf" srcId="{C6A6AA99-3929-4E5A-8767-207FC7478BFD}" destId="{CAA7D2F3-A00D-4477-B9B5-17D2D64B5048}" srcOrd="1" destOrd="0" presId="urn:microsoft.com/office/officeart/2005/8/layout/hList2"/>
+    <dgm:cxn modelId="{81007C53-7948-4810-981D-DF2E88D1B6D1}" type="presParOf" srcId="{C6A6AA99-3929-4E5A-8767-207FC7478BFD}" destId="{4EA6228C-5F7F-437E-8652-266501A24519}" srcOrd="2" destOrd="0" presId="urn:microsoft.com/office/officeart/2005/8/layout/hList2"/>
+    <dgm:cxn modelId="{D8A33CED-C3CB-4B3B-8496-75BB2A0F9C72}" type="presParOf" srcId="{22486675-CCF5-4F87-84D7-DE3C99A63C4C}" destId="{54273939-EA2F-4380-8745-1AB803948945}" srcOrd="1" destOrd="0" presId="urn:microsoft.com/office/officeart/2005/8/layout/hList2"/>
+    <dgm:cxn modelId="{45FE7AE7-9A02-48ED-AFFC-85C32B6A682E}" type="presParOf" srcId="{22486675-CCF5-4F87-84D7-DE3C99A63C4C}" destId="{F129FC97-4600-4F34-B7D3-5E5B419237C8}" srcOrd="2" destOrd="0" presId="urn:microsoft.com/office/officeart/2005/8/layout/hList2"/>
+    <dgm:cxn modelId="{FDFC72F0-B8BD-44E4-8B98-8FCC842A4D08}" type="presParOf" srcId="{F129FC97-4600-4F34-B7D3-5E5B419237C8}" destId="{1C790D66-7CC3-4ED2-AAD4-4678E365CD15}" srcOrd="0" destOrd="0" presId="urn:microsoft.com/office/officeart/2005/8/layout/hList2"/>
+    <dgm:cxn modelId="{17EE3245-1BB2-4323-816D-14476CDAB74A}" type="presParOf" srcId="{F129FC97-4600-4F34-B7D3-5E5B419237C8}" destId="{7BDD2A7D-3816-4835-92DA-E10DA3112046}" srcOrd="1" destOrd="0" presId="urn:microsoft.com/office/officeart/2005/8/layout/hList2"/>
+    <dgm:cxn modelId="{41500F88-378A-4E03-AAF8-A678D21FA8B2}" type="presParOf" srcId="{F129FC97-4600-4F34-B7D3-5E5B419237C8}" destId="{E6FABDBA-9B9C-4369-A77C-27ACEEB55CC2}" srcOrd="2" destOrd="0" presId="urn:microsoft.com/office/officeart/2005/8/layout/hList2"/>
+    <dgm:cxn modelId="{19B779CD-355A-4D82-908B-5ABCEC7CA2F2}" type="presParOf" srcId="{22486675-CCF5-4F87-84D7-DE3C99A63C4C}" destId="{C45082B4-1DFC-4307-A6EE-E02D3C71C17D}" srcOrd="3" destOrd="0" presId="urn:microsoft.com/office/officeart/2005/8/layout/hList2"/>
+    <dgm:cxn modelId="{F7FAA2D4-A68C-41F5-8E19-94AAE128BB84}" type="presParOf" srcId="{22486675-CCF5-4F87-84D7-DE3C99A63C4C}" destId="{6BEC9142-7E3E-4FA2-BE9E-585FBDD76038}" srcOrd="4" destOrd="0" presId="urn:microsoft.com/office/officeart/2005/8/layout/hList2"/>
+    <dgm:cxn modelId="{F806E95A-24BD-4AD1-97EE-5F7BFD824EB1}" type="presParOf" srcId="{6BEC9142-7E3E-4FA2-BE9E-585FBDD76038}" destId="{7257F43F-E963-4FCC-A8E2-C9A3A2C7BA70}" srcOrd="0" destOrd="0" presId="urn:microsoft.com/office/officeart/2005/8/layout/hList2"/>
+    <dgm:cxn modelId="{678EC37A-B14A-4C53-BBEA-FEC85F1AB4E5}" type="presParOf" srcId="{6BEC9142-7E3E-4FA2-BE9E-585FBDD76038}" destId="{F2D1B3E5-758F-4DB7-8CB8-E4EBF0632939}" srcOrd="1" destOrd="0" presId="urn:microsoft.com/office/officeart/2005/8/layout/hList2"/>
+    <dgm:cxn modelId="{726967F3-C10F-4E15-8EFD-AB2CBCB6BF79}" type="presParOf" srcId="{6BEC9142-7E3E-4FA2-BE9E-585FBDD76038}" destId="{396EE9A6-0AAF-4EE7-8F0B-C63AC0E6E912}" srcOrd="2" destOrd="0" presId="urn:microsoft.com/office/officeart/2005/8/layout/hList2"/>
+  </dgm:cxnLst>
+  <dgm:bg/>
+  <dgm:whole/>
+  <dgm:extLst>
+    <a:ext uri="http://schemas.microsoft.com/office/drawing/2008/diagram">
+      <dsp:dataModelExt xmlns:dsp="http://schemas.microsoft.com/office/drawing/2008/diagram" relId="rId6" minVer="http://schemas.openxmlformats.org/drawingml/2006/diagram"/>
+    </a:ext>
+  </dgm:extLst>
+</dgm:dataModel>
+</file>
+
+<file path=ppt/diagrams/data2.xml><?xml version="1.0" encoding="utf-8"?>
+<dgm:dataModel xmlns:dgm="http://schemas.openxmlformats.org/drawingml/2006/diagram" xmlns:a="http://schemas.openxmlformats.org/drawingml/2006/main">
+  <dgm:ptLst>
+    <dgm:pt modelId="{95D8496A-34C5-4580-A71E-43C7E7D2EF4D}" type="doc">
+      <dgm:prSet loTypeId="urn:microsoft.com/office/officeart/2005/8/layout/hList2" loCatId="list" qsTypeId="urn:microsoft.com/office/officeart/2005/8/quickstyle/simple1" qsCatId="simple" csTypeId="urn:microsoft.com/office/officeart/2005/8/colors/accent1_2" csCatId="accent1" phldr="1"/>
+      <dgm:spPr/>
+      <dgm:t>
+        <a:bodyPr/>
+        <a:lstStyle/>
+        <a:p>
+          <a:endParaRPr lang="fr-FR"/>
+        </a:p>
+      </dgm:t>
+    </dgm:pt>
+    <dgm:pt modelId="{57B3C823-9F53-4DFD-A409-62F0C927A71A}">
+      <dgm:prSet phldrT="[Texte]" phldr="0"/>
+      <dgm:spPr/>
+      <dgm:t>
+        <a:bodyPr/>
+        <a:lstStyle/>
+        <a:p>
+          <a:r>
+            <a:rPr lang="fr-FR" dirty="0"/>
+            <a:t>MINUS</a:t>
+          </a:r>
+        </a:p>
+      </dgm:t>
+    </dgm:pt>
+    <dgm:pt modelId="{65A6F5E5-4EC0-4BB3-9950-88B8BDEACDFF}" type="parTrans" cxnId="{D6B06087-4A3D-45F7-A65D-238094D9F9DC}">
+      <dgm:prSet/>
+      <dgm:spPr/>
+      <dgm:t>
+        <a:bodyPr/>
+        <a:lstStyle/>
+        <a:p>
+          <a:endParaRPr lang="fr-FR"/>
+        </a:p>
+      </dgm:t>
+    </dgm:pt>
+    <dgm:pt modelId="{8EE9A102-5F61-4378-BDF5-69D461FAE704}" type="sibTrans" cxnId="{D6B06087-4A3D-45F7-A65D-238094D9F9DC}">
+      <dgm:prSet/>
+      <dgm:spPr/>
+      <dgm:t>
+        <a:bodyPr/>
+        <a:lstStyle/>
+        <a:p>
+          <a:endParaRPr lang="fr-FR"/>
+        </a:p>
+      </dgm:t>
+    </dgm:pt>
+    <dgm:pt modelId="{D9F91AD2-EDB5-4FBB-937E-A0C054CF5037}">
+      <dgm:prSet phldrT="[Texte]" phldr="1"/>
+      <dgm:spPr/>
+      <dgm:t>
+        <a:bodyPr/>
+        <a:lstStyle/>
+        <a:p>
+          <a:endParaRPr lang="fr-FR"/>
+        </a:p>
+      </dgm:t>
+    </dgm:pt>
+    <dgm:pt modelId="{3804E0FD-2077-4F53-BBA5-DB0F7BB07399}" type="parTrans" cxnId="{796DB1A8-9871-459C-B687-E3A5E30BADA5}">
+      <dgm:prSet/>
+      <dgm:spPr/>
+      <dgm:t>
+        <a:bodyPr/>
+        <a:lstStyle/>
+        <a:p>
+          <a:endParaRPr lang="fr-FR"/>
+        </a:p>
+      </dgm:t>
+    </dgm:pt>
+    <dgm:pt modelId="{318793A9-0974-4A6B-AB6C-B17C12E53183}" type="sibTrans" cxnId="{796DB1A8-9871-459C-B687-E3A5E30BADA5}">
+      <dgm:prSet/>
+      <dgm:spPr/>
+      <dgm:t>
+        <a:bodyPr/>
+        <a:lstStyle/>
+        <a:p>
+          <a:endParaRPr lang="fr-FR"/>
+        </a:p>
+      </dgm:t>
+    </dgm:pt>
+    <dgm:pt modelId="{4B9ABEEF-6CA9-4321-B915-4C43171FD9E9}">
+      <dgm:prSet phldrT="[Texte]"/>
+      <dgm:spPr/>
+      <dgm:t>
+        <a:bodyPr/>
+        <a:lstStyle/>
+        <a:p>
+          <a:r>
+            <a:rPr lang="fr-FR" dirty="0"/>
+            <a:t>2026	10	0	6 177	9504
+2026	11	0	6 877	10581
+2026	12	0	7 184	11053
+2026	13	0	7 149	10999
+2026	14	0	7 474	11499
+2026	15	0	6 572	10112
+2026	16	0	7 568	11644
+2026	17	0	7 928	12198
+2026	18	0	7 049	10845
+2026	19	0	6 704	10315
+2026	20	0	5 746	8841
+2026	21	0	6 870	10570
+2026	22	0	5 813	8943
+2026	23	0	6 061	9325
+2026	24	0	6 541	10063
+2026	25	0	6 587	10135
+2026	26	0	6 137	9443
+2026	27	0	6 159	9476
+2026	28	0	6 475	9962
+2026	29	0	5 479	8430
+2026	30	0	7 316	11257
+2026	31	0	8 414	12946
+</a:t>
+          </a:r>
+        </a:p>
+      </dgm:t>
+    </dgm:pt>
+    <dgm:pt modelId="{BE1B3F04-CF99-4CEF-84D6-54DDEE990E79}" type="parTrans" cxnId="{988446B4-BBCA-403F-B1D2-FD2FD17EE83E}">
+      <dgm:prSet/>
+      <dgm:spPr/>
+      <dgm:t>
+        <a:bodyPr/>
+        <a:lstStyle/>
+        <a:p>
+          <a:endParaRPr lang="fr-FR"/>
+        </a:p>
+      </dgm:t>
+    </dgm:pt>
+    <dgm:pt modelId="{91117F8C-9529-471A-A24D-AF1640FF7F82}" type="sibTrans" cxnId="{988446B4-BBCA-403F-B1D2-FD2FD17EE83E}">
+      <dgm:prSet/>
+      <dgm:spPr/>
+      <dgm:t>
+        <a:bodyPr/>
+        <a:lstStyle/>
+        <a:p>
+          <a:endParaRPr lang="fr-FR"/>
+        </a:p>
+      </dgm:t>
+    </dgm:pt>
+    <dgm:pt modelId="{8B5165E9-BB20-4551-A0DD-D76DC5E9119D}">
+      <dgm:prSet phldrT="[Texte]" phldr="0"/>
+      <dgm:spPr/>
+      <dgm:t>
+        <a:bodyPr/>
+        <a:lstStyle/>
+        <a:p>
+          <a:r>
+            <a:rPr lang="fr-FR" dirty="0"/>
+            <a:t>CORTEX EXOG</a:t>
+          </a:r>
+        </a:p>
+      </dgm:t>
+    </dgm:pt>
+    <dgm:pt modelId="{BBE6117F-8FFB-443B-840C-50AD00AEA176}" type="parTrans" cxnId="{6314D077-1695-4E69-B0EB-CE6DA3C3C31F}">
+      <dgm:prSet/>
+      <dgm:spPr/>
+      <dgm:t>
+        <a:bodyPr/>
+        <a:lstStyle/>
+        <a:p>
+          <a:endParaRPr lang="fr-FR"/>
+        </a:p>
+      </dgm:t>
+    </dgm:pt>
+    <dgm:pt modelId="{BBAF371F-F667-4949-9133-1C9223D42986}" type="sibTrans" cxnId="{6314D077-1695-4E69-B0EB-CE6DA3C3C31F}">
+      <dgm:prSet/>
+      <dgm:spPr/>
+      <dgm:t>
+        <a:bodyPr/>
+        <a:lstStyle/>
+        <a:p>
+          <a:endParaRPr lang="fr-FR"/>
+        </a:p>
+      </dgm:t>
+    </dgm:pt>
+    <dgm:pt modelId="{69FD442A-F1B0-4109-9716-F765C73610C3}">
+      <dgm:prSet phldrT="[Texte]"/>
+      <dgm:spPr/>
+      <dgm:t>
+        <a:bodyPr/>
+        <a:lstStyle/>
+        <a:p>
+          <a:r>
+            <a:rPr lang="fr-FR" dirty="0"/>
+            <a:t>2026	10	0	6 108	9398
+2026	11	0	6 726	10348
+2026	12	0	7 012	10788
+2026	13	0	6 985	10747
+2026	14	0	7 183	11052
+2026	15	0	6 234	9592
+2026	16	0	7 148	10997
+2026	17	0	7 568	11643
+2026	18	0	6 919	10646
+2026	19	0	6 785	10439
+2026	20	0	5 983	9206
+2026	21	0	7 075	10886
+2026	22	0	6 009	9246
+2026	23	0	6 355	9778
+2026	24	0	6 895	10608
+2026	25	0	6 960	10709
+2026	26	0	6 412	9865
+2026	27	0	6 230	9585
+2026	28	0	6 381	9818
+2026	29	0	5 344	8222
+2026	30	0	7 184	11053
+2026	31	0	8 264	12715
+</a:t>
+          </a:r>
+        </a:p>
+      </dgm:t>
+    </dgm:pt>
+    <dgm:pt modelId="{A0295612-DAC2-4D5F-94E1-E3477784FE7A}" type="parTrans" cxnId="{6B5971E7-B11C-49E5-9F23-7B1C92ADFA94}">
+      <dgm:prSet/>
+      <dgm:spPr/>
+      <dgm:t>
+        <a:bodyPr/>
+        <a:lstStyle/>
+        <a:p>
+          <a:endParaRPr lang="fr-FR"/>
+        </a:p>
+      </dgm:t>
+    </dgm:pt>
+    <dgm:pt modelId="{1A4E7CFB-1D7D-4FFC-A88E-A43999F8F0F6}" type="sibTrans" cxnId="{6B5971E7-B11C-49E5-9F23-7B1C92ADFA94}">
+      <dgm:prSet/>
+      <dgm:spPr/>
+      <dgm:t>
+        <a:bodyPr/>
+        <a:lstStyle/>
+        <a:p>
+          <a:endParaRPr lang="fr-FR"/>
+        </a:p>
+      </dgm:t>
+    </dgm:pt>
+    <dgm:pt modelId="{1F2709E7-1F3A-4150-8441-756D6FCC9C96}">
+      <dgm:prSet phldrT="[Texte]" phldr="0"/>
+      <dgm:spPr/>
+      <dgm:t>
+        <a:bodyPr/>
+        <a:lstStyle/>
+        <a:p>
+          <a:r>
+            <a:rPr lang="fr-FR" dirty="0"/>
+            <a:t>CORTEXEXOGTarifs2026PRIS EN COMPTE</a:t>
+          </a:r>
+        </a:p>
+        <a:p>
+          <a:endParaRPr lang="fr-FR" dirty="0"/>
+        </a:p>
+      </dgm:t>
+    </dgm:pt>
+    <dgm:pt modelId="{97BFAB63-AFC8-4E1C-BB3E-A279C5FA7613}" type="parTrans" cxnId="{FD351750-4724-4756-959E-8A8AD3237FE2}">
+      <dgm:prSet/>
+      <dgm:spPr/>
+      <dgm:t>
+        <a:bodyPr/>
+        <a:lstStyle/>
+        <a:p>
+          <a:endParaRPr lang="fr-FR"/>
+        </a:p>
+      </dgm:t>
+    </dgm:pt>
+    <dgm:pt modelId="{70ADF957-6A54-45A2-A300-0D254B1A4D5E}" type="sibTrans" cxnId="{FD351750-4724-4756-959E-8A8AD3237FE2}">
+      <dgm:prSet/>
+      <dgm:spPr/>
+      <dgm:t>
+        <a:bodyPr/>
+        <a:lstStyle/>
+        <a:p>
+          <a:endParaRPr lang="fr-FR"/>
+        </a:p>
+      </dgm:t>
+    </dgm:pt>
+    <dgm:pt modelId="{1CE63668-52C3-4C98-B455-15E3EE2941E1}">
+      <dgm:prSet phldrT="[Texte]" phldr="1"/>
+      <dgm:spPr/>
+      <dgm:t>
+        <a:bodyPr/>
+        <a:lstStyle/>
+        <a:p>
+          <a:endParaRPr lang="fr-FR" dirty="0"/>
+        </a:p>
+      </dgm:t>
+    </dgm:pt>
+    <dgm:pt modelId="{24400AFA-CCFD-474F-BD5C-917610F53DD1}" type="parTrans" cxnId="{2446DA80-768C-4C94-A965-9AE9D5F3ED6D}">
+      <dgm:prSet/>
+      <dgm:spPr/>
+      <dgm:t>
+        <a:bodyPr/>
+        <a:lstStyle/>
+        <a:p>
+          <a:endParaRPr lang="fr-FR"/>
+        </a:p>
+      </dgm:t>
+    </dgm:pt>
+    <dgm:pt modelId="{49F765D1-2590-4D47-89AD-A5716FE5128F}" type="sibTrans" cxnId="{2446DA80-768C-4C94-A965-9AE9D5F3ED6D}">
+      <dgm:prSet/>
+      <dgm:spPr/>
+      <dgm:t>
+        <a:bodyPr/>
+        <a:lstStyle/>
+        <a:p>
+          <a:endParaRPr lang="fr-FR"/>
+        </a:p>
+      </dgm:t>
+    </dgm:pt>
+    <dgm:pt modelId="{D430A6C7-70A6-4120-B1A5-C8A35F78FC56}">
+      <dgm:prSet/>
+      <dgm:spPr/>
+      <dgm:t>
+        <a:bodyPr/>
+        <a:lstStyle/>
+        <a:p>
+          <a:endParaRPr lang="fr-FR" dirty="0"/>
+        </a:p>
+      </dgm:t>
+    </dgm:pt>
+    <dgm:pt modelId="{46404BD7-5DC0-483F-8FAA-5A82E16FD04A}" type="parTrans" cxnId="{AD5F7496-A380-48B2-8394-21557F37F15F}">
+      <dgm:prSet/>
+      <dgm:spPr/>
+      <dgm:t>
+        <a:bodyPr/>
+        <a:lstStyle/>
+        <a:p>
+          <a:endParaRPr lang="fr-FR"/>
+        </a:p>
+      </dgm:t>
+    </dgm:pt>
+    <dgm:pt modelId="{5FD5B52F-EF00-4B80-B4AC-BD36339E7417}" type="sibTrans" cxnId="{AD5F7496-A380-48B2-8394-21557F37F15F}">
+      <dgm:prSet/>
+      <dgm:spPr/>
+      <dgm:t>
+        <a:bodyPr/>
+        <a:lstStyle/>
+        <a:p>
+          <a:endParaRPr lang="fr-FR"/>
+        </a:p>
+      </dgm:t>
+    </dgm:pt>
+    <dgm:pt modelId="{DB3A3588-1AD6-43E3-9043-7B8312712255}">
+      <dgm:prSet/>
+      <dgm:spPr/>
+      <dgm:t>
+        <a:bodyPr/>
+        <a:lstStyle/>
+        <a:p>
+          <a:r>
+            <a:rPr lang="fr-FR" dirty="0"/>
+            <a:t>
+2026	10	0	6 158	9474
+2026	11	0	6 886	10595
+2026	12	0	7 160	11017
+2026	13	0	7 139	10983
+2026	14	0	7 338	11290
+2026	15	0	6 399	9846
+2026	16	0	7 315	11255
+2026	17	0	7 717	11873
+2026	18	0	6 928	10659
+2026	19	0	6 814	10483
+2026	20	0	5 997	9226
+2026	21	0	7 078	10890
+2026	22	0	5 999	9230
+2026	23	0	6 387	9828
+2026	24	0	6 901	10617
+2026	25	0	6 955	10701
+2026	26	0	6 416	9871
+2026	27	0	6 235	9593
+2026	28	0	6 393	9836
+2026	29	0	5 356	8241
+</a:t>
+          </a:r>
+        </a:p>
+      </dgm:t>
+    </dgm:pt>
+    <dgm:pt modelId="{C4037E03-D7B3-43C0-A0F2-C337920661F3}" type="parTrans" cxnId="{C2BD7B57-DB11-4253-A148-C924181BD3B1}">
+      <dgm:prSet/>
+      <dgm:spPr/>
+      <dgm:t>
+        <a:bodyPr/>
+        <a:lstStyle/>
+        <a:p>
+          <a:endParaRPr lang="fr-FR"/>
+        </a:p>
+      </dgm:t>
+    </dgm:pt>
+    <dgm:pt modelId="{8679DE25-1009-49E6-8953-29FFF79AB20B}" type="sibTrans" cxnId="{C2BD7B57-DB11-4253-A148-C924181BD3B1}">
+      <dgm:prSet/>
+      <dgm:spPr/>
+      <dgm:t>
+        <a:bodyPr/>
+        <a:lstStyle/>
+        <a:p>
+          <a:endParaRPr lang="fr-FR"/>
+        </a:p>
+      </dgm:t>
+    </dgm:pt>
+    <dgm:pt modelId="{22486675-CCF5-4F87-84D7-DE3C99A63C4C}" type="pres">
+      <dgm:prSet presAssocID="{95D8496A-34C5-4580-A71E-43C7E7D2EF4D}" presName="linearFlow" presStyleCnt="0">
+        <dgm:presLayoutVars>
+          <dgm:dir/>
+          <dgm:animLvl val="lvl"/>
+          <dgm:resizeHandles/>
+        </dgm:presLayoutVars>
+      </dgm:prSet>
+      <dgm:spPr/>
+    </dgm:pt>
+    <dgm:pt modelId="{C6A6AA99-3929-4E5A-8767-207FC7478BFD}" type="pres">
+      <dgm:prSet presAssocID="{57B3C823-9F53-4DFD-A409-62F0C927A71A}" presName="compositeNode" presStyleCnt="0">
+        <dgm:presLayoutVars>
+          <dgm:bulletEnabled val="1"/>
+        </dgm:presLayoutVars>
+      </dgm:prSet>
+      <dgm:spPr/>
+    </dgm:pt>
+    <dgm:pt modelId="{9BDFA353-ED46-4D80-AFC8-9E7076AE0655}" type="pres">
+      <dgm:prSet presAssocID="{57B3C823-9F53-4DFD-A409-62F0C927A71A}" presName="image" presStyleLbl="fgImgPlace1" presStyleIdx="0" presStyleCnt="3"/>
+      <dgm:spPr/>
+    </dgm:pt>
+    <dgm:pt modelId="{CAA7D2F3-A00D-4477-B9B5-17D2D64B5048}" type="pres">
+      <dgm:prSet presAssocID="{57B3C823-9F53-4DFD-A409-62F0C927A71A}" presName="childNode" presStyleLbl="node1" presStyleIdx="0" presStyleCnt="3">
+        <dgm:presLayoutVars>
+          <dgm:bulletEnabled val="1"/>
+        </dgm:presLayoutVars>
+      </dgm:prSet>
+      <dgm:spPr/>
+    </dgm:pt>
+    <dgm:pt modelId="{4EA6228C-5F7F-437E-8652-266501A24519}" type="pres">
+      <dgm:prSet presAssocID="{57B3C823-9F53-4DFD-A409-62F0C927A71A}" presName="parentNode" presStyleLbl="revTx" presStyleIdx="0" presStyleCnt="3">
+        <dgm:presLayoutVars>
+          <dgm:chMax val="0"/>
+          <dgm:bulletEnabled val="1"/>
+        </dgm:presLayoutVars>
+      </dgm:prSet>
+      <dgm:spPr/>
+    </dgm:pt>
+    <dgm:pt modelId="{54273939-EA2F-4380-8745-1AB803948945}" type="pres">
+      <dgm:prSet presAssocID="{8EE9A102-5F61-4378-BDF5-69D461FAE704}" presName="sibTrans" presStyleCnt="0"/>
+      <dgm:spPr/>
+    </dgm:pt>
+    <dgm:pt modelId="{F129FC97-4600-4F34-B7D3-5E5B419237C8}" type="pres">
+      <dgm:prSet presAssocID="{8B5165E9-BB20-4551-A0DD-D76DC5E9119D}" presName="compositeNode" presStyleCnt="0">
+        <dgm:presLayoutVars>
+          <dgm:bulletEnabled val="1"/>
+        </dgm:presLayoutVars>
+      </dgm:prSet>
+      <dgm:spPr/>
+    </dgm:pt>
+    <dgm:pt modelId="{1C790D66-7CC3-4ED2-AAD4-4678E365CD15}" type="pres">
+      <dgm:prSet presAssocID="{8B5165E9-BB20-4551-A0DD-D76DC5E9119D}" presName="image" presStyleLbl="fgImgPlace1" presStyleIdx="1" presStyleCnt="3"/>
+      <dgm:spPr/>
+    </dgm:pt>
+    <dgm:pt modelId="{7BDD2A7D-3816-4835-92DA-E10DA3112046}" type="pres">
+      <dgm:prSet presAssocID="{8B5165E9-BB20-4551-A0DD-D76DC5E9119D}" presName="childNode" presStyleLbl="node1" presStyleIdx="1" presStyleCnt="3">
+        <dgm:presLayoutVars>
+          <dgm:bulletEnabled val="1"/>
+        </dgm:presLayoutVars>
+      </dgm:prSet>
+      <dgm:spPr/>
+    </dgm:pt>
+    <dgm:pt modelId="{E6FABDBA-9B9C-4369-A77C-27ACEEB55CC2}" type="pres">
+      <dgm:prSet presAssocID="{8B5165E9-BB20-4551-A0DD-D76DC5E9119D}" presName="parentNode" presStyleLbl="revTx" presStyleIdx="1" presStyleCnt="3">
+        <dgm:presLayoutVars>
+          <dgm:chMax val="0"/>
+          <dgm:bulletEnabled val="1"/>
+        </dgm:presLayoutVars>
+      </dgm:prSet>
+      <dgm:spPr/>
+    </dgm:pt>
+    <dgm:pt modelId="{C45082B4-1DFC-4307-A6EE-E02D3C71C17D}" type="pres">
+      <dgm:prSet presAssocID="{BBAF371F-F667-4949-9133-1C9223D42986}" presName="sibTrans" presStyleCnt="0"/>
+      <dgm:spPr/>
+    </dgm:pt>
+    <dgm:pt modelId="{6BEC9142-7E3E-4FA2-BE9E-585FBDD76038}" type="pres">
+      <dgm:prSet presAssocID="{1F2709E7-1F3A-4150-8441-756D6FCC9C96}" presName="compositeNode" presStyleCnt="0">
+        <dgm:presLayoutVars>
+          <dgm:bulletEnabled val="1"/>
+        </dgm:presLayoutVars>
+      </dgm:prSet>
+      <dgm:spPr/>
+    </dgm:pt>
+    <dgm:pt modelId="{7257F43F-E963-4FCC-A8E2-C9A3A2C7BA70}" type="pres">
+      <dgm:prSet presAssocID="{1F2709E7-1F3A-4150-8441-756D6FCC9C96}" presName="image" presStyleLbl="fgImgPlace1" presStyleIdx="2" presStyleCnt="3"/>
+      <dgm:spPr/>
+    </dgm:pt>
+    <dgm:pt modelId="{F2D1B3E5-758F-4DB7-8CB8-E4EBF0632939}" type="pres">
+      <dgm:prSet presAssocID="{1F2709E7-1F3A-4150-8441-756D6FCC9C96}" presName="childNode" presStyleLbl="node1" presStyleIdx="2" presStyleCnt="3">
+        <dgm:presLayoutVars>
+          <dgm:bulletEnabled val="1"/>
+        </dgm:presLayoutVars>
+      </dgm:prSet>
+      <dgm:spPr/>
+    </dgm:pt>
+    <dgm:pt modelId="{396EE9A6-0AAF-4EE7-8F0B-C63AC0E6E912}" type="pres">
+      <dgm:prSet presAssocID="{1F2709E7-1F3A-4150-8441-756D6FCC9C96}" presName="parentNode" presStyleLbl="revTx" presStyleIdx="2" presStyleCnt="3">
+        <dgm:presLayoutVars>
+          <dgm:chMax val="0"/>
+          <dgm:bulletEnabled val="1"/>
+        </dgm:presLayoutVars>
+      </dgm:prSet>
+      <dgm:spPr/>
+    </dgm:pt>
+  </dgm:ptLst>
+  <dgm:cxnLst>
+    <dgm:cxn modelId="{DBFF4904-904B-45F2-A4F9-8A65CC50A1F7}" type="presOf" srcId="{1CE63668-52C3-4C98-B455-15E3EE2941E1}" destId="{F2D1B3E5-758F-4DB7-8CB8-E4EBF0632939}" srcOrd="0" destOrd="0" presId="urn:microsoft.com/office/officeart/2005/8/layout/hList2"/>
+    <dgm:cxn modelId="{D067EE13-BD63-4302-B6FD-79DD7FF05EA5}" type="presOf" srcId="{8B5165E9-BB20-4551-A0DD-D76DC5E9119D}" destId="{E6FABDBA-9B9C-4369-A77C-27ACEEB55CC2}" srcOrd="0" destOrd="0" presId="urn:microsoft.com/office/officeart/2005/8/layout/hList2"/>
+    <dgm:cxn modelId="{6DF79860-6D36-43B7-AABF-501D1D939FF3}" type="presOf" srcId="{D430A6C7-70A6-4120-B1A5-C8A35F78FC56}" destId="{F2D1B3E5-758F-4DB7-8CB8-E4EBF0632939}" srcOrd="0" destOrd="1" presId="urn:microsoft.com/office/officeart/2005/8/layout/hList2"/>
+    <dgm:cxn modelId="{FF21756B-2869-433F-8801-8649CC679535}" type="presOf" srcId="{D9F91AD2-EDB5-4FBB-937E-A0C054CF5037}" destId="{CAA7D2F3-A00D-4477-B9B5-17D2D64B5048}" srcOrd="0" destOrd="0" presId="urn:microsoft.com/office/officeart/2005/8/layout/hList2"/>
+    <dgm:cxn modelId="{FD351750-4724-4756-959E-8A8AD3237FE2}" srcId="{95D8496A-34C5-4580-A71E-43C7E7D2EF4D}" destId="{1F2709E7-1F3A-4150-8441-756D6FCC9C96}" srcOrd="2" destOrd="0" parTransId="{97BFAB63-AFC8-4E1C-BB3E-A279C5FA7613}" sibTransId="{70ADF957-6A54-45A2-A300-0D254B1A4D5E}"/>
+    <dgm:cxn modelId="{0C3D8373-B204-4303-8EBA-91D18CBCA36B}" type="presOf" srcId="{1F2709E7-1F3A-4150-8441-756D6FCC9C96}" destId="{396EE9A6-0AAF-4EE7-8F0B-C63AC0E6E912}" srcOrd="0" destOrd="0" presId="urn:microsoft.com/office/officeart/2005/8/layout/hList2"/>
+    <dgm:cxn modelId="{C2BD7B57-DB11-4253-A148-C924181BD3B1}" srcId="{1F2709E7-1F3A-4150-8441-756D6FCC9C96}" destId="{DB3A3588-1AD6-43E3-9043-7B8312712255}" srcOrd="2" destOrd="0" parTransId="{C4037E03-D7B3-43C0-A0F2-C337920661F3}" sibTransId="{8679DE25-1009-49E6-8953-29FFF79AB20B}"/>
+    <dgm:cxn modelId="{6314D077-1695-4E69-B0EB-CE6DA3C3C31F}" srcId="{95D8496A-34C5-4580-A71E-43C7E7D2EF4D}" destId="{8B5165E9-BB20-4551-A0DD-D76DC5E9119D}" srcOrd="1" destOrd="0" parTransId="{BBE6117F-8FFB-443B-840C-50AD00AEA176}" sibTransId="{BBAF371F-F667-4949-9133-1C9223D42986}"/>
+    <dgm:cxn modelId="{2446DA80-768C-4C94-A965-9AE9D5F3ED6D}" srcId="{1F2709E7-1F3A-4150-8441-756D6FCC9C96}" destId="{1CE63668-52C3-4C98-B455-15E3EE2941E1}" srcOrd="0" destOrd="0" parTransId="{24400AFA-CCFD-474F-BD5C-917610F53DD1}" sibTransId="{49F765D1-2590-4D47-89AD-A5716FE5128F}"/>
+    <dgm:cxn modelId="{D6B06087-4A3D-45F7-A65D-238094D9F9DC}" srcId="{95D8496A-34C5-4580-A71E-43C7E7D2EF4D}" destId="{57B3C823-9F53-4DFD-A409-62F0C927A71A}" srcOrd="0" destOrd="0" parTransId="{65A6F5E5-4EC0-4BB3-9950-88B8BDEACDFF}" sibTransId="{8EE9A102-5F61-4378-BDF5-69D461FAE704}"/>
+    <dgm:cxn modelId="{AD5F7496-A380-48B2-8394-21557F37F15F}" srcId="{1F2709E7-1F3A-4150-8441-756D6FCC9C96}" destId="{D430A6C7-70A6-4120-B1A5-C8A35F78FC56}" srcOrd="1" destOrd="0" parTransId="{46404BD7-5DC0-483F-8FAA-5A82E16FD04A}" sibTransId="{5FD5B52F-EF00-4B80-B4AC-BD36339E7417}"/>
+    <dgm:cxn modelId="{796DB1A8-9871-459C-B687-E3A5E30BADA5}" srcId="{57B3C823-9F53-4DFD-A409-62F0C927A71A}" destId="{D9F91AD2-EDB5-4FBB-937E-A0C054CF5037}" srcOrd="0" destOrd="0" parTransId="{3804E0FD-2077-4F53-BBA5-DB0F7BB07399}" sibTransId="{318793A9-0974-4A6B-AB6C-B17C12E53183}"/>
+    <dgm:cxn modelId="{988446B4-BBCA-403F-B1D2-FD2FD17EE83E}" srcId="{57B3C823-9F53-4DFD-A409-62F0C927A71A}" destId="{4B9ABEEF-6CA9-4321-B915-4C43171FD9E9}" srcOrd="1" destOrd="0" parTransId="{BE1B3F04-CF99-4CEF-84D6-54DDEE990E79}" sibTransId="{91117F8C-9529-471A-A24D-AF1640FF7F82}"/>
+    <dgm:cxn modelId="{1876A7B5-707C-4107-A1EC-BACB25CF488B}" type="presOf" srcId="{69FD442A-F1B0-4109-9716-F765C73610C3}" destId="{7BDD2A7D-3816-4835-92DA-E10DA3112046}" srcOrd="0" destOrd="0" presId="urn:microsoft.com/office/officeart/2005/8/layout/hList2"/>
+    <dgm:cxn modelId="{B2DAA3D9-1C94-4BEF-B803-09C52B14A5D6}" type="presOf" srcId="{95D8496A-34C5-4580-A71E-43C7E7D2EF4D}" destId="{22486675-CCF5-4F87-84D7-DE3C99A63C4C}" srcOrd="0" destOrd="0" presId="urn:microsoft.com/office/officeart/2005/8/layout/hList2"/>
+    <dgm:cxn modelId="{7D6903DE-3257-4B66-B5EE-17C2711DD7D0}" type="presOf" srcId="{DB3A3588-1AD6-43E3-9043-7B8312712255}" destId="{F2D1B3E5-758F-4DB7-8CB8-E4EBF0632939}" srcOrd="0" destOrd="2" presId="urn:microsoft.com/office/officeart/2005/8/layout/hList2"/>
+    <dgm:cxn modelId="{6B5971E7-B11C-49E5-9F23-7B1C92ADFA94}" srcId="{8B5165E9-BB20-4551-A0DD-D76DC5E9119D}" destId="{69FD442A-F1B0-4109-9716-F765C73610C3}" srcOrd="0" destOrd="0" parTransId="{A0295612-DAC2-4D5F-94E1-E3477784FE7A}" sibTransId="{1A4E7CFB-1D7D-4FFC-A88E-A43999F8F0F6}"/>
+    <dgm:cxn modelId="{EBA0FCF1-617B-45C2-9699-AC00A942B6BD}" type="presOf" srcId="{57B3C823-9F53-4DFD-A409-62F0C927A71A}" destId="{4EA6228C-5F7F-437E-8652-266501A24519}" srcOrd="0" destOrd="0" presId="urn:microsoft.com/office/officeart/2005/8/layout/hList2"/>
+    <dgm:cxn modelId="{436A21F2-759B-4C91-8043-649FB6E8DC2D}" type="presOf" srcId="{4B9ABEEF-6CA9-4321-B915-4C43171FD9E9}" destId="{CAA7D2F3-A00D-4477-B9B5-17D2D64B5048}" srcOrd="0" destOrd="1" presId="urn:microsoft.com/office/officeart/2005/8/layout/hList2"/>
+    <dgm:cxn modelId="{8B67B165-6E63-4DFC-9806-301ECF517CFD}" type="presParOf" srcId="{22486675-CCF5-4F87-84D7-DE3C99A63C4C}" destId="{C6A6AA99-3929-4E5A-8767-207FC7478BFD}" srcOrd="0" destOrd="0" presId="urn:microsoft.com/office/officeart/2005/8/layout/hList2"/>
+    <dgm:cxn modelId="{7AD43293-EB50-4B08-813A-AD0FE6E37D82}" type="presParOf" srcId="{C6A6AA99-3929-4E5A-8767-207FC7478BFD}" destId="{9BDFA353-ED46-4D80-AFC8-9E7076AE0655}" srcOrd="0" destOrd="0" presId="urn:microsoft.com/office/officeart/2005/8/layout/hList2"/>
+    <dgm:cxn modelId="{9EF162E2-E4CD-44FF-B200-B4680BB392AC}" type="presParOf" srcId="{C6A6AA99-3929-4E5A-8767-207FC7478BFD}" destId="{CAA7D2F3-A00D-4477-B9B5-17D2D64B5048}" srcOrd="1" destOrd="0" presId="urn:microsoft.com/office/officeart/2005/8/layout/hList2"/>
+    <dgm:cxn modelId="{81007C53-7948-4810-981D-DF2E88D1B6D1}" type="presParOf" srcId="{C6A6AA99-3929-4E5A-8767-207FC7478BFD}" destId="{4EA6228C-5F7F-437E-8652-266501A24519}" srcOrd="2" destOrd="0" presId="urn:microsoft.com/office/officeart/2005/8/layout/hList2"/>
+    <dgm:cxn modelId="{D8A33CED-C3CB-4B3B-8496-75BB2A0F9C72}" type="presParOf" srcId="{22486675-CCF5-4F87-84D7-DE3C99A63C4C}" destId="{54273939-EA2F-4380-8745-1AB803948945}" srcOrd="1" destOrd="0" presId="urn:microsoft.com/office/officeart/2005/8/layout/hList2"/>
+    <dgm:cxn modelId="{45FE7AE7-9A02-48ED-AFFC-85C32B6A682E}" type="presParOf" srcId="{22486675-CCF5-4F87-84D7-DE3C99A63C4C}" destId="{F129FC97-4600-4F34-B7D3-5E5B419237C8}" srcOrd="2" destOrd="0" presId="urn:microsoft.com/office/officeart/2005/8/layout/hList2"/>
+    <dgm:cxn modelId="{FDFC72F0-B8BD-44E4-8B98-8FCC842A4D08}" type="presParOf" srcId="{F129FC97-4600-4F34-B7D3-5E5B419237C8}" destId="{1C790D66-7CC3-4ED2-AAD4-4678E365CD15}" srcOrd="0" destOrd="0" presId="urn:microsoft.com/office/officeart/2005/8/layout/hList2"/>
+    <dgm:cxn modelId="{17EE3245-1BB2-4323-816D-14476CDAB74A}" type="presParOf" srcId="{F129FC97-4600-4F34-B7D3-5E5B419237C8}" destId="{7BDD2A7D-3816-4835-92DA-E10DA3112046}" srcOrd="1" destOrd="0" presId="urn:microsoft.com/office/officeart/2005/8/layout/hList2"/>
+    <dgm:cxn modelId="{41500F88-378A-4E03-AAF8-A678D21FA8B2}" type="presParOf" srcId="{F129FC97-4600-4F34-B7D3-5E5B419237C8}" destId="{E6FABDBA-9B9C-4369-A77C-27ACEEB55CC2}" srcOrd="2" destOrd="0" presId="urn:microsoft.com/office/officeart/2005/8/layout/hList2"/>
+    <dgm:cxn modelId="{19B779CD-355A-4D82-908B-5ABCEC7CA2F2}" type="presParOf" srcId="{22486675-CCF5-4F87-84D7-DE3C99A63C4C}" destId="{C45082B4-1DFC-4307-A6EE-E02D3C71C17D}" srcOrd="3" destOrd="0" presId="urn:microsoft.com/office/officeart/2005/8/layout/hList2"/>
+    <dgm:cxn modelId="{F7FAA2D4-A68C-41F5-8E19-94AAE128BB84}" type="presParOf" srcId="{22486675-CCF5-4F87-84D7-DE3C99A63C4C}" destId="{6BEC9142-7E3E-4FA2-BE9E-585FBDD76038}" srcOrd="4" destOrd="0" presId="urn:microsoft.com/office/officeart/2005/8/layout/hList2"/>
+    <dgm:cxn modelId="{F806E95A-24BD-4AD1-97EE-5F7BFD824EB1}" type="presParOf" srcId="{6BEC9142-7E3E-4FA2-BE9E-585FBDD76038}" destId="{7257F43F-E963-4FCC-A8E2-C9A3A2C7BA70}" srcOrd="0" destOrd="0" presId="urn:microsoft.com/office/officeart/2005/8/layout/hList2"/>
+    <dgm:cxn modelId="{678EC37A-B14A-4C53-BBEA-FEC85F1AB4E5}" type="presParOf" srcId="{6BEC9142-7E3E-4FA2-BE9E-585FBDD76038}" destId="{F2D1B3E5-758F-4DB7-8CB8-E4EBF0632939}" srcOrd="1" destOrd="0" presId="urn:microsoft.com/office/officeart/2005/8/layout/hList2"/>
+    <dgm:cxn modelId="{726967F3-C10F-4E15-8EFD-AB2CBCB6BF79}" type="presParOf" srcId="{6BEC9142-7E3E-4FA2-BE9E-585FBDD76038}" destId="{396EE9A6-0AAF-4EE7-8F0B-C63AC0E6E912}" srcOrd="2" destOrd="0" presId="urn:microsoft.com/office/officeart/2005/8/layout/hList2"/>
+  </dgm:cxnLst>
+  <dgm:bg/>
+  <dgm:whole/>
+  <dgm:extLst>
+    <a:ext uri="http://schemas.microsoft.com/office/drawing/2008/diagram">
+      <dsp:dataModelExt xmlns:dsp="http://schemas.microsoft.com/office/drawing/2008/diagram" relId="rId6" minVer="http://schemas.openxmlformats.org/drawingml/2006/diagram"/>
+    </a:ext>
+  </dgm:extLst>
+</dgm:dataModel>
+</file>
+
+<file path=ppt/diagrams/drawing1.xml><?xml version="1.0" encoding="utf-8"?>
+<dsp:drawing xmlns:dgm="http://schemas.openxmlformats.org/drawingml/2006/diagram" xmlns:dsp="http://schemas.microsoft.com/office/drawing/2008/diagram" xmlns:a="http://schemas.openxmlformats.org/drawingml/2006/main">
+  <dsp:spTree>
+    <dsp:nvGrpSpPr>
+      <dsp:cNvPr id="0" name=""/>
+      <dsp:cNvGrpSpPr/>
+    </dsp:nvGrpSpPr>
+    <dsp:grpSpPr/>
+    <dsp:sp modelId="{4EA6228C-5F7F-437E-8652-266501A24519}">
+      <dsp:nvSpPr>
+        <dsp:cNvPr id="0" name=""/>
+        <dsp:cNvSpPr/>
+      </dsp:nvSpPr>
+      <dsp:spPr>
+        <a:xfrm rot="16200000">
+          <a:off x="-1383004" y="2256453"/>
+          <a:ext cx="3394043" cy="504901"/>
+        </a:xfrm>
+        <a:prstGeom prst="rect">
+          <a:avLst/>
+        </a:prstGeom>
+        <a:noFill/>
+        <a:ln>
+          <a:noFill/>
+        </a:ln>
+        <a:effectLst/>
+      </dsp:spPr>
+      <dsp:style>
+        <a:lnRef idx="0">
+          <a:scrgbClr r="0" g="0" b="0"/>
+        </a:lnRef>
+        <a:fillRef idx="0">
+          <a:scrgbClr r="0" g="0" b="0"/>
+        </a:fillRef>
+        <a:effectRef idx="0">
+          <a:scrgbClr r="0" g="0" b="0"/>
+        </a:effectRef>
+        <a:fontRef idx="minor"/>
+      </dsp:style>
+      <dsp:txBody>
+        <a:bodyPr spcFirstLastPara="0" vert="horz" wrap="square" lIns="0" tIns="0" rIns="445295" bIns="0" numCol="1" spcCol="1270" anchor="t" anchorCtr="0">
+          <a:noAutofit/>
+        </a:bodyPr>
+        <a:lstStyle/>
+        <a:p>
+          <a:pPr marL="0" lvl="0" indent="0" algn="r" defTabSz="889000">
+            <a:lnSpc>
+              <a:spcPct val="90000"/>
+            </a:lnSpc>
+            <a:spcBef>
+              <a:spcPct val="0"/>
+            </a:spcBef>
+            <a:spcAft>
+              <a:spcPct val="35000"/>
+            </a:spcAft>
+            <a:buNone/>
+          </a:pPr>
+          <a:r>
+            <a:rPr lang="fr-FR" sz="2000" kern="1200" dirty="0"/>
+            <a:t>MINUS</a:t>
+          </a:r>
+        </a:p>
+      </dsp:txBody>
+      <dsp:txXfrm>
+        <a:off x="-1383004" y="2256453"/>
+        <a:ext cx="3394043" cy="504901"/>
+      </dsp:txXfrm>
+    </dsp:sp>
+    <dsp:sp modelId="{CAA7D2F3-A00D-4477-B9B5-17D2D64B5048}">
+      <dsp:nvSpPr>
+        <dsp:cNvPr id="0" name=""/>
+        <dsp:cNvSpPr/>
+      </dsp:nvSpPr>
+      <dsp:spPr>
+        <a:xfrm>
+          <a:off x="566467" y="811881"/>
+          <a:ext cx="2514943" cy="3394043"/>
+        </a:xfrm>
+        <a:prstGeom prst="rect">
+          <a:avLst/>
+        </a:prstGeom>
+        <a:solidFill>
+          <a:schemeClr val="accent1">
+            <a:hueOff val="0"/>
+            <a:satOff val="0"/>
+            <a:lumOff val="0"/>
+            <a:alphaOff val="0"/>
+          </a:schemeClr>
+        </a:solidFill>
+        <a:ln w="19050" cap="flat" cmpd="sng" algn="ctr">
+          <a:solidFill>
+            <a:schemeClr val="lt1">
+              <a:hueOff val="0"/>
+              <a:satOff val="0"/>
+              <a:lumOff val="0"/>
+              <a:alphaOff val="0"/>
+            </a:schemeClr>
+          </a:solidFill>
+          <a:prstDash val="solid"/>
+          <a:miter lim="800000"/>
+        </a:ln>
+        <a:effectLst/>
+      </dsp:spPr>
+      <dsp:style>
+        <a:lnRef idx="2">
+          <a:scrgbClr r="0" g="0" b="0"/>
+        </a:lnRef>
+        <a:fillRef idx="1">
+          <a:scrgbClr r="0" g="0" b="0"/>
+        </a:fillRef>
+        <a:effectRef idx="0">
+          <a:scrgbClr r="0" g="0" b="0"/>
+        </a:effectRef>
+        <a:fontRef idx="minor">
+          <a:schemeClr val="lt1"/>
+        </a:fontRef>
+      </dsp:style>
+      <dsp:txBody>
+        <a:bodyPr spcFirstLastPara="0" vert="horz" wrap="square" lIns="56896" tIns="445295" rIns="56896" bIns="56896" numCol="1" spcCol="1270" anchor="t" anchorCtr="0">
+          <a:noAutofit/>
+        </a:bodyPr>
+        <a:lstStyle/>
+        <a:p>
+          <a:pPr marL="57150" lvl="1" indent="-57150" algn="l" defTabSz="266700">
+            <a:lnSpc>
+              <a:spcPct val="90000"/>
+            </a:lnSpc>
+            <a:spcBef>
+              <a:spcPct val="0"/>
+            </a:spcBef>
+            <a:spcAft>
+              <a:spcPct val="15000"/>
+            </a:spcAft>
+            <a:buChar char="•"/>
+          </a:pPr>
+          <a:endParaRPr lang="fr-FR" sz="600" kern="1200"/>
+        </a:p>
+        <a:p>
+          <a:pPr marL="57150" lvl="1" indent="-57150" algn="l" defTabSz="266700">
+            <a:lnSpc>
+              <a:spcPct val="90000"/>
+            </a:lnSpc>
+            <a:spcBef>
+              <a:spcPct val="0"/>
+            </a:spcBef>
+            <a:spcAft>
+              <a:spcPct val="15000"/>
+            </a:spcAft>
+            <a:buChar char="•"/>
+          </a:pPr>
+          <a:r>
+            <a:rPr lang="fr-FR" sz="600" kern="1200" dirty="0"/>
+            <a:t>2026	10	0	6 177	9504
+2026	11	0	6 877	10581
+2026	12	0	7 184	11053
+2026	13	0	7 149	10999
+2026	14	0	7 474	11499
+2026	15	0	6 572	10112
+2026	16	0	7 568	11644
+2026	17	0	7 928	12198
+2026	18	0	7 049	10845
+2026	19	0	6 704	10315
+2026	20	0	5 746	8841
+2026	21	0	6 870	10570
+2026	22	0	5 813	8943
+2026	23	0	6 061	9325
+2026	24	0	6 541	10063
+2026	25	0	6 587	10135
+2026	26	0	6 137	9443
+2026	27	0	6 159	9476
+2026	28	0	6 475	9962
+2026	29	0	5 479	8430
+2026	30	0	7 316	11257
+2026	31	0	8 414	12946
+</a:t>
+          </a:r>
+        </a:p>
+      </dsp:txBody>
+      <dsp:txXfrm>
+        <a:off x="566467" y="811881"/>
+        <a:ext cx="2514943" cy="3394043"/>
+      </dsp:txXfrm>
+    </dsp:sp>
+    <dsp:sp modelId="{9BDFA353-ED46-4D80-AFC8-9E7076AE0655}">
+      <dsp:nvSpPr>
+        <dsp:cNvPr id="0" name=""/>
+        <dsp:cNvSpPr/>
+      </dsp:nvSpPr>
+      <dsp:spPr>
+        <a:xfrm>
+          <a:off x="61566" y="145412"/>
+          <a:ext cx="1009802" cy="1009802"/>
+        </a:xfrm>
+        <a:prstGeom prst="rect">
+          <a:avLst/>
+        </a:prstGeom>
+        <a:solidFill>
+          <a:schemeClr val="accent1">
+            <a:tint val="50000"/>
+            <a:hueOff val="0"/>
+            <a:satOff val="0"/>
+            <a:lumOff val="0"/>
+            <a:alphaOff val="0"/>
+          </a:schemeClr>
+        </a:solidFill>
+        <a:ln w="19050" cap="flat" cmpd="sng" algn="ctr">
+          <a:solidFill>
+            <a:schemeClr val="lt1">
+              <a:hueOff val="0"/>
+              <a:satOff val="0"/>
+              <a:lumOff val="0"/>
+              <a:alphaOff val="0"/>
+            </a:schemeClr>
+          </a:solidFill>
+          <a:prstDash val="solid"/>
+          <a:miter lim="800000"/>
+        </a:ln>
+        <a:effectLst/>
+      </dsp:spPr>
+      <dsp:style>
+        <a:lnRef idx="2">
+          <a:scrgbClr r="0" g="0" b="0"/>
+        </a:lnRef>
+        <a:fillRef idx="1">
+          <a:scrgbClr r="0" g="0" b="0"/>
+        </a:fillRef>
+        <a:effectRef idx="0">
+          <a:scrgbClr r="0" g="0" b="0"/>
+        </a:effectRef>
+        <a:fontRef idx="minor"/>
+      </dsp:style>
+    </dsp:sp>
+    <dsp:sp modelId="{E6FABDBA-9B9C-4369-A77C-27ACEEB55CC2}">
+      <dsp:nvSpPr>
+        <dsp:cNvPr id="0" name=""/>
+        <dsp:cNvSpPr/>
+      </dsp:nvSpPr>
+      <dsp:spPr>
+        <a:xfrm rot="16200000">
+          <a:off x="2303306" y="2256453"/>
+          <a:ext cx="3394043" cy="504901"/>
+        </a:xfrm>
+        <a:prstGeom prst="rect">
+          <a:avLst/>
+        </a:prstGeom>
+        <a:noFill/>
+        <a:ln>
+          <a:noFill/>
+        </a:ln>
+        <a:effectLst/>
+      </dsp:spPr>
+      <dsp:style>
+        <a:lnRef idx="0">
+          <a:scrgbClr r="0" g="0" b="0"/>
+        </a:lnRef>
+        <a:fillRef idx="0">
+          <a:scrgbClr r="0" g="0" b="0"/>
+        </a:fillRef>
+        <a:effectRef idx="0">
+          <a:scrgbClr r="0" g="0" b="0"/>
+        </a:effectRef>
+        <a:fontRef idx="minor"/>
+      </dsp:style>
+      <dsp:txBody>
+        <a:bodyPr spcFirstLastPara="0" vert="horz" wrap="square" lIns="0" tIns="0" rIns="445295" bIns="0" numCol="1" spcCol="1270" anchor="t" anchorCtr="0">
+          <a:noAutofit/>
+        </a:bodyPr>
+        <a:lstStyle/>
+        <a:p>
+          <a:pPr marL="0" lvl="0" indent="0" algn="r" defTabSz="889000">
+            <a:lnSpc>
+              <a:spcPct val="90000"/>
+            </a:lnSpc>
+            <a:spcBef>
+              <a:spcPct val="0"/>
+            </a:spcBef>
+            <a:spcAft>
+              <a:spcPct val="35000"/>
+            </a:spcAft>
+            <a:buNone/>
+          </a:pPr>
+          <a:r>
+            <a:rPr lang="fr-FR" sz="2000" kern="1200" dirty="0"/>
+            <a:t>CORTEX EXOG</a:t>
+          </a:r>
+        </a:p>
+      </dsp:txBody>
+      <dsp:txXfrm>
+        <a:off x="2303306" y="2256453"/>
+        <a:ext cx="3394043" cy="504901"/>
+      </dsp:txXfrm>
+    </dsp:sp>
+    <dsp:sp modelId="{7BDD2A7D-3816-4835-92DA-E10DA3112046}">
+      <dsp:nvSpPr>
+        <dsp:cNvPr id="0" name=""/>
+        <dsp:cNvSpPr/>
+      </dsp:nvSpPr>
+      <dsp:spPr>
+        <a:xfrm>
+          <a:off x="4252779" y="811881"/>
+          <a:ext cx="2514943" cy="3394043"/>
+        </a:xfrm>
+        <a:prstGeom prst="rect">
+          <a:avLst/>
+        </a:prstGeom>
+        <a:solidFill>
+          <a:schemeClr val="accent1">
+            <a:hueOff val="0"/>
+            <a:satOff val="0"/>
+            <a:lumOff val="0"/>
+            <a:alphaOff val="0"/>
+          </a:schemeClr>
+        </a:solidFill>
+        <a:ln w="19050" cap="flat" cmpd="sng" algn="ctr">
+          <a:solidFill>
+            <a:schemeClr val="lt1">
+              <a:hueOff val="0"/>
+              <a:satOff val="0"/>
+              <a:lumOff val="0"/>
+              <a:alphaOff val="0"/>
+            </a:schemeClr>
+          </a:solidFill>
+          <a:prstDash val="solid"/>
+          <a:miter lim="800000"/>
+        </a:ln>
+        <a:effectLst/>
+      </dsp:spPr>
+      <dsp:style>
+        <a:lnRef idx="2">
+          <a:scrgbClr r="0" g="0" b="0"/>
+        </a:lnRef>
+        <a:fillRef idx="1">
+          <a:scrgbClr r="0" g="0" b="0"/>
+        </a:fillRef>
+        <a:effectRef idx="0">
+          <a:scrgbClr r="0" g="0" b="0"/>
+        </a:effectRef>
+        <a:fontRef idx="minor">
+          <a:schemeClr val="lt1"/>
+        </a:fontRef>
+      </dsp:style>
+      <dsp:txBody>
+        <a:bodyPr spcFirstLastPara="0" vert="horz" wrap="square" lIns="56896" tIns="445295" rIns="56896" bIns="56896" numCol="1" spcCol="1270" anchor="t" anchorCtr="0">
+          <a:noAutofit/>
+        </a:bodyPr>
+        <a:lstStyle/>
+        <a:p>
+          <a:pPr marL="57150" lvl="1" indent="-57150" algn="l" defTabSz="266700">
+            <a:lnSpc>
+              <a:spcPct val="90000"/>
+            </a:lnSpc>
+            <a:spcBef>
+              <a:spcPct val="0"/>
+            </a:spcBef>
+            <a:spcAft>
+              <a:spcPct val="15000"/>
+            </a:spcAft>
+            <a:buChar char="•"/>
+          </a:pPr>
+          <a:r>
+            <a:rPr lang="fr-FR" sz="600" kern="1200" dirty="0"/>
+            <a:t>2026	10	0	6 108	9398
+2026	11	0	6 726	10348
+2026	12	0	7 012	10788
+2026	13	0	6 985	10747
+2026	14	0	7 183	11052
+2026	15	0	6 234	9592
+2026	16	0	7 148	10997
+2026	17	0	7 568	11643
+2026	18	0	6 919	10646
+2026	19	0	6 785	10439
+2026	20	0	5 983	9206
+2026	21	0	7 075	10886
+2026	22	0	6 009	9246
+2026	23	0	6 355	9778
+2026	24	0	6 895	10608
+2026	25	0	6 960	10709
+2026	26	0	6 412	9865
+2026	27	0	6 230	9585
+2026	28	0	6 381	9818
+2026	29	0	5 344	8222
+2026	30	0	7 184	11053
+2026	31	0	8 264	12715
+</a:t>
+          </a:r>
+        </a:p>
+      </dsp:txBody>
+      <dsp:txXfrm>
+        <a:off x="4252779" y="811881"/>
+        <a:ext cx="2514943" cy="3394043"/>
+      </dsp:txXfrm>
+    </dsp:sp>
+    <dsp:sp modelId="{1C790D66-7CC3-4ED2-AAD4-4678E365CD15}">
+      <dsp:nvSpPr>
+        <dsp:cNvPr id="0" name=""/>
+        <dsp:cNvSpPr/>
+      </dsp:nvSpPr>
+      <dsp:spPr>
+        <a:xfrm>
+          <a:off x="3747877" y="145412"/>
+          <a:ext cx="1009802" cy="1009802"/>
+        </a:xfrm>
+        <a:prstGeom prst="rect">
+          <a:avLst/>
+        </a:prstGeom>
+        <a:solidFill>
+          <a:schemeClr val="accent1">
+            <a:tint val="50000"/>
+            <a:hueOff val="0"/>
+            <a:satOff val="0"/>
+            <a:lumOff val="0"/>
+            <a:alphaOff val="0"/>
+          </a:schemeClr>
+        </a:solidFill>
+        <a:ln w="19050" cap="flat" cmpd="sng" algn="ctr">
+          <a:solidFill>
+            <a:schemeClr val="lt1">
+              <a:hueOff val="0"/>
+              <a:satOff val="0"/>
+              <a:lumOff val="0"/>
+              <a:alphaOff val="0"/>
+            </a:schemeClr>
+          </a:solidFill>
+          <a:prstDash val="solid"/>
+          <a:miter lim="800000"/>
+        </a:ln>
+        <a:effectLst/>
+      </dsp:spPr>
+      <dsp:style>
+        <a:lnRef idx="2">
+          <a:scrgbClr r="0" g="0" b="0"/>
+        </a:lnRef>
+        <a:fillRef idx="1">
+          <a:scrgbClr r="0" g="0" b="0"/>
+        </a:fillRef>
+        <a:effectRef idx="0">
+          <a:scrgbClr r="0" g="0" b="0"/>
+        </a:effectRef>
+        <a:fontRef idx="minor"/>
+      </dsp:style>
+    </dsp:sp>
+    <dsp:sp modelId="{396EE9A6-0AAF-4EE7-8F0B-C63AC0E6E912}">
+      <dsp:nvSpPr>
+        <dsp:cNvPr id="0" name=""/>
+        <dsp:cNvSpPr/>
+      </dsp:nvSpPr>
+      <dsp:spPr>
+        <a:xfrm rot="16200000">
+          <a:off x="5989618" y="2256453"/>
+          <a:ext cx="3394043" cy="504901"/>
+        </a:xfrm>
+        <a:prstGeom prst="rect">
+          <a:avLst/>
+        </a:prstGeom>
+        <a:noFill/>
+        <a:ln>
+          <a:noFill/>
+        </a:ln>
+        <a:effectLst/>
+      </dsp:spPr>
+      <dsp:style>
+        <a:lnRef idx="0">
+          <a:scrgbClr r="0" g="0" b="0"/>
+        </a:lnRef>
+        <a:fillRef idx="0">
+          <a:scrgbClr r="0" g="0" b="0"/>
+        </a:fillRef>
+        <a:effectRef idx="0">
+          <a:scrgbClr r="0" g="0" b="0"/>
+        </a:effectRef>
+        <a:fontRef idx="minor"/>
+      </dsp:style>
+      <dsp:txBody>
+        <a:bodyPr spcFirstLastPara="0" vert="horz" wrap="square" lIns="0" tIns="0" rIns="445295" bIns="0" numCol="1" spcCol="1270" anchor="t" anchorCtr="0">
+          <a:noAutofit/>
+        </a:bodyPr>
+        <a:lstStyle/>
+        <a:p>
+          <a:pPr marL="0" lvl="0" indent="0" algn="r" defTabSz="889000">
+            <a:lnSpc>
+              <a:spcPct val="90000"/>
+            </a:lnSpc>
+            <a:spcBef>
+              <a:spcPct val="0"/>
+            </a:spcBef>
+            <a:spcAft>
+              <a:spcPct val="35000"/>
+            </a:spcAft>
+            <a:buNone/>
+          </a:pPr>
+          <a:r>
+            <a:rPr lang="fr-FR" sz="2000" kern="1200" dirty="0"/>
+            <a:t>CORTEXEXOGTarifs2026</a:t>
+          </a:r>
+        </a:p>
+      </dsp:txBody>
+      <dsp:txXfrm>
+        <a:off x="5989618" y="2256453"/>
+        <a:ext cx="3394043" cy="504901"/>
+      </dsp:txXfrm>
+    </dsp:sp>
+    <dsp:sp modelId="{F2D1B3E5-758F-4DB7-8CB8-E4EBF0632939}">
+      <dsp:nvSpPr>
+        <dsp:cNvPr id="0" name=""/>
+        <dsp:cNvSpPr/>
+      </dsp:nvSpPr>
+      <dsp:spPr>
+        <a:xfrm>
+          <a:off x="7939090" y="811881"/>
+          <a:ext cx="2514943" cy="3394043"/>
+        </a:xfrm>
+        <a:prstGeom prst="rect">
+          <a:avLst/>
+        </a:prstGeom>
+        <a:solidFill>
+          <a:schemeClr val="accent1">
+            <a:hueOff val="0"/>
+            <a:satOff val="0"/>
+            <a:lumOff val="0"/>
+            <a:alphaOff val="0"/>
+          </a:schemeClr>
+        </a:solidFill>
+        <a:ln w="19050" cap="flat" cmpd="sng" algn="ctr">
+          <a:solidFill>
+            <a:schemeClr val="lt1">
+              <a:hueOff val="0"/>
+              <a:satOff val="0"/>
+              <a:lumOff val="0"/>
+              <a:alphaOff val="0"/>
+            </a:schemeClr>
+          </a:solidFill>
+          <a:prstDash val="solid"/>
+          <a:miter lim="800000"/>
+        </a:ln>
+        <a:effectLst/>
+      </dsp:spPr>
+      <dsp:style>
+        <a:lnRef idx="2">
+          <a:scrgbClr r="0" g="0" b="0"/>
+        </a:lnRef>
+        <a:fillRef idx="1">
+          <a:scrgbClr r="0" g="0" b="0"/>
+        </a:fillRef>
+        <a:effectRef idx="0">
+          <a:scrgbClr r="0" g="0" b="0"/>
+        </a:effectRef>
+        <a:fontRef idx="minor">
+          <a:schemeClr val="lt1"/>
+        </a:fontRef>
+      </dsp:style>
+      <dsp:txBody>
+        <a:bodyPr spcFirstLastPara="0" vert="horz" wrap="square" lIns="56896" tIns="445295" rIns="56896" bIns="56896" numCol="1" spcCol="1270" anchor="t" anchorCtr="0">
+          <a:noAutofit/>
+        </a:bodyPr>
+        <a:lstStyle/>
+        <a:p>
+          <a:pPr marL="57150" lvl="1" indent="-57150" algn="l" defTabSz="266700">
+            <a:lnSpc>
+              <a:spcPct val="90000"/>
+            </a:lnSpc>
+            <a:spcBef>
+              <a:spcPct val="0"/>
+            </a:spcBef>
+            <a:spcAft>
+              <a:spcPct val="15000"/>
+            </a:spcAft>
+            <a:buChar char="•"/>
+          </a:pPr>
+          <a:endParaRPr lang="fr-FR" sz="600" kern="1200"/>
+        </a:p>
+        <a:p>
+          <a:pPr marL="57150" lvl="1" indent="-57150" algn="l" defTabSz="266700">
+            <a:lnSpc>
+              <a:spcPct val="90000"/>
+            </a:lnSpc>
+            <a:spcBef>
+              <a:spcPct val="0"/>
+            </a:spcBef>
+            <a:spcAft>
+              <a:spcPct val="15000"/>
+            </a:spcAft>
+            <a:buChar char="•"/>
+          </a:pPr>
+          <a:r>
+            <a:rPr lang="fr-FR" sz="600" kern="1200" dirty="0"/>
+            <a:t>2026	10	0	6 122	9420
+2026	11	0	6 760	10400
+2026	12	0	7 061	10863
+2026	13	0	7 048	10843
+2026	14	0	7 208	11091
+2026	15	0	6 254	9622
+2026	16	0	7 190	11062
+2026	17	0	7 616	11718
+2026	18	0	6 945	10686
+2026	19	0	6 793	10451
+2026	20	0	6 030	9278
+2026	21	0	7 128	10966
+2026	22	0	6 074	9346
+2026	23	0	6 394	9837
+2026	24	0	6 946	10687
+2026	25	0	7 030	10816
+2026	26	0	6 503	10005
+2026	27	0	6 279	9661
+2026	28	0	6 415	9871
+2026	29	0	5 403	8313
+2026	30	0	7 246	11148
+2026	31	0	8 342	12835</a:t>
+          </a:r>
+        </a:p>
+      </dsp:txBody>
+      <dsp:txXfrm>
+        <a:off x="7939090" y="811881"/>
+        <a:ext cx="2514943" cy="3394043"/>
+      </dsp:txXfrm>
+    </dsp:sp>
+    <dsp:sp modelId="{7257F43F-E963-4FCC-A8E2-C9A3A2C7BA70}">
+      <dsp:nvSpPr>
+        <dsp:cNvPr id="0" name=""/>
+        <dsp:cNvSpPr/>
+      </dsp:nvSpPr>
+      <dsp:spPr>
+        <a:xfrm>
+          <a:off x="7434189" y="145412"/>
+          <a:ext cx="1009802" cy="1009802"/>
+        </a:xfrm>
+        <a:prstGeom prst="rect">
+          <a:avLst/>
+        </a:prstGeom>
+        <a:solidFill>
+          <a:schemeClr val="accent1">
+            <a:tint val="50000"/>
+            <a:hueOff val="0"/>
+            <a:satOff val="0"/>
+            <a:lumOff val="0"/>
+            <a:alphaOff val="0"/>
+          </a:schemeClr>
+        </a:solidFill>
+        <a:ln w="19050" cap="flat" cmpd="sng" algn="ctr">
+          <a:solidFill>
+            <a:schemeClr val="lt1">
+              <a:hueOff val="0"/>
+              <a:satOff val="0"/>
+              <a:lumOff val="0"/>
+              <a:alphaOff val="0"/>
+            </a:schemeClr>
+          </a:solidFill>
+          <a:prstDash val="solid"/>
+          <a:miter lim="800000"/>
+        </a:ln>
+        <a:effectLst/>
+      </dsp:spPr>
+      <dsp:style>
+        <a:lnRef idx="2">
+          <a:scrgbClr r="0" g="0" b="0"/>
+        </a:lnRef>
+        <a:fillRef idx="1">
+          <a:scrgbClr r="0" g="0" b="0"/>
+        </a:fillRef>
+        <a:effectRef idx="0">
+          <a:scrgbClr r="0" g="0" b="0"/>
+        </a:effectRef>
+        <a:fontRef idx="minor"/>
+      </dsp:style>
+    </dsp:sp>
+  </dsp:spTree>
+</dsp:drawing>
+</file>
+
+<file path=ppt/diagrams/drawing2.xml><?xml version="1.0" encoding="utf-8"?>
+<dsp:drawing xmlns:dgm="http://schemas.openxmlformats.org/drawingml/2006/diagram" xmlns:dsp="http://schemas.microsoft.com/office/drawing/2008/diagram" xmlns:a="http://schemas.openxmlformats.org/drawingml/2006/main">
+  <dsp:spTree>
+    <dsp:nvGrpSpPr>
+      <dsp:cNvPr id="0" name=""/>
+      <dsp:cNvGrpSpPr/>
+    </dsp:nvGrpSpPr>
+    <dsp:grpSpPr/>
+    <dsp:sp modelId="{4EA6228C-5F7F-437E-8652-266501A24519}">
+      <dsp:nvSpPr>
+        <dsp:cNvPr id="0" name=""/>
+        <dsp:cNvSpPr/>
+      </dsp:nvSpPr>
+      <dsp:spPr>
+        <a:xfrm rot="16200000">
+          <a:off x="-1383004" y="2256453"/>
+          <a:ext cx="3394043" cy="504901"/>
+        </a:xfrm>
+        <a:prstGeom prst="rect">
+          <a:avLst/>
+        </a:prstGeom>
+        <a:noFill/>
+        <a:ln>
+          <a:noFill/>
+        </a:ln>
+        <a:effectLst/>
+      </dsp:spPr>
+      <dsp:style>
+        <a:lnRef idx="0">
+          <a:scrgbClr r="0" g="0" b="0"/>
+        </a:lnRef>
+        <a:fillRef idx="0">
+          <a:scrgbClr r="0" g="0" b="0"/>
+        </a:fillRef>
+        <a:effectRef idx="0">
+          <a:scrgbClr r="0" g="0" b="0"/>
+        </a:effectRef>
+        <a:fontRef idx="minor"/>
+      </dsp:style>
+      <dsp:txBody>
+        <a:bodyPr spcFirstLastPara="0" vert="horz" wrap="square" lIns="0" tIns="0" rIns="445295" bIns="0" numCol="1" spcCol="1270" anchor="t" anchorCtr="0">
+          <a:noAutofit/>
+        </a:bodyPr>
+        <a:lstStyle/>
+        <a:p>
+          <a:pPr marL="0" lvl="0" indent="0" algn="r" defTabSz="533400">
+            <a:lnSpc>
+              <a:spcPct val="90000"/>
+            </a:lnSpc>
+            <a:spcBef>
+              <a:spcPct val="0"/>
+            </a:spcBef>
+            <a:spcAft>
+              <a:spcPct val="35000"/>
+            </a:spcAft>
+            <a:buNone/>
+          </a:pPr>
+          <a:r>
+            <a:rPr lang="fr-FR" sz="1200" kern="1200" dirty="0"/>
+            <a:t>MINUS</a:t>
+          </a:r>
+        </a:p>
+      </dsp:txBody>
+      <dsp:txXfrm>
+        <a:off x="-1383004" y="2256453"/>
+        <a:ext cx="3394043" cy="504901"/>
+      </dsp:txXfrm>
+    </dsp:sp>
+    <dsp:sp modelId="{CAA7D2F3-A00D-4477-B9B5-17D2D64B5048}">
+      <dsp:nvSpPr>
+        <dsp:cNvPr id="0" name=""/>
+        <dsp:cNvSpPr/>
+      </dsp:nvSpPr>
+      <dsp:spPr>
+        <a:xfrm>
+          <a:off x="566467" y="811881"/>
+          <a:ext cx="2514943" cy="3394043"/>
+        </a:xfrm>
+        <a:prstGeom prst="rect">
+          <a:avLst/>
+        </a:prstGeom>
+        <a:solidFill>
+          <a:schemeClr val="accent1">
+            <a:hueOff val="0"/>
+            <a:satOff val="0"/>
+            <a:lumOff val="0"/>
+            <a:alphaOff val="0"/>
+          </a:schemeClr>
+        </a:solidFill>
+        <a:ln w="19050" cap="flat" cmpd="sng" algn="ctr">
+          <a:solidFill>
+            <a:schemeClr val="lt1">
+              <a:hueOff val="0"/>
+              <a:satOff val="0"/>
+              <a:lumOff val="0"/>
+              <a:alphaOff val="0"/>
+            </a:schemeClr>
+          </a:solidFill>
+          <a:prstDash val="solid"/>
+          <a:miter lim="800000"/>
+        </a:ln>
+        <a:effectLst/>
+      </dsp:spPr>
+      <dsp:style>
+        <a:lnRef idx="2">
+          <a:scrgbClr r="0" g="0" b="0"/>
+        </a:lnRef>
+        <a:fillRef idx="1">
+          <a:scrgbClr r="0" g="0" b="0"/>
+        </a:fillRef>
+        <a:effectRef idx="0">
+          <a:scrgbClr r="0" g="0" b="0"/>
+        </a:effectRef>
+        <a:fontRef idx="minor">
+          <a:schemeClr val="lt1"/>
+        </a:fontRef>
+      </dsp:style>
+      <dsp:txBody>
+        <a:bodyPr spcFirstLastPara="0" vert="horz" wrap="square" lIns="56896" tIns="445295" rIns="56896" bIns="56896" numCol="1" spcCol="1270" anchor="t" anchorCtr="0">
+          <a:noAutofit/>
+        </a:bodyPr>
+        <a:lstStyle/>
+        <a:p>
+          <a:pPr marL="57150" lvl="1" indent="-57150" algn="l" defTabSz="266700">
+            <a:lnSpc>
+              <a:spcPct val="90000"/>
+            </a:lnSpc>
+            <a:spcBef>
+              <a:spcPct val="0"/>
+            </a:spcBef>
+            <a:spcAft>
+              <a:spcPct val="15000"/>
+            </a:spcAft>
+            <a:buChar char="•"/>
+          </a:pPr>
+          <a:endParaRPr lang="fr-FR" sz="600" kern="1200"/>
+        </a:p>
+        <a:p>
+          <a:pPr marL="57150" lvl="1" indent="-57150" algn="l" defTabSz="266700">
+            <a:lnSpc>
+              <a:spcPct val="90000"/>
+            </a:lnSpc>
+            <a:spcBef>
+              <a:spcPct val="0"/>
+            </a:spcBef>
+            <a:spcAft>
+              <a:spcPct val="15000"/>
+            </a:spcAft>
+            <a:buChar char="•"/>
+          </a:pPr>
+          <a:r>
+            <a:rPr lang="fr-FR" sz="600" kern="1200" dirty="0"/>
+            <a:t>2026	10	0	6 177	9504
+2026	11	0	6 877	10581
+2026	12	0	7 184	11053
+2026	13	0	7 149	10999
+2026	14	0	7 474	11499
+2026	15	0	6 572	10112
+2026	16	0	7 568	11644
+2026	17	0	7 928	12198
+2026	18	0	7 049	10845
+2026	19	0	6 704	10315
+2026	20	0	5 746	8841
+2026	21	0	6 870	10570
+2026	22	0	5 813	8943
+2026	23	0	6 061	9325
+2026	24	0	6 541	10063
+2026	25	0	6 587	10135
+2026	26	0	6 137	9443
+2026	27	0	6 159	9476
+2026	28	0	6 475	9962
+2026	29	0	5 479	8430
+2026	30	0	7 316	11257
+2026	31	0	8 414	12946
+</a:t>
+          </a:r>
+        </a:p>
+      </dsp:txBody>
+      <dsp:txXfrm>
+        <a:off x="566467" y="811881"/>
+        <a:ext cx="2514943" cy="3394043"/>
+      </dsp:txXfrm>
+    </dsp:sp>
+    <dsp:sp modelId="{9BDFA353-ED46-4D80-AFC8-9E7076AE0655}">
+      <dsp:nvSpPr>
+        <dsp:cNvPr id="0" name=""/>
+        <dsp:cNvSpPr/>
+      </dsp:nvSpPr>
+      <dsp:spPr>
+        <a:xfrm>
+          <a:off x="61566" y="145412"/>
+          <a:ext cx="1009802" cy="1009802"/>
+        </a:xfrm>
+        <a:prstGeom prst="rect">
+          <a:avLst/>
+        </a:prstGeom>
+        <a:solidFill>
+          <a:schemeClr val="accent1">
+            <a:tint val="50000"/>
+            <a:hueOff val="0"/>
+            <a:satOff val="0"/>
+            <a:lumOff val="0"/>
+            <a:alphaOff val="0"/>
+          </a:schemeClr>
+        </a:solidFill>
+        <a:ln w="19050" cap="flat" cmpd="sng" algn="ctr">
+          <a:solidFill>
+            <a:schemeClr val="lt1">
+              <a:hueOff val="0"/>
+              <a:satOff val="0"/>
+              <a:lumOff val="0"/>
+              <a:alphaOff val="0"/>
+            </a:schemeClr>
+          </a:solidFill>
+          <a:prstDash val="solid"/>
+          <a:miter lim="800000"/>
+        </a:ln>
+        <a:effectLst/>
+      </dsp:spPr>
+      <dsp:style>
+        <a:lnRef idx="2">
+          <a:scrgbClr r="0" g="0" b="0"/>
+        </a:lnRef>
+        <a:fillRef idx="1">
+          <a:scrgbClr r="0" g="0" b="0"/>
+        </a:fillRef>
+        <a:effectRef idx="0">
+          <a:scrgbClr r="0" g="0" b="0"/>
+        </a:effectRef>
+        <a:fontRef idx="minor"/>
+      </dsp:style>
+    </dsp:sp>
+    <dsp:sp modelId="{E6FABDBA-9B9C-4369-A77C-27ACEEB55CC2}">
+      <dsp:nvSpPr>
+        <dsp:cNvPr id="0" name=""/>
+        <dsp:cNvSpPr/>
+      </dsp:nvSpPr>
+      <dsp:spPr>
+        <a:xfrm rot="16200000">
+          <a:off x="2303306" y="2256453"/>
+          <a:ext cx="3394043" cy="504901"/>
+        </a:xfrm>
+        <a:prstGeom prst="rect">
+          <a:avLst/>
+        </a:prstGeom>
+        <a:noFill/>
+        <a:ln>
+          <a:noFill/>
+        </a:ln>
+        <a:effectLst/>
+      </dsp:spPr>
+      <dsp:style>
+        <a:lnRef idx="0">
+          <a:scrgbClr r="0" g="0" b="0"/>
+        </a:lnRef>
+        <a:fillRef idx="0">
+          <a:scrgbClr r="0" g="0" b="0"/>
+        </a:fillRef>
+        <a:effectRef idx="0">
+          <a:scrgbClr r="0" g="0" b="0"/>
+        </a:effectRef>
+        <a:fontRef idx="minor"/>
+      </dsp:style>
+      <dsp:txBody>
+        <a:bodyPr spcFirstLastPara="0" vert="horz" wrap="square" lIns="0" tIns="0" rIns="445295" bIns="0" numCol="1" spcCol="1270" anchor="t" anchorCtr="0">
+          <a:noAutofit/>
+        </a:bodyPr>
+        <a:lstStyle/>
+        <a:p>
+          <a:pPr marL="0" lvl="0" indent="0" algn="r" defTabSz="533400">
+            <a:lnSpc>
+              <a:spcPct val="90000"/>
+            </a:lnSpc>
+            <a:spcBef>
+              <a:spcPct val="0"/>
+            </a:spcBef>
+            <a:spcAft>
+              <a:spcPct val="35000"/>
+            </a:spcAft>
+            <a:buNone/>
+          </a:pPr>
+          <a:r>
+            <a:rPr lang="fr-FR" sz="1200" kern="1200" dirty="0"/>
+            <a:t>CORTEX EXOG</a:t>
+          </a:r>
+        </a:p>
+      </dsp:txBody>
+      <dsp:txXfrm>
+        <a:off x="2303306" y="2256453"/>
+        <a:ext cx="3394043" cy="504901"/>
+      </dsp:txXfrm>
+    </dsp:sp>
+    <dsp:sp modelId="{7BDD2A7D-3816-4835-92DA-E10DA3112046}">
+      <dsp:nvSpPr>
+        <dsp:cNvPr id="0" name=""/>
+        <dsp:cNvSpPr/>
+      </dsp:nvSpPr>
+      <dsp:spPr>
+        <a:xfrm>
+          <a:off x="4252779" y="811881"/>
+          <a:ext cx="2514943" cy="3394043"/>
+        </a:xfrm>
+        <a:prstGeom prst="rect">
+          <a:avLst/>
+        </a:prstGeom>
+        <a:solidFill>
+          <a:schemeClr val="accent1">
+            <a:hueOff val="0"/>
+            <a:satOff val="0"/>
+            <a:lumOff val="0"/>
+            <a:alphaOff val="0"/>
+          </a:schemeClr>
+        </a:solidFill>
+        <a:ln w="19050" cap="flat" cmpd="sng" algn="ctr">
+          <a:solidFill>
+            <a:schemeClr val="lt1">
+              <a:hueOff val="0"/>
+              <a:satOff val="0"/>
+              <a:lumOff val="0"/>
+              <a:alphaOff val="0"/>
+            </a:schemeClr>
+          </a:solidFill>
+          <a:prstDash val="solid"/>
+          <a:miter lim="800000"/>
+        </a:ln>
+        <a:effectLst/>
+      </dsp:spPr>
+      <dsp:style>
+        <a:lnRef idx="2">
+          <a:scrgbClr r="0" g="0" b="0"/>
+        </a:lnRef>
+        <a:fillRef idx="1">
+          <a:scrgbClr r="0" g="0" b="0"/>
+        </a:fillRef>
+        <a:effectRef idx="0">
+          <a:scrgbClr r="0" g="0" b="0"/>
+        </a:effectRef>
+        <a:fontRef idx="minor">
+          <a:schemeClr val="lt1"/>
+        </a:fontRef>
+      </dsp:style>
+      <dsp:txBody>
+        <a:bodyPr spcFirstLastPara="0" vert="horz" wrap="square" lIns="56896" tIns="445295" rIns="56896" bIns="56896" numCol="1" spcCol="1270" anchor="t" anchorCtr="0">
+          <a:noAutofit/>
+        </a:bodyPr>
+        <a:lstStyle/>
+        <a:p>
+          <a:pPr marL="57150" lvl="1" indent="-57150" algn="l" defTabSz="266700">
+            <a:lnSpc>
+              <a:spcPct val="90000"/>
+            </a:lnSpc>
+            <a:spcBef>
+              <a:spcPct val="0"/>
+            </a:spcBef>
+            <a:spcAft>
+              <a:spcPct val="15000"/>
+            </a:spcAft>
+            <a:buChar char="•"/>
+          </a:pPr>
+          <a:r>
+            <a:rPr lang="fr-FR" sz="600" kern="1200" dirty="0"/>
+            <a:t>2026	10	0	6 108	9398
+2026	11	0	6 726	10348
+2026	12	0	7 012	10788
+2026	13	0	6 985	10747
+2026	14	0	7 183	11052
+2026	15	0	6 234	9592
+2026	16	0	7 148	10997
+2026	17	0	7 568	11643
+2026	18	0	6 919	10646
+2026	19	0	6 785	10439
+2026	20	0	5 983	9206
+2026	21	0	7 075	10886
+2026	22	0	6 009	9246
+2026	23	0	6 355	9778
+2026	24	0	6 895	10608
+2026	25	0	6 960	10709
+2026	26	0	6 412	9865
+2026	27	0	6 230	9585
+2026	28	0	6 381	9818
+2026	29	0	5 344	8222
+2026	30	0	7 184	11053
+2026	31	0	8 264	12715
+</a:t>
+          </a:r>
+        </a:p>
+      </dsp:txBody>
+      <dsp:txXfrm>
+        <a:off x="4252779" y="811881"/>
+        <a:ext cx="2514943" cy="3394043"/>
+      </dsp:txXfrm>
+    </dsp:sp>
+    <dsp:sp modelId="{1C790D66-7CC3-4ED2-AAD4-4678E365CD15}">
+      <dsp:nvSpPr>
+        <dsp:cNvPr id="0" name=""/>
+        <dsp:cNvSpPr/>
+      </dsp:nvSpPr>
+      <dsp:spPr>
+        <a:xfrm>
+          <a:off x="3747877" y="145412"/>
+          <a:ext cx="1009802" cy="1009802"/>
+        </a:xfrm>
+        <a:prstGeom prst="rect">
+          <a:avLst/>
+        </a:prstGeom>
+        <a:solidFill>
+          <a:schemeClr val="accent1">
+            <a:tint val="50000"/>
+            <a:hueOff val="0"/>
+            <a:satOff val="0"/>
+            <a:lumOff val="0"/>
+            <a:alphaOff val="0"/>
+          </a:schemeClr>
+        </a:solidFill>
+        <a:ln w="19050" cap="flat" cmpd="sng" algn="ctr">
+          <a:solidFill>
+            <a:schemeClr val="lt1">
+              <a:hueOff val="0"/>
+              <a:satOff val="0"/>
+              <a:lumOff val="0"/>
+              <a:alphaOff val="0"/>
+            </a:schemeClr>
+          </a:solidFill>
+          <a:prstDash val="solid"/>
+          <a:miter lim="800000"/>
+        </a:ln>
+        <a:effectLst/>
+      </dsp:spPr>
+      <dsp:style>
+        <a:lnRef idx="2">
+          <a:scrgbClr r="0" g="0" b="0"/>
+        </a:lnRef>
+        <a:fillRef idx="1">
+          <a:scrgbClr r="0" g="0" b="0"/>
+        </a:fillRef>
+        <a:effectRef idx="0">
+          <a:scrgbClr r="0" g="0" b="0"/>
+        </a:effectRef>
+        <a:fontRef idx="minor"/>
+      </dsp:style>
+    </dsp:sp>
+    <dsp:sp modelId="{396EE9A6-0AAF-4EE7-8F0B-C63AC0E6E912}">
+      <dsp:nvSpPr>
+        <dsp:cNvPr id="0" name=""/>
+        <dsp:cNvSpPr/>
+      </dsp:nvSpPr>
+      <dsp:spPr>
+        <a:xfrm rot="16200000">
+          <a:off x="5989618" y="2256453"/>
+          <a:ext cx="3394043" cy="504901"/>
+        </a:xfrm>
+        <a:prstGeom prst="rect">
+          <a:avLst/>
+        </a:prstGeom>
+        <a:noFill/>
+        <a:ln>
+          <a:noFill/>
+        </a:ln>
+        <a:effectLst/>
+      </dsp:spPr>
+      <dsp:style>
+        <a:lnRef idx="0">
+          <a:scrgbClr r="0" g="0" b="0"/>
+        </a:lnRef>
+        <a:fillRef idx="0">
+          <a:scrgbClr r="0" g="0" b="0"/>
+        </a:fillRef>
+        <a:effectRef idx="0">
+          <a:scrgbClr r="0" g="0" b="0"/>
+        </a:effectRef>
+        <a:fontRef idx="minor"/>
+      </dsp:style>
+      <dsp:txBody>
+        <a:bodyPr spcFirstLastPara="0" vert="horz" wrap="square" lIns="0" tIns="0" rIns="445295" bIns="0" numCol="1" spcCol="1270" anchor="t" anchorCtr="0">
+          <a:noAutofit/>
+        </a:bodyPr>
+        <a:lstStyle/>
+        <a:p>
+          <a:pPr marL="0" lvl="0" indent="0" algn="r" defTabSz="533400">
+            <a:lnSpc>
+              <a:spcPct val="90000"/>
+            </a:lnSpc>
+            <a:spcBef>
+              <a:spcPct val="0"/>
+            </a:spcBef>
+            <a:spcAft>
+              <a:spcPct val="35000"/>
+            </a:spcAft>
+            <a:buNone/>
+          </a:pPr>
+          <a:r>
+            <a:rPr lang="fr-FR" sz="1200" kern="1200" dirty="0"/>
+            <a:t>CORTEXEXOGTarifs2026PRIS EN COMPTE</a:t>
+          </a:r>
+        </a:p>
+        <a:p>
+          <a:pPr marL="0" lvl="0" indent="0" algn="r" defTabSz="533400">
+            <a:lnSpc>
+              <a:spcPct val="90000"/>
+            </a:lnSpc>
+            <a:spcBef>
+              <a:spcPct val="0"/>
+            </a:spcBef>
+            <a:spcAft>
+              <a:spcPct val="35000"/>
+            </a:spcAft>
+            <a:buNone/>
+          </a:pPr>
+          <a:endParaRPr lang="fr-FR" sz="1200" kern="1200" dirty="0"/>
+        </a:p>
+      </dsp:txBody>
+      <dsp:txXfrm>
+        <a:off x="5989618" y="2256453"/>
+        <a:ext cx="3394043" cy="504901"/>
+      </dsp:txXfrm>
+    </dsp:sp>
+    <dsp:sp modelId="{F2D1B3E5-758F-4DB7-8CB8-E4EBF0632939}">
+      <dsp:nvSpPr>
+        <dsp:cNvPr id="0" name=""/>
+        <dsp:cNvSpPr/>
+      </dsp:nvSpPr>
+      <dsp:spPr>
+        <a:xfrm>
+          <a:off x="7939090" y="811881"/>
+          <a:ext cx="2514943" cy="3394043"/>
+        </a:xfrm>
+        <a:prstGeom prst="rect">
+          <a:avLst/>
+        </a:prstGeom>
+        <a:solidFill>
+          <a:schemeClr val="accent1">
+            <a:hueOff val="0"/>
+            <a:satOff val="0"/>
+            <a:lumOff val="0"/>
+            <a:alphaOff val="0"/>
+          </a:schemeClr>
+        </a:solidFill>
+        <a:ln w="19050" cap="flat" cmpd="sng" algn="ctr">
+          <a:solidFill>
+            <a:schemeClr val="lt1">
+              <a:hueOff val="0"/>
+              <a:satOff val="0"/>
+              <a:lumOff val="0"/>
+              <a:alphaOff val="0"/>
+            </a:schemeClr>
+          </a:solidFill>
+          <a:prstDash val="solid"/>
+          <a:miter lim="800000"/>
+        </a:ln>
+        <a:effectLst/>
+      </dsp:spPr>
+      <dsp:style>
+        <a:lnRef idx="2">
+          <a:scrgbClr r="0" g="0" b="0"/>
+        </a:lnRef>
+        <a:fillRef idx="1">
+          <a:scrgbClr r="0" g="0" b="0"/>
+        </a:fillRef>
+        <a:effectRef idx="0">
+          <a:scrgbClr r="0" g="0" b="0"/>
+        </a:effectRef>
+        <a:fontRef idx="minor">
+          <a:schemeClr val="lt1"/>
+        </a:fontRef>
+      </dsp:style>
+      <dsp:txBody>
+        <a:bodyPr spcFirstLastPara="0" vert="horz" wrap="square" lIns="56896" tIns="445295" rIns="56896" bIns="56896" numCol="1" spcCol="1270" anchor="t" anchorCtr="0">
+          <a:noAutofit/>
+        </a:bodyPr>
+        <a:lstStyle/>
+        <a:p>
+          <a:pPr marL="57150" lvl="1" indent="-57150" algn="l" defTabSz="266700">
+            <a:lnSpc>
+              <a:spcPct val="90000"/>
+            </a:lnSpc>
+            <a:spcBef>
+              <a:spcPct val="0"/>
+            </a:spcBef>
+            <a:spcAft>
+              <a:spcPct val="15000"/>
+            </a:spcAft>
+            <a:buChar char="•"/>
+          </a:pPr>
+          <a:endParaRPr lang="fr-FR" sz="600" kern="1200" dirty="0"/>
+        </a:p>
+        <a:p>
+          <a:pPr marL="57150" lvl="1" indent="-57150" algn="l" defTabSz="266700">
+            <a:lnSpc>
+              <a:spcPct val="90000"/>
+            </a:lnSpc>
+            <a:spcBef>
+              <a:spcPct val="0"/>
+            </a:spcBef>
+            <a:spcAft>
+              <a:spcPct val="15000"/>
+            </a:spcAft>
+            <a:buChar char="•"/>
+          </a:pPr>
+          <a:endParaRPr lang="fr-FR" sz="600" kern="1200" dirty="0"/>
+        </a:p>
+        <a:p>
+          <a:pPr marL="57150" lvl="1" indent="-57150" algn="l" defTabSz="266700">
+            <a:lnSpc>
+              <a:spcPct val="90000"/>
+            </a:lnSpc>
+            <a:spcBef>
+              <a:spcPct val="0"/>
+            </a:spcBef>
+            <a:spcAft>
+              <a:spcPct val="15000"/>
+            </a:spcAft>
+            <a:buChar char="•"/>
+          </a:pPr>
+          <a:r>
+            <a:rPr lang="fr-FR" sz="600" kern="1200" dirty="0"/>
+            <a:t>
+2026	10	0	6 158	9474
+2026	11	0	6 886	10595
+2026	12	0	7 160	11017
+2026	13	0	7 139	10983
+2026	14	0	7 338	11290
+2026	15	0	6 399	9846
+2026	16	0	7 315	11255
+2026	17	0	7 717	11873
+2026	18	0	6 928	10659
+2026	19	0	6 814	10483
+2026	20	0	5 997	9226
+2026	21	0	7 078	10890
+2026	22	0	5 999	9230
+2026	23	0	6 387	9828
+2026	24	0	6 901	10617
+2026	25	0	6 955	10701
+2026	26	0	6 416	9871
+2026	27	0	6 235	9593
+2026	28	0	6 393	9836
+2026	29	0	5 356	8241
+</a:t>
+          </a:r>
+        </a:p>
+      </dsp:txBody>
+      <dsp:txXfrm>
+        <a:off x="7939090" y="811881"/>
+        <a:ext cx="2514943" cy="3394043"/>
+      </dsp:txXfrm>
+    </dsp:sp>
+    <dsp:sp modelId="{7257F43F-E963-4FCC-A8E2-C9A3A2C7BA70}">
+      <dsp:nvSpPr>
+        <dsp:cNvPr id="0" name=""/>
+        <dsp:cNvSpPr/>
+      </dsp:nvSpPr>
+      <dsp:spPr>
+        <a:xfrm>
+          <a:off x="7434189" y="145412"/>
+          <a:ext cx="1009802" cy="1009802"/>
+        </a:xfrm>
+        <a:prstGeom prst="rect">
+          <a:avLst/>
+        </a:prstGeom>
+        <a:solidFill>
+          <a:schemeClr val="accent1">
+            <a:tint val="50000"/>
+            <a:hueOff val="0"/>
+            <a:satOff val="0"/>
+            <a:lumOff val="0"/>
+            <a:alphaOff val="0"/>
+          </a:schemeClr>
+        </a:solidFill>
+        <a:ln w="19050" cap="flat" cmpd="sng" algn="ctr">
+          <a:solidFill>
+            <a:schemeClr val="lt1">
+              <a:hueOff val="0"/>
+              <a:satOff val="0"/>
+              <a:lumOff val="0"/>
+              <a:alphaOff val="0"/>
+            </a:schemeClr>
+          </a:solidFill>
+          <a:prstDash val="solid"/>
+          <a:miter lim="800000"/>
+        </a:ln>
+        <a:effectLst/>
+      </dsp:spPr>
+      <dsp:style>
+        <a:lnRef idx="2">
+          <a:scrgbClr r="0" g="0" b="0"/>
+        </a:lnRef>
+        <a:fillRef idx="1">
+          <a:scrgbClr r="0" g="0" b="0"/>
+        </a:fillRef>
+        <a:effectRef idx="0">
+          <a:scrgbClr r="0" g="0" b="0"/>
+        </a:effectRef>
+        <a:fontRef idx="minor"/>
+      </dsp:style>
+    </dsp:sp>
+  </dsp:spTree>
+</dsp:drawing>
+</file>
+
+<file path=ppt/diagrams/layout1.xml><?xml version="1.0" encoding="utf-8"?>
+<dgm:layoutDef xmlns:dgm="http://schemas.openxmlformats.org/drawingml/2006/diagram" xmlns:a="http://schemas.openxmlformats.org/drawingml/2006/main" uniqueId="urn:microsoft.com/office/officeart/2005/8/layout/hList2">
+  <dgm:title val=""/>
+  <dgm:desc val=""/>
+  <dgm:catLst>
+    <dgm:cat type="list" pri="6000"/>
+    <dgm:cat type="relationship" pri="16000"/>
+    <dgm:cat type="picture" pri="29000"/>
+    <dgm:cat type="pictureconvert" pri="29000"/>
+  </dgm:catLst>
+  <dgm:sampData>
+    <dgm:dataModel>
+      <dgm:ptLst>
+        <dgm:pt modelId="0" type="doc"/>
+        <dgm:pt modelId="1">
+          <dgm:prSet phldr="1"/>
+        </dgm:pt>
+        <dgm:pt modelId="11">
+          <dgm:prSet phldr="1"/>
+        </dgm:pt>
+        <dgm:pt modelId="12">
+          <dgm:prSet phldr="1"/>
+        </dgm:pt>
+        <dgm:pt modelId="2">
+          <dgm:prSet phldr="1"/>
+        </dgm:pt>
+        <dgm:pt modelId="21">
+          <dgm:prSet phldr="1"/>
+        </dgm:pt>
+        <dgm:pt modelId="22">
+          <dgm:prSet phldr="1"/>
+        </dgm:pt>
+        <dgm:pt modelId="3">
+          <dgm:prSet phldr="1"/>
+        </dgm:pt>
+        <dgm:pt modelId="31">
+          <dgm:prSet phldr="1"/>
+        </dgm:pt>
+        <dgm:pt modelId="32">
+          <dgm:prSet phldr="1"/>
+        </dgm:pt>
+      </dgm:ptLst>
+      <dgm:cxnLst>
+        <dgm:cxn modelId="4" srcId="0" destId="1" srcOrd="0" destOrd="0"/>
+        <dgm:cxn modelId="5" srcId="0" destId="2" srcOrd="1" destOrd="0"/>
+        <dgm:cxn modelId="6" srcId="0" destId="3" srcOrd="2" destOrd="0"/>
+        <dgm:cxn modelId="13" srcId="1" destId="11" srcOrd="0" destOrd="0"/>
+        <dgm:cxn modelId="14" srcId="1" destId="12" srcOrd="1" destOrd="0"/>
+        <dgm:cxn modelId="23" srcId="2" destId="21" srcOrd="0" destOrd="0"/>
+        <dgm:cxn modelId="24" srcId="2" destId="22" srcOrd="1" destOrd="0"/>
+        <dgm:cxn modelId="33" srcId="3" destId="31" srcOrd="0" destOrd="0"/>
+        <dgm:cxn modelId="34" srcId="3" destId="32" srcOrd="1" destOrd="0"/>
+      </dgm:cxnLst>
+      <dgm:bg/>
+      <dgm:whole/>
+    </dgm:dataModel>
+  </dgm:sampData>
+  <dgm:styleData>
+    <dgm:dataModel>
+      <dgm:ptLst>
+        <dgm:pt modelId="0" type="doc"/>
+        <dgm:pt modelId="1"/>
+        <dgm:pt modelId="11"/>
+        <dgm:pt modelId="2"/>
+        <dgm:pt modelId="21"/>
+      </dgm:ptLst>
+      <dgm:cxnLst>
+        <dgm:cxn modelId="4" srcId="0" destId="1" srcOrd="0" destOrd="0"/>
+        <dgm:cxn modelId="5" srcId="0" destId="2" srcOrd="1" destOrd="0"/>
+        <dgm:cxn modelId="13" srcId="1" destId="11" srcOrd="0" destOrd="0"/>
+        <dgm:cxn modelId="23" srcId="2" destId="21" srcOrd="0" destOrd="0"/>
+      </dgm:cxnLst>
+      <dgm:bg/>
+      <dgm:whole/>
+    </dgm:dataModel>
+  </dgm:styleData>
+  <dgm:clrData>
+    <dgm:dataModel>
+      <dgm:ptLst>
+        <dgm:pt modelId="0" type="doc"/>
+        <dgm:pt modelId="1"/>
+        <dgm:pt modelId="11"/>
+        <dgm:pt modelId="2"/>
+        <dgm:pt modelId="21"/>
+        <dgm:pt modelId="3"/>
+        <dgm:pt modelId="31"/>
+        <dgm:pt modelId="4"/>
+        <dgm:pt modelId="41"/>
+      </dgm:ptLst>
+      <dgm:cxnLst>
+        <dgm:cxn modelId="5" srcId="0" destId="1" srcOrd="0" destOrd="0"/>
+        <dgm:cxn modelId="6" srcId="0" destId="2" srcOrd="1" destOrd="0"/>
+        <dgm:cxn modelId="7" srcId="0" destId="3" srcOrd="2" destOrd="0"/>
+        <dgm:cxn modelId="8" srcId="0" destId="4" srcOrd="3" destOrd="0"/>
+        <dgm:cxn modelId="13" srcId="1" destId="11" srcOrd="0" destOrd="0"/>
+        <dgm:cxn modelId="23" srcId="2" destId="21" srcOrd="0" destOrd="0"/>
+        <dgm:cxn modelId="33" srcId="3" destId="31" srcOrd="0" destOrd="0"/>
+        <dgm:cxn modelId="43" srcId="4" destId="41" srcOrd="0" destOrd="0"/>
+      </dgm:cxnLst>
+      <dgm:bg/>
+      <dgm:whole/>
+    </dgm:dataModel>
+  </dgm:clrData>
+  <dgm:layoutNode name="linearFlow">
+    <dgm:varLst>
+      <dgm:dir/>
+      <dgm:animLvl val="lvl"/>
+      <dgm:resizeHandles/>
+    </dgm:varLst>
+    <dgm:choose name="Name0">
+      <dgm:if name="Name1" func="var" arg="dir" op="equ" val="norm">
+        <dgm:alg type="lin">
+          <dgm:param type="linDir" val="fromL"/>
+          <dgm:param type="nodeVertAlign" val="t"/>
+        </dgm:alg>
+      </dgm:if>
+      <dgm:else name="Name2">
+        <dgm:alg type="lin">
+          <dgm:param type="linDir" val="fromR"/>
+          <dgm:param type="nodeVertAlign" val="t"/>
+        </dgm:alg>
+      </dgm:else>
+    </dgm:choose>
+    <dgm:shape xmlns:r="http://schemas.openxmlformats.org/officeDocument/2006/relationships" r:blip="">
+      <dgm:adjLst/>
+    </dgm:shape>
+    <dgm:presOf/>
+    <dgm:constrLst>
+      <dgm:constr type="w" for="ch" forName="compositeNode" refType="w"/>
+      <dgm:constr type="h" for="ch" forName="compositeNode" refType="h"/>
+      <dgm:constr type="w" for="ch" forName="sibTrans" refType="w" refFor="ch" refForName="compositeNode" op="equ" fact="0.2"/>
+      <dgm:constr type="h" for="des" forName="childNode" op="equ"/>
+      <dgm:constr type="w" for="des" forName="childNode" op="equ"/>
+      <dgm:constr type="w" for="des" forName="parentNode" op="equ"/>
+      <dgm:constr type="h" for="des" forName="image" op="equ"/>
+      <dgm:constr type="w" for="des" forName="image" op="equ"/>
+      <dgm:constr type="primFontSz" for="des" forName="parentNode" op="equ" val="65"/>
+      <dgm:constr type="primFontSz" for="des" forName="childNode" op="equ" val="65"/>
+    </dgm:constrLst>
+    <dgm:ruleLst/>
+    <dgm:forEach name="Name3" axis="ch" ptType="node">
+      <dgm:layoutNode name="compositeNode">
+        <dgm:varLst>
+          <dgm:bulletEnabled val="1"/>
+        </dgm:varLst>
+        <dgm:alg type="composite"/>
+        <dgm:presOf/>
+        <dgm:choose name="Name4">
+          <dgm:if name="Name5" func="var" arg="dir" op="equ" val="norm">
+            <dgm:constrLst>
+              <dgm:constr type="w" for="ch" forName="image" refType="w"/>
+              <dgm:constr type="h" for="ch" forName="image" refType="h"/>
+              <dgm:constr type="h" for="ch" forName="image" refType="w" refFor="ch" refForName="image" op="lte"/>
+              <dgm:constr type="w" for="ch" forName="image" refType="h" refFor="ch" refForName="image" op="lte"/>
+              <dgm:constr type="w" for="ch" forName="image" refType="w" op="lte" fact="0.33"/>
+              <dgm:constr type="h" for="ch" forName="image" refType="h" op="lte" fact="0.33"/>
+              <dgm:constr type="t" for="ch" forName="image"/>
+              <dgm:constr type="l" for="ch" forName="image"/>
+              <dgm:constr type="w" for="ch" forName="childNode" refType="w" fact="0.85"/>
+              <dgm:constr type="h" for="ch" forName="childNode" refType="h" fact="0.78"/>
+              <dgm:constr type="t" for="ch" forName="childNode" refType="h" refFor="ch" refForName="image" fact="0.66"/>
+              <dgm:constr type="l" for="ch" forName="childNode" refType="w" refFor="ch" refForName="image" fact="0.5"/>
+              <dgm:constr type="tMarg" for="ch" forName="childNode" refType="w" refFor="ch" refForName="image" fact="1.25"/>
+              <dgm:constr type="t" for="ch" forName="parentNode" refType="h" refFor="ch" refForName="image" fact="0.66"/>
+              <dgm:constr type="b" for="ch" forName="parentNode" refType="b" refFor="ch" refForName="childNode"/>
+              <dgm:constr type="l" for="ch" forName="parentNode"/>
+              <dgm:constr type="r" for="ch" forName="parentNode" refType="l" refFor="ch" refForName="childNode"/>
+              <dgm:constr type="rMarg" for="ch" forName="parentNode" refType="w" refFor="ch" refForName="image" fact="1.25"/>
+            </dgm:constrLst>
+          </dgm:if>
+          <dgm:else name="Name6">
+            <dgm:constrLst>
+              <dgm:constr type="w" for="ch" forName="image" refType="w"/>
+              <dgm:constr type="h" for="ch" forName="image" refType="h"/>
+              <dgm:constr type="h" for="ch" forName="image" refType="w" refFor="ch" refForName="image" op="lte"/>
+              <dgm:constr type="w" for="ch" forName="image" refType="h" refFor="ch" refForName="image" op="lte"/>
+              <dgm:constr type="w" for="ch" forName="image" refType="w" op="lte" fact="0.33"/>
+              <dgm:constr type="h" for="ch" forName="image" refType="h" op="lte" fact="0.33"/>
+              <dgm:constr type="t" for="ch" forName="image"/>
+              <dgm:constr type="r" for="ch" forName="image" refType="w"/>
+              <dgm:constr type="w" for="ch" forName="childNode" refType="w" fact="0.85"/>
+              <dgm:constr type="h" for="ch" forName="childNode" refType="h" fact="0.78"/>
+              <dgm:constr type="t" for="ch" forName="childNode" refType="h" refFor="ch" refForName="image" fact="0.66"/>
+              <dgm:constr type="r" for="ch" forName="childNode" refType="w"/>
+              <dgm:constr type="rOff" for="ch" forName="childNode" refType="w" refFor="ch" refForName="image" fact="-0.5"/>
+              <dgm:constr type="tMarg" for="ch" forName="childNode" refType="w" refFor="ch" refForName="image" fact="1.25"/>
+              <dgm:constr type="t" for="ch" forName="parentNode" refType="h" refFor="ch" refForName="image" fact="0.66"/>
+              <dgm:constr type="b" for="ch" forName="parentNode" refType="b" refFor="ch" refForName="childNode"/>
+              <dgm:constr type="r" for="ch" forName="parentNode" refType="w"/>
+              <dgm:constr type="l" for="ch" forName="parentNode" refType="r" refFor="ch" refForName="childNode"/>
+              <dgm:constr type="lOff" for="ch" forName="parentNode" refType="rOff" refFor="ch" refForName="childNode"/>
+              <dgm:constr type="lMarg" for="ch" forName="parentNode" refType="w" refFor="ch" refForName="image" fact="1.25"/>
+            </dgm:constrLst>
+          </dgm:else>
+        </dgm:choose>
+        <dgm:ruleLst>
+          <dgm:rule type="w" for="ch" forName="childNode" val="NaN" fact="0.4" max="NaN"/>
+          <dgm:rule type="h" for="ch" forName="childNode" val="NaN" fact="0.5" max="NaN"/>
+        </dgm:ruleLst>
+        <dgm:layoutNode name="image" styleLbl="fgImgPlace1">
+          <dgm:alg type="sp"/>
+          <dgm:shape xmlns:r="http://schemas.openxmlformats.org/officeDocument/2006/relationships" type="rect" r:blip="" zOrderOff="4" blipPhldr="1">
+            <dgm:adjLst/>
+          </dgm:shape>
+          <dgm:presOf/>
+          <dgm:constrLst/>
+          <dgm:ruleLst/>
+        </dgm:layoutNode>
+        <dgm:layoutNode name="childNode" styleLbl="node1">
+          <dgm:varLst>
+            <dgm:bulletEnabled val="1"/>
+          </dgm:varLst>
+          <dgm:alg type="tx">
+            <dgm:param type="stBulletLvl" val="1"/>
+          </dgm:alg>
+          <dgm:shape xmlns:r="http://schemas.openxmlformats.org/officeDocument/2006/relationships" type="rect" r:blip="" zOrderOff="2">
+            <dgm:adjLst/>
+          </dgm:shape>
+          <dgm:presOf axis="des" ptType="node"/>
+          <dgm:constrLst/>
+          <dgm:ruleLst>
+            <dgm:rule type="primFontSz" val="5" fact="NaN" max="NaN"/>
+          </dgm:ruleLst>
+        </dgm:layoutNode>
+        <dgm:layoutNode name="parentNode" styleLbl="revTx">
+          <dgm:varLst>
+            <dgm:chMax val="0"/>
+            <dgm:bulletEnabled val="1"/>
+          </dgm:varLst>
+          <dgm:choose name="Name7">
+            <dgm:if name="Name8" func="var" arg="dir" op="equ" val="norm">
+              <dgm:alg type="tx">
+                <dgm:param type="autoTxRot" val="grav"/>
+                <dgm:param type="txAnchorVert" val="t"/>
+                <dgm:param type="parTxLTRAlign" val="r"/>
+                <dgm:param type="parTxRTLAlign" val="r"/>
+              </dgm:alg>
+              <dgm:shape xmlns:r="http://schemas.openxmlformats.org/officeDocument/2006/relationships" rot="270" type="rect" r:blip="">
+                <dgm:adjLst/>
+              </dgm:shape>
+              <dgm:presOf axis="self"/>
+              <dgm:constrLst>
+                <dgm:constr type="lMarg"/>
+                <dgm:constr type="bMarg"/>
+                <dgm:constr type="tMarg"/>
+              </dgm:constrLst>
+            </dgm:if>
+            <dgm:else name="Name9">
+              <dgm:alg type="tx">
+                <dgm:param type="autoTxRot" val="grav"/>
+                <dgm:param type="parTxLTRAlign" val="l"/>
+                <dgm:param type="parTxRTLAlign" val="l"/>
+              </dgm:alg>
+              <dgm:shape xmlns:r="http://schemas.openxmlformats.org/officeDocument/2006/relationships" rot="90" type="rect" r:blip="">
+                <dgm:adjLst/>
+              </dgm:shape>
+              <dgm:presOf axis="self"/>
+              <dgm:constrLst>
+                <dgm:constr type="rMarg"/>
+                <dgm:constr type="bMarg"/>
+                <dgm:constr type="tMarg"/>
+              </dgm:constrLst>
+            </dgm:else>
+          </dgm:choose>
+          <dgm:ruleLst>
+            <dgm:rule type="primFontSz" val="5" fact="NaN" max="NaN"/>
+          </dgm:ruleLst>
+        </dgm:layoutNode>
+      </dgm:layoutNode>
+      <dgm:forEach name="Name10" axis="followSib" ptType="sibTrans" cnt="1">
+        <dgm:layoutNode name="sibTrans">
+          <dgm:alg type="sp"/>
+          <dgm:shape xmlns:r="http://schemas.openxmlformats.org/officeDocument/2006/relationships" r:blip="">
+            <dgm:adjLst/>
+          </dgm:shape>
+          <dgm:presOf axis="self"/>
+          <dgm:constrLst/>
+          <dgm:ruleLst/>
+        </dgm:layoutNode>
+      </dgm:forEach>
+    </dgm:forEach>
+  </dgm:layoutNode>
+</dgm:layoutDef>
+</file>
+
+<file path=ppt/diagrams/layout2.xml><?xml version="1.0" encoding="utf-8"?>
+<dgm:layoutDef xmlns:dgm="http://schemas.openxmlformats.org/drawingml/2006/diagram" xmlns:a="http://schemas.openxmlformats.org/drawingml/2006/main" uniqueId="urn:microsoft.com/office/officeart/2005/8/layout/hList2">
+  <dgm:title val=""/>
+  <dgm:desc val=""/>
+  <dgm:catLst>
+    <dgm:cat type="list" pri="6000"/>
+    <dgm:cat type="relationship" pri="16000"/>
+    <dgm:cat type="picture" pri="29000"/>
+    <dgm:cat type="pictureconvert" pri="29000"/>
+  </dgm:catLst>
+  <dgm:sampData>
+    <dgm:dataModel>
+      <dgm:ptLst>
+        <dgm:pt modelId="0" type="doc"/>
+        <dgm:pt modelId="1">
+          <dgm:prSet phldr="1"/>
+        </dgm:pt>
+        <dgm:pt modelId="11">
+          <dgm:prSet phldr="1"/>
+        </dgm:pt>
+        <dgm:pt modelId="12">
+          <dgm:prSet phldr="1"/>
+        </dgm:pt>
+        <dgm:pt modelId="2">
+          <dgm:prSet phldr="1"/>
+        </dgm:pt>
+        <dgm:pt modelId="21">
+          <dgm:prSet phldr="1"/>
+        </dgm:pt>
+        <dgm:pt modelId="22">
+          <dgm:prSet phldr="1"/>
+        </dgm:pt>
+        <dgm:pt modelId="3">
+          <dgm:prSet phldr="1"/>
+        </dgm:pt>
+        <dgm:pt modelId="31">
+          <dgm:prSet phldr="1"/>
+        </dgm:pt>
+        <dgm:pt modelId="32">
+          <dgm:prSet phldr="1"/>
+        </dgm:pt>
+      </dgm:ptLst>
+      <dgm:cxnLst>
+        <dgm:cxn modelId="4" srcId="0" destId="1" srcOrd="0" destOrd="0"/>
+        <dgm:cxn modelId="5" srcId="0" destId="2" srcOrd="1" destOrd="0"/>
+        <dgm:cxn modelId="6" srcId="0" destId="3" srcOrd="2" destOrd="0"/>
+        <dgm:cxn modelId="13" srcId="1" destId="11" srcOrd="0" destOrd="0"/>
+        <dgm:cxn modelId="14" srcId="1" destId="12" srcOrd="1" destOrd="0"/>
+        <dgm:cxn modelId="23" srcId="2" destId="21" srcOrd="0" destOrd="0"/>
+        <dgm:cxn modelId="24" srcId="2" destId="22" srcOrd="1" destOrd="0"/>
+        <dgm:cxn modelId="33" srcId="3" destId="31" srcOrd="0" destOrd="0"/>
+        <dgm:cxn modelId="34" srcId="3" destId="32" srcOrd="1" destOrd="0"/>
+      </dgm:cxnLst>
+      <dgm:bg/>
+      <dgm:whole/>
+    </dgm:dataModel>
+  </dgm:sampData>
+  <dgm:styleData>
+    <dgm:dataModel>
+      <dgm:ptLst>
+        <dgm:pt modelId="0" type="doc"/>
+        <dgm:pt modelId="1"/>
+        <dgm:pt modelId="11"/>
+        <dgm:pt modelId="2"/>
+        <dgm:pt modelId="21"/>
+      </dgm:ptLst>
+      <dgm:cxnLst>
+        <dgm:cxn modelId="4" srcId="0" destId="1" srcOrd="0" destOrd="0"/>
+        <dgm:cxn modelId="5" srcId="0" destId="2" srcOrd="1" destOrd="0"/>
+        <dgm:cxn modelId="13" srcId="1" destId="11" srcOrd="0" destOrd="0"/>
+        <dgm:cxn modelId="23" srcId="2" destId="21" srcOrd="0" destOrd="0"/>
+      </dgm:cxnLst>
+      <dgm:bg/>
+      <dgm:whole/>
+    </dgm:dataModel>
+  </dgm:styleData>
+  <dgm:clrData>
+    <dgm:dataModel>
+      <dgm:ptLst>
+        <dgm:pt modelId="0" type="doc"/>
+        <dgm:pt modelId="1"/>
+        <dgm:pt modelId="11"/>
+        <dgm:pt modelId="2"/>
+        <dgm:pt modelId="21"/>
+        <dgm:pt modelId="3"/>
+        <dgm:pt modelId="31"/>
+        <dgm:pt modelId="4"/>
+        <dgm:pt modelId="41"/>
+      </dgm:ptLst>
+      <dgm:cxnLst>
+        <dgm:cxn modelId="5" srcId="0" destId="1" srcOrd="0" destOrd="0"/>
+        <dgm:cxn modelId="6" srcId="0" destId="2" srcOrd="1" destOrd="0"/>
+        <dgm:cxn modelId="7" srcId="0" destId="3" srcOrd="2" destOrd="0"/>
+        <dgm:cxn modelId="8" srcId="0" destId="4" srcOrd="3" destOrd="0"/>
+        <dgm:cxn modelId="13" srcId="1" destId="11" srcOrd="0" destOrd="0"/>
+        <dgm:cxn modelId="23" srcId="2" destId="21" srcOrd="0" destOrd="0"/>
+        <dgm:cxn modelId="33" srcId="3" destId="31" srcOrd="0" destOrd="0"/>
+        <dgm:cxn modelId="43" srcId="4" destId="41" srcOrd="0" destOrd="0"/>
+      </dgm:cxnLst>
+      <dgm:bg/>
+      <dgm:whole/>
+    </dgm:dataModel>
+  </dgm:clrData>
+  <dgm:layoutNode name="linearFlow">
+    <dgm:varLst>
+      <dgm:dir/>
+      <dgm:animLvl val="lvl"/>
+      <dgm:resizeHandles/>
+    </dgm:varLst>
+    <dgm:choose name="Name0">
+      <dgm:if name="Name1" func="var" arg="dir" op="equ" val="norm">
+        <dgm:alg type="lin">
+          <dgm:param type="linDir" val="fromL"/>
+          <dgm:param type="nodeVertAlign" val="t"/>
+        </dgm:alg>
+      </dgm:if>
+      <dgm:else name="Name2">
+        <dgm:alg type="lin">
+          <dgm:param type="linDir" val="fromR"/>
+          <dgm:param type="nodeVertAlign" val="t"/>
+        </dgm:alg>
+      </dgm:else>
+    </dgm:choose>
+    <dgm:shape xmlns:r="http://schemas.openxmlformats.org/officeDocument/2006/relationships" r:blip="">
+      <dgm:adjLst/>
+    </dgm:shape>
+    <dgm:presOf/>
+    <dgm:constrLst>
+      <dgm:constr type="w" for="ch" forName="compositeNode" refType="w"/>
+      <dgm:constr type="h" for="ch" forName="compositeNode" refType="h"/>
+      <dgm:constr type="w" for="ch" forName="sibTrans" refType="w" refFor="ch" refForName="compositeNode" op="equ" fact="0.2"/>
+      <dgm:constr type="h" for="des" forName="childNode" op="equ"/>
+      <dgm:constr type="w" for="des" forName="childNode" op="equ"/>
+      <dgm:constr type="w" for="des" forName="parentNode" op="equ"/>
+      <dgm:constr type="h" for="des" forName="image" op="equ"/>
+      <dgm:constr type="w" for="des" forName="image" op="equ"/>
+      <dgm:constr type="primFontSz" for="des" forName="parentNode" op="equ" val="65"/>
+      <dgm:constr type="primFontSz" for="des" forName="childNode" op="equ" val="65"/>
+    </dgm:constrLst>
+    <dgm:ruleLst/>
+    <dgm:forEach name="Name3" axis="ch" ptType="node">
+      <dgm:layoutNode name="compositeNode">
+        <dgm:varLst>
+          <dgm:bulletEnabled val="1"/>
+        </dgm:varLst>
+        <dgm:alg type="composite"/>
+        <dgm:presOf/>
+        <dgm:choose name="Name4">
+          <dgm:if name="Name5" func="var" arg="dir" op="equ" val="norm">
+            <dgm:constrLst>
+              <dgm:constr type="w" for="ch" forName="image" refType="w"/>
+              <dgm:constr type="h" for="ch" forName="image" refType="h"/>
+              <dgm:constr type="h" for="ch" forName="image" refType="w" refFor="ch" refForName="image" op="lte"/>
+              <dgm:constr type="w" for="ch" forName="image" refType="h" refFor="ch" refForName="image" op="lte"/>
+              <dgm:constr type="w" for="ch" forName="image" refType="w" op="lte" fact="0.33"/>
+              <dgm:constr type="h" for="ch" forName="image" refType="h" op="lte" fact="0.33"/>
+              <dgm:constr type="t" for="ch" forName="image"/>
+              <dgm:constr type="l" for="ch" forName="image"/>
+              <dgm:constr type="w" for="ch" forName="childNode" refType="w" fact="0.85"/>
+              <dgm:constr type="h" for="ch" forName="childNode" refType="h" fact="0.78"/>
+              <dgm:constr type="t" for="ch" forName="childNode" refType="h" refFor="ch" refForName="image" fact="0.66"/>
+              <dgm:constr type="l" for="ch" forName="childNode" refType="w" refFor="ch" refForName="image" fact="0.5"/>
+              <dgm:constr type="tMarg" for="ch" forName="childNode" refType="w" refFor="ch" refForName="image" fact="1.25"/>
+              <dgm:constr type="t" for="ch" forName="parentNode" refType="h" refFor="ch" refForName="image" fact="0.66"/>
+              <dgm:constr type="b" for="ch" forName="parentNode" refType="b" refFor="ch" refForName="childNode"/>
+              <dgm:constr type="l" for="ch" forName="parentNode"/>
+              <dgm:constr type="r" for="ch" forName="parentNode" refType="l" refFor="ch" refForName="childNode"/>
+              <dgm:constr type="rMarg" for="ch" forName="parentNode" refType="w" refFor="ch" refForName="image" fact="1.25"/>
+            </dgm:constrLst>
+          </dgm:if>
+          <dgm:else name="Name6">
+            <dgm:constrLst>
+              <dgm:constr type="w" for="ch" forName="image" refType="w"/>
+              <dgm:constr type="h" for="ch" forName="image" refType="h"/>
+              <dgm:constr type="h" for="ch" forName="image" refType="w" refFor="ch" refForName="image" op="lte"/>
+              <dgm:constr type="w" for="ch" forName="image" refType="h" refFor="ch" refForName="image" op="lte"/>
+              <dgm:constr type="w" for="ch" forName="image" refType="w" op="lte" fact="0.33"/>
+              <dgm:constr type="h" for="ch" forName="image" refType="h" op="lte" fact="0.33"/>
+              <dgm:constr type="t" for="ch" forName="image"/>
+              <dgm:constr type="r" for="ch" forName="image" refType="w"/>
+              <dgm:constr type="w" for="ch" forName="childNode" refType="w" fact="0.85"/>
+              <dgm:constr type="h" for="ch" forName="childNode" refType="h" fact="0.78"/>
+              <dgm:constr type="t" for="ch" forName="childNode" refType="h" refFor="ch" refForName="image" fact="0.66"/>
+              <dgm:constr type="r" for="ch" forName="childNode" refType="w"/>
+              <dgm:constr type="rOff" for="ch" forName="childNode" refType="w" refFor="ch" refForName="image" fact="-0.5"/>
+              <dgm:constr type="tMarg" for="ch" forName="childNode" refType="w" refFor="ch" refForName="image" fact="1.25"/>
+              <dgm:constr type="t" for="ch" forName="parentNode" refType="h" refFor="ch" refForName="image" fact="0.66"/>
+              <dgm:constr type="b" for="ch" forName="parentNode" refType="b" refFor="ch" refForName="childNode"/>
+              <dgm:constr type="r" for="ch" forName="parentNode" refType="w"/>
+              <dgm:constr type="l" for="ch" forName="parentNode" refType="r" refFor="ch" refForName="childNode"/>
+              <dgm:constr type="lOff" for="ch" forName="parentNode" refType="rOff" refFor="ch" refForName="childNode"/>
+              <dgm:constr type="lMarg" for="ch" forName="parentNode" refType="w" refFor="ch" refForName="image" fact="1.25"/>
+            </dgm:constrLst>
+          </dgm:else>
+        </dgm:choose>
+        <dgm:ruleLst>
+          <dgm:rule type="w" for="ch" forName="childNode" val="NaN" fact="0.4" max="NaN"/>
+          <dgm:rule type="h" for="ch" forName="childNode" val="NaN" fact="0.5" max="NaN"/>
+        </dgm:ruleLst>
+        <dgm:layoutNode name="image" styleLbl="fgImgPlace1">
+          <dgm:alg type="sp"/>
+          <dgm:shape xmlns:r="http://schemas.openxmlformats.org/officeDocument/2006/relationships" type="rect" r:blip="" zOrderOff="4" blipPhldr="1">
+            <dgm:adjLst/>
+          </dgm:shape>
+          <dgm:presOf/>
+          <dgm:constrLst/>
+          <dgm:ruleLst/>
+        </dgm:layoutNode>
+        <dgm:layoutNode name="childNode" styleLbl="node1">
+          <dgm:varLst>
+            <dgm:bulletEnabled val="1"/>
+          </dgm:varLst>
+          <dgm:alg type="tx">
+            <dgm:param type="stBulletLvl" val="1"/>
+          </dgm:alg>
+          <dgm:shape xmlns:r="http://schemas.openxmlformats.org/officeDocument/2006/relationships" type="rect" r:blip="" zOrderOff="2">
+            <dgm:adjLst/>
+          </dgm:shape>
+          <dgm:presOf axis="des" ptType="node"/>
+          <dgm:constrLst/>
+          <dgm:ruleLst>
+            <dgm:rule type="primFontSz" val="5" fact="NaN" max="NaN"/>
+          </dgm:ruleLst>
+        </dgm:layoutNode>
+        <dgm:layoutNode name="parentNode" styleLbl="revTx">
+          <dgm:varLst>
+            <dgm:chMax val="0"/>
+            <dgm:bulletEnabled val="1"/>
+          </dgm:varLst>
+          <dgm:choose name="Name7">
+            <dgm:if name="Name8" func="var" arg="dir" op="equ" val="norm">
+              <dgm:alg type="tx">
+                <dgm:param type="autoTxRot" val="grav"/>
+                <dgm:param type="txAnchorVert" val="t"/>
+                <dgm:param type="parTxLTRAlign" val="r"/>
+                <dgm:param type="parTxRTLAlign" val="r"/>
+              </dgm:alg>
+              <dgm:shape xmlns:r="http://schemas.openxmlformats.org/officeDocument/2006/relationships" rot="270" type="rect" r:blip="">
+                <dgm:adjLst/>
+              </dgm:shape>
+              <dgm:presOf axis="self"/>
+              <dgm:constrLst>
+                <dgm:constr type="lMarg"/>
+                <dgm:constr type="bMarg"/>
+                <dgm:constr type="tMarg"/>
+              </dgm:constrLst>
+            </dgm:if>
+            <dgm:else name="Name9">
+              <dgm:alg type="tx">
+                <dgm:param type="autoTxRot" val="grav"/>
+                <dgm:param type="parTxLTRAlign" val="l"/>
+                <dgm:param type="parTxRTLAlign" val="l"/>
+              </dgm:alg>
+              <dgm:shape xmlns:r="http://schemas.openxmlformats.org/officeDocument/2006/relationships" rot="90" type="rect" r:blip="">
+                <dgm:adjLst/>
+              </dgm:shape>
+              <dgm:presOf axis="self"/>
+              <dgm:constrLst>
+                <dgm:constr type="rMarg"/>
+                <dgm:constr type="bMarg"/>
+                <dgm:constr type="tMarg"/>
+              </dgm:constrLst>
+            </dgm:else>
+          </dgm:choose>
+          <dgm:ruleLst>
+            <dgm:rule type="primFontSz" val="5" fact="NaN" max="NaN"/>
+          </dgm:ruleLst>
+        </dgm:layoutNode>
+      </dgm:layoutNode>
+      <dgm:forEach name="Name10" axis="followSib" ptType="sibTrans" cnt="1">
+        <dgm:layoutNode name="sibTrans">
+          <dgm:alg type="sp"/>
+          <dgm:shape xmlns:r="http://schemas.openxmlformats.org/officeDocument/2006/relationships" r:blip="">
+            <dgm:adjLst/>
+          </dgm:shape>
+          <dgm:presOf axis="self"/>
+          <dgm:constrLst/>
+          <dgm:ruleLst/>
+        </dgm:layoutNode>
+      </dgm:forEach>
+    </dgm:forEach>
+  </dgm:layoutNode>
+</dgm:layoutDef>
+</file>
+
+<file path=ppt/diagrams/quickStyle1.xml><?xml version="1.0" encoding="utf-8"?>
+<dgm:styleDef xmlns:dgm="http://schemas.openxmlformats.org/drawingml/2006/diagram" xmlns:a="http://schemas.openxmlformats.org/drawingml/2006/main" uniqueId="urn:microsoft.com/office/officeart/2005/8/quickstyle/simple1">
+  <dgm:title val=""/>
+  <dgm:desc val=""/>
+  <dgm:catLst>
+    <dgm:cat type="simple" pri="10100"/>
+  </dgm:catLst>
+  <dgm:scene3d>
+    <a:camera prst="orthographicFront"/>
+    <a:lightRig rig="threePt" dir="t"/>
+  </dgm:scene3d>
+  <dgm:styleLbl name="node0">
+    <dgm:scene3d>
+      <a:camera prst="orthographicFront"/>
+      <a:lightRig rig="threePt" dir="t"/>
+    </dgm:scene3d>
+    <dgm:sp3d/>
+    <dgm:txPr/>
+    <dgm:style>
+      <a:lnRef idx="2">
+        <a:scrgbClr r="0" g="0" b="0"/>
+      </a:lnRef>
+      <a:fillRef idx="1">
+        <a:scrgbClr r="0" g="0" b="0"/>
+      </a:fillRef>
+      <a:effectRef idx="0">
+        <a:scrgbClr r="0" g="0" b="0"/>
+      </a:effectRef>
+      <a:fontRef idx="minor">
+        <a:schemeClr val="lt1"/>
+      </a:fontRef>
+    </dgm:style>
+  </dgm:styleLbl>
+  <dgm:styleLbl name="lnNode1">
+    <dgm:scene3d>
+      <a:camera prst="orthographicFront"/>
+      <a:lightRig rig="threePt" dir="t"/>
+    </dgm:scene3d>
+    <dgm:sp3d/>
+    <dgm:txPr/>
+    <dgm:style>
+      <a:lnRef idx="2">
+        <a:scrgbClr r="0" g="0" b="0"/>
+      </a:lnRef>
+      <a:fillRef idx="1">
+        <a:scrgbClr r="0" g="0" b="0"/>
+      </a:fillRef>
+      <a:effectRef idx="0">
+        <a:scrgbClr r="0" g="0" b="0"/>
+      </a:effectRef>
+      <a:fontRef idx="minor">
+        <a:schemeClr val="lt1"/>
+      </a:fontRef>
+    </dgm:style>
+  </dgm:styleLbl>
+  <dgm:styleLbl name="vennNode1">
+    <dgm:scene3d>
+      <a:camera prst="orthographicFront"/>
+      <a:lightRig rig="threePt" dir="t"/>
+    </dgm:scene3d>
+    <dgm:sp3d/>
+    <dgm:txPr/>
+    <dgm:style>
+      <a:lnRef idx="2">
+        <a:scrgbClr r="0" g="0" b="0"/>
+      </a:lnRef>
+      <a:fillRef idx="1">
+        <a:scrgbClr r="0" g="0" b="0"/>
+      </a:fillRef>
+      <a:effectRef idx="0">
+        <a:scrgbClr r="0" g="0" b="0"/>
+      </a:effectRef>
+      <a:fontRef idx="minor">
+        <a:schemeClr val="tx1"/>
+      </a:fontRef>
+    </dgm:style>
+  </dgm:styleLbl>
+  <dgm:styleLbl name="alignNode1">
+    <dgm:scene3d>
+      <a:camera prst="orthographicFront"/>
+      <a:lightRig rig="threePt" dir="t"/>
+    </dgm:scene3d>
+    <dgm:sp3d/>
+    <dgm:txPr/>
+    <dgm:style>
+      <a:lnRef idx="2">
+        <a:scrgbClr r="0" g="0" b="0"/>
+      </a:lnRef>
+      <a:fillRef idx="1">
+        <a:scrgbClr r="0" g="0" b="0"/>
+      </a:fillRef>
+      <a:effectRef idx="0">
+        <a:scrgbClr r="0" g="0" b="0"/>
+      </a:effectRef>
+      <a:fontRef idx="minor">
+        <a:schemeClr val="lt1"/>
+      </a:fontRef>
+    </dgm:style>
+  </dgm:styleLbl>
+  <dgm:styleLbl name="node1">
+    <dgm:scene3d>
+      <a:camera prst="orthographicFront"/>
+      <a:lightRig rig="threePt" dir="t"/>
+    </dgm:scene3d>
+    <dgm:sp3d/>
+    <dgm:txPr/>
+    <dgm:style>
+      <a:lnRef idx="2">
+        <a:scrgbClr r="0" g="0" b="0"/>
+      </a:lnRef>
+      <a:fillRef idx="1">
+        <a:scrgbClr r="0" g="0" b="0"/>
+      </a:fillRef>
+      <a:effectRef idx="0">
+        <a:scrgbClr r="0" g="0" b="0"/>
+      </a:effectRef>
+      <a:fontRef idx="minor">
+        <a:schemeClr val="lt1"/>
+      </a:fontRef>
+    </dgm:style>
+  </dgm:styleLbl>
+  <dgm:styleLbl name="node2">
+    <dgm:scene3d>
+      <a:camera prst="orthographicFront"/>
+      <a:lightRig rig="threePt" dir="t"/>
+    </dgm:scene3d>
+    <dgm:sp3d/>
+    <dgm:txPr/>
+    <dgm:style>
+      <a:lnRef idx="2">
+        <a:scrgbClr r="0" g="0" b="0"/>
+      </a:lnRef>
+      <a:fillRef idx="1">
+        <a:scrgbClr r="0" g="0" b="0"/>
+      </a:fillRef>
+      <a:effectRef idx="0">
+        <a:scrgbClr r="0" g="0" b="0"/>
+      </a:effectRef>
+      <a:fontRef idx="minor">
+        <a:schemeClr val="lt1"/>
+      </a:fontRef>
+    </dgm:style>
+  </dgm:styleLbl>
+  <dgm:styleLbl name="node3">
+    <dgm:scene3d>
+      <a:camera prst="orthographicFront"/>
+      <a:lightRig rig="threePt" dir="t"/>
+    </dgm:scene3d>
+    <dgm:sp3d/>
+    <dgm:txPr/>
+    <dgm:style>
+      <a:lnRef idx="2">
+        <a:scrgbClr r="0" g="0" b="0"/>
+      </a:lnRef>
+      <a:fillRef idx="1">
+        <a:scrgbClr r="0" g="0" b="0"/>
+      </a:fillRef>
+      <a:effectRef idx="0">
+        <a:scrgbClr r="0" g="0" b="0"/>
+      </a:effectRef>
+      <a:fontRef idx="minor">
+        <a:schemeClr val="lt1"/>
+      </a:fontRef>
+    </dgm:style>
+  </dgm:styleLbl>
+  <dgm:styleLbl name="node4">
+    <dgm:scene3d>
+      <a:camera prst="orthographicFront"/>
+      <a:lightRig rig="threePt" dir="t"/>
+    </dgm:scene3d>
+    <dgm:sp3d/>
+    <dgm:txPr/>
+    <dgm:style>
+      <a:lnRef idx="2">
+        <a:scrgbClr r="0" g="0" b="0"/>
+      </a:lnRef>
+      <a:fillRef idx="1">
+        <a:scrgbClr r="0" g="0" b="0"/>
+      </a:fillRef>
+      <a:effectRef idx="0">
+        <a:scrgbClr r="0" g="0" b="0"/>
+      </a:effectRef>
+      <a:fontRef idx="minor">
+        <a:schemeClr val="lt1"/>
+      </a:fontRef>
+    </dgm:style>
+  </dgm:styleLbl>
+  <dgm:styleLbl name="fgImgPlace1">
+    <dgm:scene3d>
+      <a:camera prst="orthographicFront"/>
+      <a:lightRig rig="threePt" dir="t"/>
+    </dgm:scene3d>
+    <dgm:sp3d/>
+    <dgm:txPr/>
+    <dgm:style>
+      <a:lnRef idx="2">
+        <a:scrgbClr r="0" g="0" b="0"/>
+      </a:lnRef>
+      <a:fillRef idx="1">
+        <a:scrgbClr r="0" g="0" b="0"/>
+      </a:fillRef>
+      <a:effectRef idx="0">
+        <a:scrgbClr r="0" g="0" b="0"/>
+      </a:effectRef>
+      <a:fontRef idx="minor"/>
+    </dgm:style>
+  </dgm:styleLbl>
+  <dgm:styleLbl name="alignImgPlace1">
+    <dgm:scene3d>
+      <a:camera prst="orthographicFront"/>
+      <a:lightRig rig="threePt" dir="t"/>
+    </dgm:scene3d>
+    <dgm:sp3d/>
+    <dgm:txPr/>
+    <dgm:style>
+      <a:lnRef idx="2">
+        <a:scrgbClr r="0" g="0" b="0"/>
+      </a:lnRef>
+      <a:fillRef idx="1">
+        <a:scrgbClr r="0" g="0" b="0"/>
+      </a:fillRef>
+      <a:effectRef idx="0">
+        <a:scrgbClr r="0" g="0" b="0"/>
+      </a:effectRef>
+      <a:fontRef idx="minor"/>
+    </dgm:style>
+  </dgm:styleLbl>
+  <dgm:styleLbl name="bgImgPlace1">
+    <dgm:scene3d>
+      <a:camera prst="orthographicFront"/>
+      <a:lightRig rig="threePt" dir="t"/>
+    </dgm:scene3d>
+    <dgm:sp3d/>
+    <dgm:txPr/>
+    <dgm:style>
+      <a:lnRef idx="2">
+        <a:scrgbClr r="0" g="0" b="0"/>
+      </a:lnRef>
+      <a:fillRef idx="1">
+        <a:scrgbClr r="0" g="0" b="0"/>
+      </a:fillRef>
+      <a:effectRef idx="0">
+        <a:scrgbClr r="0" g="0" b="0"/>
+      </a:effectRef>
+      <a:fontRef idx="minor"/>
+    </dgm:style>
+  </dgm:styleLbl>
+  <dgm:styleLbl name="sibTrans2D1">
+    <dgm:scene3d>
+      <a:camera prst="orthographicFront"/>
+      <a:lightRig rig="threePt" dir="t"/>
+    </dgm:scene3d>
+    <dgm:sp3d/>
+    <dgm:txPr/>
+    <dgm:style>
+      <a:lnRef idx="0">
+        <a:scrgbClr r="0" g="0" b="0"/>
+      </a:lnRef>
+      <a:fillRef idx="1">
+        <a:scrgbClr r="0" g="0" b="0"/>
+      </a:fillRef>
+      <a:effectRef idx="0">
+        <a:scrgbClr r="0" g="0" b="0"/>
+      </a:effectRef>
+      <a:fontRef idx="minor">
+        <a:schemeClr val="lt1"/>
+      </a:fontRef>
+    </dgm:style>
+  </dgm:styleLbl>
+  <dgm:styleLbl name="fgSibTrans2D1">
+    <dgm:scene3d>
+      <a:camera prst="orthographicFront"/>
+      <a:lightRig rig="threePt" dir="t"/>
+    </dgm:scene3d>
+    <dgm:sp3d/>
+    <dgm:txPr/>
+    <dgm:style>
+      <a:lnRef idx="0">
+        <a:scrgbClr r="0" g="0" b="0"/>
+      </a:lnRef>
+      <a:fillRef idx="1">
+        <a:scrgbClr r="0" g="0" b="0"/>
+      </a:fillRef>
+      <a:effectRef idx="0">
+        <a:scrgbClr r="0" g="0" b="0"/>
+      </a:effectRef>
+      <a:fontRef idx="minor">
+        <a:schemeClr val="lt1"/>
+      </a:fontRef>
+    </dgm:style>
+  </dgm:styleLbl>
+  <dgm:styleLbl name="bgSibTrans2D1">
+    <dgm:scene3d>
+      <a:camera prst="orthographicFront"/>
+      <a:lightRig rig="threePt" dir="t"/>
+    </dgm:scene3d>
+    <dgm:sp3d/>
+    <dgm:txPr/>
+    <dgm:style>
+      <a:lnRef idx="0">
+        <a:scrgbClr r="0" g="0" b="0"/>
+      </a:lnRef>
+      <a:fillRef idx="1">
+        <a:scrgbClr r="0" g="0" b="0"/>
+      </a:fillRef>
+      <a:effectRef idx="0">
+        <a:scrgbClr r="0" g="0" b="0"/>
+      </a:effectRef>
+      <a:fontRef idx="minor">
+        <a:schemeClr val="lt1"/>
+      </a:fontRef>
+    </dgm:style>
+  </dgm:styleLbl>
+  <dgm:styleLbl name="sibTrans1D1">
+    <dgm:scene3d>
+      <a:camera prst="orthographicFront"/>
+      <a:lightRig rig="threePt" dir="t"/>
+    </dgm:scene3d>
+    <dgm:sp3d/>
+    <dgm:txPr/>
+    <dgm:style>
+      <a:lnRef idx="1">
+        <a:scrgbClr r="0" g="0" b="0"/>
+      </a:lnRef>
+      <a:fillRef idx="0">
+        <a:scrgbClr r="0" g="0" b="0"/>
+      </a:fillRef>
+      <a:effectRef idx="0">
+        <a:scrgbClr r="0" g="0" b="0"/>
+      </a:effectRef>
+      <a:fontRef idx="minor"/>
+    </dgm:style>
+  </dgm:styleLbl>
+  <dgm:styleLbl name="callout">
+    <dgm:scene3d>
+      <a:camera prst="orthographicFront"/>
+      <a:lightRig rig="threePt" dir="t"/>
+    </dgm:scene3d>
+    <dgm:sp3d/>
+    <dgm:txPr/>
+    <dgm:style>
+      <a:lnRef idx="2">
+        <a:scrgbClr r="0" g="0" b="0"/>
+      </a:lnRef>
+      <a:fillRef idx="1">
+        <a:scrgbClr r="0" g="0" b="0"/>
+      </a:fillRef>
+      <a:effectRef idx="0">
+        <a:scrgbClr r="0" g="0" b="0"/>
+      </a:effectRef>
+      <a:fontRef idx="minor"/>
+    </dgm:style>
+  </dgm:styleLbl>
+  <dgm:styleLbl name="asst0">
+    <dgm:scene3d>
+      <a:camera prst="orthographicFront"/>
+      <a:lightRig rig="threePt" dir="t"/>
+    </dgm:scene3d>
+    <dgm:sp3d/>
+    <dgm:txPr/>
+    <dgm:style>
+      <a:lnRef idx="2">
+        <a:scrgbClr r="0" g="0" b="0"/>
+      </a:lnRef>
+      <a:fillRef idx="1">
+        <a:scrgbClr r="0" g="0" b="0"/>
+      </a:fillRef>
+      <a:effectRef idx="0">
+        <a:scrgbClr r="0" g="0" b="0"/>
+      </a:effectRef>
+      <a:fontRef idx="minor">
+        <a:schemeClr val="lt1"/>
+      </a:fontRef>
+    </dgm:style>
+  </dgm:styleLbl>
+  <dgm:styleLbl name="asst1">
+    <dgm:scene3d>
+      <a:camera prst="orthographicFront"/>
+      <a:lightRig rig="threePt" dir="t"/>
+    </dgm:scene3d>
+    <dgm:sp3d/>
+    <dgm:txPr/>
+    <dgm:style>
+      <a:lnRef idx="2">
+        <a:scrgbClr r="0" g="0" b="0"/>
+      </a:lnRef>
+      <a:fillRef idx="1">
+        <a:scrgbClr r="0" g="0" b="0"/>
+      </a:fillRef>
+      <a:effectRef idx="0">
+        <a:scrgbClr r="0" g="0" b="0"/>
+      </a:effectRef>
+      <a:fontRef idx="minor">
+        <a:schemeClr val="lt1"/>
+      </a:fontRef>
+    </dgm:style>
+  </dgm:styleLbl>
+  <dgm:styleLbl name="asst2">
+    <dgm:scene3d>
+      <a:camera prst="orthographicFront"/>
+      <a:lightRig rig="threePt" dir="t"/>
+    </dgm:scene3d>
+    <dgm:sp3d/>
+    <dgm:txPr/>
+    <dgm:style>
+      <a:lnRef idx="2">
+        <a:scrgbClr r="0" g="0" b="0"/>
+      </a:lnRef>
+      <a:fillRef idx="1">
+        <a:scrgbClr r="0" g="0" b="0"/>
+      </a:fillRef>
+      <a:effectRef idx="0">
+        <a:scrgbClr r="0" g="0" b="0"/>
+      </a:effectRef>
+      <a:fontRef idx="minor">
+        <a:schemeClr val="lt1"/>
+      </a:fontRef>
+    </dgm:style>
+  </dgm:styleLbl>
+  <dgm:styleLbl name="asst3">
+    <dgm:scene3d>
+      <a:camera prst="orthographicFront"/>
+      <a:lightRig rig="threePt" dir="t"/>
+    </dgm:scene3d>
+    <dgm:sp3d/>
+    <dgm:txPr/>
+    <dgm:style>
+      <a:lnRef idx="2">
+        <a:scrgbClr r="0" g="0" b="0"/>
+      </a:lnRef>
+      <a:fillRef idx="1">
+        <a:scrgbClr r="0" g="0" b="0"/>
+      </a:fillRef>
+      <a:effectRef idx="0">
+        <a:scrgbClr r="0" g="0" b="0"/>
+      </a:effectRef>
+      <a:fontRef idx="minor">
+        <a:schemeClr val="lt1"/>
+      </a:fontRef>
+    </dgm:style>
+  </dgm:styleLbl>
+  <dgm:styleLbl name="asst4">
+    <dgm:scene3d>
+      <a:camera prst="orthographicFront"/>
+      <a:lightRig rig="threePt" dir="t"/>
+    </dgm:scene3d>
+    <dgm:sp3d/>
+    <dgm:txPr/>
+    <dgm:style>
+      <a:lnRef idx="2">
+        <a:scrgbClr r="0" g="0" b="0"/>
+      </a:lnRef>
+      <a:fillRef idx="1">
+        <a:scrgbClr r="0" g="0" b="0"/>
+      </a:fillRef>
+      <a:effectRef idx="0">
+        <a:scrgbClr r="0" g="0" b="0"/>
+      </a:effectRef>
+      <a:fontRef idx="minor">
+        <a:schemeClr val="lt1"/>
+      </a:fontRef>
+    </dgm:style>
+  </dgm:styleLbl>
+  <dgm:styleLbl name="parChTrans2D1">
+    <dgm:scene3d>
+      <a:camera prst="orthographicFront"/>
+      <a:lightRig rig="threePt" dir="t"/>
+    </dgm:scene3d>
+    <dgm:sp3d/>
+    <dgm:txPr/>
+    <dgm:style>
+      <a:lnRef idx="2">
+        <a:scrgbClr r="0" g="0" b="0"/>
+      </a:lnRef>
+      <a:fillRef idx="1">
+        <a:scrgbClr r="0" g="0" b="0"/>
+      </a:fillRef>
+      <a:effectRef idx="0">
+        <a:scrgbClr r="0" g="0" b="0"/>
+      </a:effectRef>
+      <a:fontRef idx="minor">
+        <a:schemeClr val="lt1"/>
+      </a:fontRef>
+    </dgm:style>
+  </dgm:styleLbl>
+  <dgm:styleLbl name="parChTrans2D2">
+    <dgm:scene3d>
+      <a:camera prst="orthographicFront"/>
+      <a:lightRig rig="threePt" dir="t"/>
+    </dgm:scene3d>
+    <dgm:sp3d/>
+    <dgm:txPr/>
+    <dgm:style>
+      <a:lnRef idx="2">
+        <a:scrgbClr r="0" g="0" b="0"/>
+      </a:lnRef>
+      <a:fillRef idx="1">
+        <a:scrgbClr r="0" g="0" b="0"/>
+      </a:fillRef>
+      <a:effectRef idx="0">
+        <a:scrgbClr r="0" g="0" b="0"/>
+      </a:effectRef>
+      <a:fontRef idx="minor">
+        <a:schemeClr val="lt1"/>
+      </a:fontRef>
+    </dgm:style>
+  </dgm:styleLbl>
+  <dgm:styleLbl name="parChTrans2D3">
+    <dgm:scene3d>
+      <a:camera prst="orthographicFront"/>
+      <a:lightRig rig="threePt" dir="t"/>
+    </dgm:scene3d>
+    <dgm:sp3d/>
+    <dgm:txPr/>
+    <dgm:style>
+      <a:lnRef idx="2">
+        <a:scrgbClr r="0" g="0" b="0"/>
+      </a:lnRef>
+      <a:fillRef idx="1">
+        <a:scrgbClr r="0" g="0" b="0"/>
+      </a:fillRef>
+      <a:effectRef idx="0">
+        <a:scrgbClr r="0" g="0" b="0"/>
+      </a:effectRef>
+      <a:fontRef idx="minor">
+        <a:schemeClr val="lt1"/>
+      </a:fontRef>
+    </dgm:style>
+  </dgm:styleLbl>
+  <dgm:styleLbl name="parChTrans2D4">
+    <dgm:scene3d>
+      <a:camera prst="orthographicFront"/>
+      <a:lightRig rig="threePt" dir="t"/>
+    </dgm:scene3d>
+    <dgm:sp3d/>
+    <dgm:txPr/>
+    <dgm:style>
+      <a:lnRef idx="2">
+        <a:scrgbClr r="0" g="0" b="0"/>
+      </a:lnRef>
+      <a:fillRef idx="1">
+        <a:scrgbClr r="0" g="0" b="0"/>
+      </a:fillRef>
+      <a:effectRef idx="0">
+        <a:scrgbClr r="0" g="0" b="0"/>
+      </a:effectRef>
+      <a:fontRef idx="minor">
+        <a:schemeClr val="lt1"/>
+      </a:fontRef>
+    </dgm:style>
+  </dgm:styleLbl>
+  <dgm:styleLbl name="parChTrans1D1">
+    <dgm:scene3d>
+      <a:camera prst="orthographicFront"/>
+      <a:lightRig rig="threePt" dir="t"/>
+    </dgm:scene3d>
+    <dgm:sp3d/>
+    <dgm:txPr/>
+    <dgm:style>
+      <a:lnRef idx="2">
+        <a:scrgbClr r="0" g="0" b="0"/>
+      </a:lnRef>
+      <a:fillRef idx="0">
+        <a:scrgbClr r="0" g="0" b="0"/>
+      </a:fillRef>
+      <a:effectRef idx="0">
+        <a:scrgbClr r="0" g="0" b="0"/>
+      </a:effectRef>
+      <a:fontRef idx="minor"/>
+    </dgm:style>
+  </dgm:styleLbl>
+  <dgm:styleLbl name="parChTrans1D2">
+    <dgm:scene3d>
+      <a:camera prst="orthographicFront"/>
+      <a:lightRig rig="threePt" dir="t"/>
+    </dgm:scene3d>
+    <dgm:sp3d/>
+    <dgm:txPr/>
+    <dgm:style>
+      <a:lnRef idx="2">
+        <a:scrgbClr r="0" g="0" b="0"/>
+      </a:lnRef>
+      <a:fillRef idx="0">
+        <a:scrgbClr r="0" g="0" b="0"/>
+      </a:fillRef>
+      <a:effectRef idx="0">
+        <a:scrgbClr r="0" g="0" b="0"/>
+      </a:effectRef>
+      <a:fontRef idx="minor"/>
+    </dgm:style>
+  </dgm:styleLbl>
+  <dgm:styleLbl name="parChTrans1D3">
+    <dgm:scene3d>
+      <a:camera prst="orthographicFront"/>
+      <a:lightRig rig="threePt" dir="t"/>
+    </dgm:scene3d>
+    <dgm:sp3d/>
+    <dgm:txPr/>
+    <dgm:style>
+      <a:lnRef idx="2">
+        <a:scrgbClr r="0" g="0" b="0"/>
+      </a:lnRef>
+      <a:fillRef idx="0">
+        <a:scrgbClr r="0" g="0" b="0"/>
+      </a:fillRef>
+      <a:effectRef idx="0">
+        <a:scrgbClr r="0" g="0" b="0"/>
+      </a:effectRef>
+      <a:fontRef idx="minor"/>
+    </dgm:style>
+  </dgm:styleLbl>
+  <dgm:styleLbl name="parChTrans1D4">
+    <dgm:scene3d>
+      <a:camera prst="orthographicFront"/>
+      <a:lightRig rig="threePt" dir="t"/>
+    </dgm:scene3d>
+    <dgm:sp3d/>
+    <dgm:txPr/>
+    <dgm:style>
+      <a:lnRef idx="2">
+        <a:scrgbClr r="0" g="0" b="0"/>
+      </a:lnRef>
+      <a:fillRef idx="0">
+        <a:scrgbClr r="0" g="0" b="0"/>
+      </a:fillRef>
+      <a:effectRef idx="0">
+        <a:scrgbClr r="0" g="0" b="0"/>
+      </a:effectRef>
+      <a:fontRef idx="minor"/>
+    </dgm:style>
+  </dgm:styleLbl>
+  <dgm:styleLbl name="fgAcc1">
+    <dgm:scene3d>
+      <a:camera prst="orthographicFront"/>
+      <a:lightRig rig="threePt" dir="t"/>
+    </dgm:scene3d>
+    <dgm:sp3d/>
+    <dgm:txPr/>
+    <dgm:style>
+      <a:lnRef idx="2">
+        <a:scrgbClr r="0" g="0" b="0"/>
+      </a:lnRef>
+      <a:fillRef idx="1">
+        <a:scrgbClr r="0" g="0" b="0"/>
+      </a:fillRef>
+      <a:effectRef idx="0">
+        <a:scrgbClr r="0" g="0" b="0"/>
+      </a:effectRef>
+      <a:fontRef idx="minor"/>
+    </dgm:style>
+  </dgm:styleLbl>
+  <dgm:styleLbl name="conFgAcc1">
+    <dgm:scene3d>
+      <a:camera prst="orthographicFront"/>
+      <a:lightRig rig="threePt" dir="t"/>
+    </dgm:scene3d>
+    <dgm:sp3d/>
+    <dgm:txPr/>
+    <dgm:style>
+      <a:lnRef idx="2">
+        <a:scrgbClr r="0" g="0" b="0"/>
+      </a:lnRef>
+      <a:fillRef idx="1">
+        <a:scrgbClr r="0" g="0" b="0"/>
+      </a:fillRef>
+      <a:effectRef idx="0">
+        <a:scrgbClr r="0" g="0" b="0"/>
+      </a:effectRef>
+      <a:fontRef idx="minor"/>
+    </dgm:style>
+  </dgm:styleLbl>
+  <dgm:styleLbl name="alignAcc1">
+    <dgm:scene3d>
+      <a:camera prst="orthographicFront"/>
+      <a:lightRig rig="threePt" dir="t"/>
+    </dgm:scene3d>
+    <dgm:sp3d/>
+    <dgm:txPr/>
+    <dgm:style>
+      <a:lnRef idx="2">
+        <a:scrgbClr r="0" g="0" b="0"/>
+      </a:lnRef>
+      <a:fillRef idx="1">
+        <a:scrgbClr r="0" g="0" b="0"/>
+      </a:fillRef>
+      <a:effectRef idx="0">
+        <a:scrgbClr r="0" g="0" b="0"/>
+      </a:effectRef>
+      <a:fontRef idx="minor"/>
+    </dgm:style>
+  </dgm:styleLbl>
+  <dgm:styleLbl name="trAlignAcc1">
+    <dgm:scene3d>
+      <a:camera prst="orthographicFront"/>
+      <a:lightRig rig="threePt" dir="t"/>
+    </dgm:scene3d>
+    <dgm:sp3d/>
+    <dgm:txPr/>
+    <dgm:style>
+      <a:lnRef idx="1">
+        <a:scrgbClr r="0" g="0" b="0"/>
+      </a:lnRef>
+      <a:fillRef idx="1">
+        <a:scrgbClr r="0" g="0" b="0"/>
+      </a:fillRef>
+      <a:effectRef idx="0">
+        <a:scrgbClr r="0" g="0" b="0"/>
+      </a:effectRef>
+      <a:fontRef idx="minor"/>
+    </dgm:style>
+  </dgm:styleLbl>
+  <dgm:styleLbl name="bgAcc1">
+    <dgm:scene3d>
+      <a:camera prst="orthographicFront"/>
+      <a:lightRig rig="threePt" dir="t"/>
+    </dgm:scene3d>
+    <dgm:sp3d/>
+    <dgm:txPr/>
+    <dgm:style>
+      <a:lnRef idx="2">
+        <a:scrgbClr r="0" g="0" b="0"/>
+      </a:lnRef>
+      <a:fillRef idx="1">
+        <a:scrgbClr r="0" g="0" b="0"/>
+      </a:fillRef>
+      <a:effectRef idx="0">
+        <a:scrgbClr r="0" g="0" b="0"/>
+      </a:effectRef>
+      <a:fontRef idx="minor"/>
+    </dgm:style>
+  </dgm:styleLbl>
+  <dgm:styleLbl name="solidFgAcc1">
+    <dgm:scene3d>
+      <a:camera prst="orthographicFront"/>
+      <a:lightRig rig="threePt" dir="t"/>
+    </dgm:scene3d>
+    <dgm:sp3d/>
+    <dgm:txPr/>
+    <dgm:style>
+      <a:lnRef idx="2">
+        <a:scrgbClr r="0" g="0" b="0"/>
+      </a:lnRef>
+      <a:fillRef idx="1">
+        <a:scrgbClr r="0" g="0" b="0"/>
+      </a:fillRef>
+      <a:effectRef idx="0">
+        <a:scrgbClr r="0" g="0" b="0"/>
+      </a:effectRef>
+      <a:fontRef idx="minor"/>
+    </dgm:style>
+  </dgm:styleLbl>
+  <dgm:styleLbl name="solidAlignAcc1">
+    <dgm:scene3d>
+      <a:camera prst="orthographicFront"/>
+      <a:lightRig rig="threePt" dir="t"/>
+    </dgm:scene3d>
+    <dgm:sp3d/>
+    <dgm:txPr/>
+    <dgm:style>
+      <a:lnRef idx="2">
+        <a:scrgbClr r="0" g="0" b="0"/>
+      </a:lnRef>
+      <a:fillRef idx="1">
+        <a:scrgbClr r="0" g="0" b="0"/>
+      </a:fillRef>
+      <a:effectRef idx="0">
+        <a:scrgbClr r="0" g="0" b="0"/>
+      </a:effectRef>
+      <a:fontRef idx="minor"/>
+    </dgm:style>
+  </dgm:styleLbl>
+  <dgm:styleLbl name="solidBgAcc1">
+    <dgm:scene3d>
+      <a:camera prst="orthographicFront"/>
+      <a:lightRig rig="threePt" dir="t"/>
+    </dgm:scene3d>
+    <dgm:sp3d/>
+    <dgm:txPr/>
+    <dgm:style>
+      <a:lnRef idx="2">
+        <a:scrgbClr r="0" g="0" b="0"/>
+      </a:lnRef>
+      <a:fillRef idx="1">
+        <a:scrgbClr r="0" g="0" b="0"/>
+      </a:fillRef>
+      <a:effectRef idx="0">
+        <a:scrgbClr r="0" g="0" b="0"/>
+      </a:effectRef>
+      <a:fontRef idx="minor"/>
+    </dgm:style>
+  </dgm:styleLbl>
+  <dgm:styleLbl name="fgAccFollowNode1">
+    <dgm:scene3d>
+      <a:camera prst="orthographicFront"/>
+      <a:lightRig rig="threePt" dir="t"/>
+    </dgm:scene3d>
+    <dgm:sp3d/>
+    <dgm:txPr/>
+    <dgm:style>
+      <a:lnRef idx="2">
+        <a:scrgbClr r="0" g="0" b="0"/>
+      </a:lnRef>
+      <a:fillRef idx="1">
+        <a:scrgbClr r="0" g="0" b="0"/>
+      </a:fillRef>
+      <a:effectRef idx="0">
+        <a:scrgbClr r="0" g="0" b="0"/>
+      </a:effectRef>
+      <a:fontRef idx="minor"/>
+    </dgm:style>
+  </dgm:styleLbl>
+  <dgm:styleLbl name="alignAccFollowNode1">
+    <dgm:scene3d>
+      <a:camera prst="orthographicFront"/>
+      <a:lightRig rig="threePt" dir="t"/>
+    </dgm:scene3d>
+    <dgm:sp3d/>
+    <dgm:txPr/>
+    <dgm:style>
+      <a:lnRef idx="2">
+        <a:scrgbClr r="0" g="0" b="0"/>
+      </a:lnRef>
+      <a:fillRef idx="1">
+        <a:scrgbClr r="0" g="0" b="0"/>
+      </a:fillRef>
+      <a:effectRef idx="0">
+        <a:scrgbClr r="0" g="0" b="0"/>
+      </a:effectRef>
+      <a:fontRef idx="minor"/>
+    </dgm:style>
+  </dgm:styleLbl>
+  <dgm:styleLbl name="bgAccFollowNode1">
+    <dgm:scene3d>
+      <a:camera prst="orthographicFront"/>
+      <a:lightRig rig="threePt" dir="t"/>
+    </dgm:scene3d>
+    <dgm:sp3d/>
+    <dgm:txPr/>
+    <dgm:style>
+      <a:lnRef idx="2">
+        <a:scrgbClr r="0" g="0" b="0"/>
+      </a:lnRef>
+      <a:fillRef idx="1">
+        <a:scrgbClr r="0" g="0" b="0"/>
+      </a:fillRef>
+      <a:effectRef idx="0">
+        <a:scrgbClr r="0" g="0" b="0"/>
+      </a:effectRef>
+      <a:fontRef idx="minor"/>
+    </dgm:style>
+  </dgm:styleLbl>
+  <dgm:styleLbl name="fgAcc0">
+    <dgm:scene3d>
+      <a:camera prst="orthographicFront"/>
+      <a:lightRig rig="threePt" dir="t"/>
+    </dgm:scene3d>
+    <dgm:sp3d/>
+    <dgm:txPr/>
+    <dgm:style>
+      <a:lnRef idx="2">
+        <a:scrgbClr r="0" g="0" b="0"/>
+      </a:lnRef>
+      <a:fillRef idx="1">
+        <a:scrgbClr r="0" g="0" b="0"/>
+      </a:fillRef>
+      <a:effectRef idx="0">
+        <a:scrgbClr r="0" g="0" b="0"/>
+      </a:effectRef>
+      <a:fontRef idx="minor"/>
+    </dgm:style>
+  </dgm:styleLbl>
+  <dgm:styleLbl name="fgAcc2">
+    <dgm:scene3d>
+      <a:camera prst="orthographicFront"/>
+      <a:lightRig rig="threePt" dir="t"/>
+    </dgm:scene3d>
+    <dgm:sp3d/>
+    <dgm:txPr/>
+    <dgm:style>
+      <a:lnRef idx="2">
+        <a:scrgbClr r="0" g="0" b="0"/>
+      </a:lnRef>
+      <a:fillRef idx="1">
+        <a:scrgbClr r="0" g="0" b="0"/>
+      </a:fillRef>
+      <a:effectRef idx="0">
+        <a:scrgbClr r="0" g="0" b="0"/>
+      </a:effectRef>
+      <a:fontRef idx="minor"/>
+    </dgm:style>
+  </dgm:styleLbl>
+  <dgm:styleLbl name="fgAcc3">
+    <dgm:scene3d>
+      <a:camera prst="orthographicFront"/>
+      <a:lightRig rig="threePt" dir="t"/>
+    </dgm:scene3d>
+    <dgm:sp3d/>
+    <dgm:txPr/>
+    <dgm:style>
+      <a:lnRef idx="2">
+        <a:scrgbClr r="0" g="0" b="0"/>
+      </a:lnRef>
+      <a:fillRef idx="1">
+        <a:scrgbClr r="0" g="0" b="0"/>
+      </a:fillRef>
+      <a:effectRef idx="0">
+        <a:scrgbClr r="0" g="0" b="0"/>
+      </a:effectRef>
+      <a:fontRef idx="minor"/>
+    </dgm:style>
+  </dgm:styleLbl>
+  <dgm:styleLbl name="fgAcc4">
+    <dgm:scene3d>
+      <a:camera prst="orthographicFront"/>
+      <a:lightRig rig="threePt" dir="t"/>
+    </dgm:scene3d>
+    <dgm:sp3d/>
+    <dgm:txPr/>
+    <dgm:style>
+      <a:lnRef idx="2">
+        <a:scrgbClr r="0" g="0" b="0"/>
+      </a:lnRef>
+      <a:fillRef idx="1">
+        <a:scrgbClr r="0" g="0" b="0"/>
+      </a:fillRef>
+      <a:effectRef idx="0">
+        <a:scrgbClr r="0" g="0" b="0"/>
+      </a:effectRef>
+      <a:fontRef idx="minor"/>
+    </dgm:style>
+  </dgm:styleLbl>
+  <dgm:styleLbl name="bgShp">
+    <dgm:scene3d>
+      <a:camera prst="orthographicFront"/>
+      <a:lightRig rig="threePt" dir="t"/>
+    </dgm:scene3d>
+    <dgm:sp3d/>
+    <dgm:txPr/>
+    <dgm:style>
+      <a:lnRef idx="0">
+        <a:scrgbClr r="0" g="0" b="0"/>
+      </a:lnRef>
+      <a:fillRef idx="1">
+        <a:scrgbClr r="0" g="0" b="0"/>
+      </a:fillRef>
+      <a:effectRef idx="0">
+        <a:scrgbClr r="0" g="0" b="0"/>
+      </a:effectRef>
+      <a:fontRef idx="minor"/>
+    </dgm:style>
+  </dgm:styleLbl>
+  <dgm:styleLbl name="dkBgShp">
+    <dgm:scene3d>
+      <a:camera prst="orthographicFront"/>
+      <a:lightRig rig="threePt" dir="t"/>
+    </dgm:scene3d>
+    <dgm:sp3d/>
+    <dgm:txPr/>
+    <dgm:style>
+      <a:lnRef idx="0">
+        <a:scrgbClr r="0" g="0" b="0"/>
+      </a:lnRef>
+      <a:fillRef idx="1">
+        <a:scrgbClr r="0" g="0" b="0"/>
+      </a:fillRef>
+      <a:effectRef idx="0">
+        <a:scrgbClr r="0" g="0" b="0"/>
+      </a:effectRef>
+      <a:fontRef idx="minor"/>
+    </dgm:style>
+  </dgm:styleLbl>
+  <dgm:styleLbl name="trBgShp">
+    <dgm:scene3d>
+      <a:camera prst="orthographicFront"/>
+      <a:lightRig rig="threePt" dir="t"/>
+    </dgm:scene3d>
+    <dgm:sp3d/>
+    <dgm:txPr/>
+    <dgm:style>
+      <a:lnRef idx="0">
+        <a:scrgbClr r="0" g="0" b="0"/>
+      </a:lnRef>
+      <a:fillRef idx="1">
+        <a:scrgbClr r="0" g="0" b="0"/>
+      </a:fillRef>
+      <a:effectRef idx="0">
+        <a:scrgbClr r="0" g="0" b="0"/>
+      </a:effectRef>
+      <a:fontRef idx="minor"/>
+    </dgm:style>
+  </dgm:styleLbl>
+  <dgm:styleLbl name="fgShp">
+    <dgm:scene3d>
+      <a:camera prst="orthographicFront"/>
+      <a:lightRig rig="threePt" dir="t"/>
+    </dgm:scene3d>
+    <dgm:sp3d/>
+    <dgm:txPr/>
+    <dgm:style>
+      <a:lnRef idx="2">
+        <a:scrgbClr r="0" g="0" b="0"/>
+      </a:lnRef>
+      <a:fillRef idx="1">
+        <a:scrgbClr r="0" g="0" b="0"/>
+      </a:fillRef>
+      <a:effectRef idx="0">
+        <a:scrgbClr r="0" g="0" b="0"/>
+      </a:effectRef>
+      <a:fontRef idx="minor"/>
+    </dgm:style>
+  </dgm:styleLbl>
+  <dgm:styleLbl name="revTx">
+    <dgm:scene3d>
+      <a:camera prst="orthographicFront"/>
+      <a:lightRig rig="threePt" dir="t"/>
+    </dgm:scene3d>
+    <dgm:sp3d/>
+    <dgm:txPr/>
+    <dgm:style>
+      <a:lnRef idx="0">
+        <a:scrgbClr r="0" g="0" b="0"/>
+      </a:lnRef>
+      <a:fillRef idx="0">
+        <a:scrgbClr r="0" g="0" b="0"/>
+      </a:fillRef>
+      <a:effectRef idx="0">
+        <a:scrgbClr r="0" g="0" b="0"/>
+      </a:effectRef>
+      <a:fontRef idx="minor"/>
+    </dgm:style>
+  </dgm:styleLbl>
+</dgm:styleDef>
+</file>
+
+<file path=ppt/diagrams/quickStyle2.xml><?xml version="1.0" encoding="utf-8"?>
+<dgm:styleDef xmlns:dgm="http://schemas.openxmlformats.org/drawingml/2006/diagram" xmlns:a="http://schemas.openxmlformats.org/drawingml/2006/main" uniqueId="urn:microsoft.com/office/officeart/2005/8/quickstyle/simple1">
+  <dgm:title val=""/>
+  <dgm:desc val=""/>
+  <dgm:catLst>
+    <dgm:cat type="simple" pri="10100"/>
+  </dgm:catLst>
+  <dgm:scene3d>
+    <a:camera prst="orthographicFront"/>
+    <a:lightRig rig="threePt" dir="t"/>
+  </dgm:scene3d>
+  <dgm:styleLbl name="node0">
+    <dgm:scene3d>
+      <a:camera prst="orthographicFront"/>
+      <a:lightRig rig="threePt" dir="t"/>
+    </dgm:scene3d>
+    <dgm:sp3d/>
+    <dgm:txPr/>
+    <dgm:style>
+      <a:lnRef idx="2">
+        <a:scrgbClr r="0" g="0" b="0"/>
+      </a:lnRef>
+      <a:fillRef idx="1">
+        <a:scrgbClr r="0" g="0" b="0"/>
+      </a:fillRef>
+      <a:effectRef idx="0">
+        <a:scrgbClr r="0" g="0" b="0"/>
+      </a:effectRef>
+      <a:fontRef idx="minor">
+        <a:schemeClr val="lt1"/>
+      </a:fontRef>
+    </dgm:style>
+  </dgm:styleLbl>
+  <dgm:styleLbl name="lnNode1">
+    <dgm:scene3d>
+      <a:camera prst="orthographicFront"/>
+      <a:lightRig rig="threePt" dir="t"/>
+    </dgm:scene3d>
+    <dgm:sp3d/>
+    <dgm:txPr/>
+    <dgm:style>
+      <a:lnRef idx="2">
+        <a:scrgbClr r="0" g="0" b="0"/>
+      </a:lnRef>
+      <a:fillRef idx="1">
+        <a:scrgbClr r="0" g="0" b="0"/>
+      </a:fillRef>
+      <a:effectRef idx="0">
+        <a:scrgbClr r="0" g="0" b="0"/>
+      </a:effectRef>
+      <a:fontRef idx="minor">
+        <a:schemeClr val="lt1"/>
+      </a:fontRef>
+    </dgm:style>
+  </dgm:styleLbl>
+  <dgm:styleLbl name="vennNode1">
+    <dgm:scene3d>
+      <a:camera prst="orthographicFront"/>
+      <a:lightRig rig="threePt" dir="t"/>
+    </dgm:scene3d>
+    <dgm:sp3d/>
+    <dgm:txPr/>
+    <dgm:style>
+      <a:lnRef idx="2">
+        <a:scrgbClr r="0" g="0" b="0"/>
+      </a:lnRef>
+      <a:fillRef idx="1">
+        <a:scrgbClr r="0" g="0" b="0"/>
+      </a:fillRef>
+      <a:effectRef idx="0">
+        <a:scrgbClr r="0" g="0" b="0"/>
+      </a:effectRef>
+      <a:fontRef idx="minor">
+        <a:schemeClr val="tx1"/>
+      </a:fontRef>
+    </dgm:style>
+  </dgm:styleLbl>
+  <dgm:styleLbl name="alignNode1">
+    <dgm:scene3d>
+      <a:camera prst="orthographicFront"/>
+      <a:lightRig rig="threePt" dir="t"/>
+    </dgm:scene3d>
+    <dgm:sp3d/>
+    <dgm:txPr/>
+    <dgm:style>
+      <a:lnRef idx="2">
+        <a:scrgbClr r="0" g="0" b="0"/>
+      </a:lnRef>
+      <a:fillRef idx="1">
+        <a:scrgbClr r="0" g="0" b="0"/>
+      </a:fillRef>
+      <a:effectRef idx="0">
+        <a:scrgbClr r="0" g="0" b="0"/>
+      </a:effectRef>
+      <a:fontRef idx="minor">
+        <a:schemeClr val="lt1"/>
+      </a:fontRef>
+    </dgm:style>
+  </dgm:styleLbl>
+  <dgm:styleLbl name="node1">
+    <dgm:scene3d>
+      <a:camera prst="orthographicFront"/>
+      <a:lightRig rig="threePt" dir="t"/>
+    </dgm:scene3d>
+    <dgm:sp3d/>
+    <dgm:txPr/>
+    <dgm:style>
+      <a:lnRef idx="2">
+        <a:scrgbClr r="0" g="0" b="0"/>
+      </a:lnRef>
+      <a:fillRef idx="1">
+        <a:scrgbClr r="0" g="0" b="0"/>
+      </a:fillRef>
+      <a:effectRef idx="0">
+        <a:scrgbClr r="0" g="0" b="0"/>
+      </a:effectRef>
+      <a:fontRef idx="minor">
+        <a:schemeClr val="lt1"/>
+      </a:fontRef>
+    </dgm:style>
+  </dgm:styleLbl>
+  <dgm:styleLbl name="node2">
+    <dgm:scene3d>
+      <a:camera prst="orthographicFront"/>
+      <a:lightRig rig="threePt" dir="t"/>
+    </dgm:scene3d>
+    <dgm:sp3d/>
+    <dgm:txPr/>
+    <dgm:style>
+      <a:lnRef idx="2">
+        <a:scrgbClr r="0" g="0" b="0"/>
+      </a:lnRef>
+      <a:fillRef idx="1">
+        <a:scrgbClr r="0" g="0" b="0"/>
+      </a:fillRef>
+      <a:effectRef idx="0">
+        <a:scrgbClr r="0" g="0" b="0"/>
+      </a:effectRef>
+      <a:fontRef idx="minor">
+        <a:schemeClr val="lt1"/>
+      </a:fontRef>
+    </dgm:style>
+  </dgm:styleLbl>
+  <dgm:styleLbl name="node3">
+    <dgm:scene3d>
+      <a:camera prst="orthographicFront"/>
+      <a:lightRig rig="threePt" dir="t"/>
+    </dgm:scene3d>
+    <dgm:sp3d/>
+    <dgm:txPr/>
+    <dgm:style>
+      <a:lnRef idx="2">
+        <a:scrgbClr r="0" g="0" b="0"/>
+      </a:lnRef>
+      <a:fillRef idx="1">
+        <a:scrgbClr r="0" g="0" b="0"/>
+      </a:fillRef>
+      <a:effectRef idx="0">
+        <a:scrgbClr r="0" g="0" b="0"/>
+      </a:effectRef>
+      <a:fontRef idx="minor">
+        <a:schemeClr val="lt1"/>
+      </a:fontRef>
+    </dgm:style>
+  </dgm:styleLbl>
+  <dgm:styleLbl name="node4">
+    <dgm:scene3d>
+      <a:camera prst="orthographicFront"/>
+      <a:lightRig rig="threePt" dir="t"/>
+    </dgm:scene3d>
+    <dgm:sp3d/>
+    <dgm:txPr/>
+    <dgm:style>
+      <a:lnRef idx="2">
+        <a:scrgbClr r="0" g="0" b="0"/>
+      </a:lnRef>
+      <a:fillRef idx="1">
+        <a:scrgbClr r="0" g="0" b="0"/>
+      </a:fillRef>
+      <a:effectRef idx="0">
+        <a:scrgbClr r="0" g="0" b="0"/>
+      </a:effectRef>
+      <a:fontRef idx="minor">
+        <a:schemeClr val="lt1"/>
+      </a:fontRef>
+    </dgm:style>
+  </dgm:styleLbl>
+  <dgm:styleLbl name="fgImgPlace1">
+    <dgm:scene3d>
+      <a:camera prst="orthographicFront"/>
+      <a:lightRig rig="threePt" dir="t"/>
+    </dgm:scene3d>
+    <dgm:sp3d/>
+    <dgm:txPr/>
+    <dgm:style>
+      <a:lnRef idx="2">
+        <a:scrgbClr r="0" g="0" b="0"/>
+      </a:lnRef>
+      <a:fillRef idx="1">
+        <a:scrgbClr r="0" g="0" b="0"/>
+      </a:fillRef>
+      <a:effectRef idx="0">
+        <a:scrgbClr r="0" g="0" b="0"/>
+      </a:effectRef>
+      <a:fontRef idx="minor"/>
+    </dgm:style>
+  </dgm:styleLbl>
+  <dgm:styleLbl name="alignImgPlace1">
+    <dgm:scene3d>
+      <a:camera prst="orthographicFront"/>
+      <a:lightRig rig="threePt" dir="t"/>
+    </dgm:scene3d>
+    <dgm:sp3d/>
+    <dgm:txPr/>
+    <dgm:style>
+      <a:lnRef idx="2">
+        <a:scrgbClr r="0" g="0" b="0"/>
+      </a:lnRef>
+      <a:fillRef idx="1">
+        <a:scrgbClr r="0" g="0" b="0"/>
+      </a:fillRef>
+      <a:effectRef idx="0">
+        <a:scrgbClr r="0" g="0" b="0"/>
+      </a:effectRef>
+      <a:fontRef idx="minor"/>
+    </dgm:style>
+  </dgm:styleLbl>
+  <dgm:styleLbl name="bgImgPlace1">
+    <dgm:scene3d>
+      <a:camera prst="orthographicFront"/>
+      <a:lightRig rig="threePt" dir="t"/>
+    </dgm:scene3d>
+    <dgm:sp3d/>
+    <dgm:txPr/>
+    <dgm:style>
+      <a:lnRef idx="2">
+        <a:scrgbClr r="0" g="0" b="0"/>
+      </a:lnRef>
+      <a:fillRef idx="1">
+        <a:scrgbClr r="0" g="0" b="0"/>
+      </a:fillRef>
+      <a:effectRef idx="0">
+        <a:scrgbClr r="0" g="0" b="0"/>
+      </a:effectRef>
+      <a:fontRef idx="minor"/>
+    </dgm:style>
+  </dgm:styleLbl>
+  <dgm:styleLbl name="sibTrans2D1">
+    <dgm:scene3d>
+      <a:camera prst="orthographicFront"/>
+      <a:lightRig rig="threePt" dir="t"/>
+    </dgm:scene3d>
+    <dgm:sp3d/>
+    <dgm:txPr/>
+    <dgm:style>
+      <a:lnRef idx="0">
+        <a:scrgbClr r="0" g="0" b="0"/>
+      </a:lnRef>
+      <a:fillRef idx="1">
+        <a:scrgbClr r="0" g="0" b="0"/>
+      </a:fillRef>
+      <a:effectRef idx="0">
+        <a:scrgbClr r="0" g="0" b="0"/>
+      </a:effectRef>
+      <a:fontRef idx="minor">
+        <a:schemeClr val="lt1"/>
+      </a:fontRef>
+    </dgm:style>
+  </dgm:styleLbl>
+  <dgm:styleLbl name="fgSibTrans2D1">
+    <dgm:scene3d>
+      <a:camera prst="orthographicFront"/>
+      <a:lightRig rig="threePt" dir="t"/>
+    </dgm:scene3d>
+    <dgm:sp3d/>
+    <dgm:txPr/>
+    <dgm:style>
+      <a:lnRef idx="0">
+        <a:scrgbClr r="0" g="0" b="0"/>
+      </a:lnRef>
+      <a:fillRef idx="1">
+        <a:scrgbClr r="0" g="0" b="0"/>
+      </a:fillRef>
+      <a:effectRef idx="0">
+        <a:scrgbClr r="0" g="0" b="0"/>
+      </a:effectRef>
+      <a:fontRef idx="minor">
+        <a:schemeClr val="lt1"/>
+      </a:fontRef>
+    </dgm:style>
+  </dgm:styleLbl>
+  <dgm:styleLbl name="bgSibTrans2D1">
+    <dgm:scene3d>
+      <a:camera prst="orthographicFront"/>
+      <a:lightRig rig="threePt" dir="t"/>
+    </dgm:scene3d>
+    <dgm:sp3d/>
+    <dgm:txPr/>
+    <dgm:style>
+      <a:lnRef idx="0">
+        <a:scrgbClr r="0" g="0" b="0"/>
+      </a:lnRef>
+      <a:fillRef idx="1">
+        <a:scrgbClr r="0" g="0" b="0"/>
+      </a:fillRef>
+      <a:effectRef idx="0">
+        <a:scrgbClr r="0" g="0" b="0"/>
+      </a:effectRef>
+      <a:fontRef idx="minor">
+        <a:schemeClr val="lt1"/>
+      </a:fontRef>
+    </dgm:style>
+  </dgm:styleLbl>
+  <dgm:styleLbl name="sibTrans1D1">
+    <dgm:scene3d>
+      <a:camera prst="orthographicFront"/>
+      <a:lightRig rig="threePt" dir="t"/>
+    </dgm:scene3d>
+    <dgm:sp3d/>
+    <dgm:txPr/>
+    <dgm:style>
+      <a:lnRef idx="1">
+        <a:scrgbClr r="0" g="0" b="0"/>
+      </a:lnRef>
+      <a:fillRef idx="0">
+        <a:scrgbClr r="0" g="0" b="0"/>
+      </a:fillRef>
+      <a:effectRef idx="0">
+        <a:scrgbClr r="0" g="0" b="0"/>
+      </a:effectRef>
+      <a:fontRef idx="minor"/>
+    </dgm:style>
+  </dgm:styleLbl>
+  <dgm:styleLbl name="callout">
+    <dgm:scene3d>
+      <a:camera prst="orthographicFront"/>
+      <a:lightRig rig="threePt" dir="t"/>
+    </dgm:scene3d>
+    <dgm:sp3d/>
+    <dgm:txPr/>
+    <dgm:style>
+      <a:lnRef idx="2">
+        <a:scrgbClr r="0" g="0" b="0"/>
+      </a:lnRef>
+      <a:fillRef idx="1">
+        <a:scrgbClr r="0" g="0" b="0"/>
+      </a:fillRef>
+      <a:effectRef idx="0">
+        <a:scrgbClr r="0" g="0" b="0"/>
+      </a:effectRef>
+      <a:fontRef idx="minor"/>
+    </dgm:style>
+  </dgm:styleLbl>
+  <dgm:styleLbl name="asst0">
+    <dgm:scene3d>
+      <a:camera prst="orthographicFront"/>
+      <a:lightRig rig="threePt" dir="t"/>
+    </dgm:scene3d>
+    <dgm:sp3d/>
+    <dgm:txPr/>
+    <dgm:style>
+      <a:lnRef idx="2">
+        <a:scrgbClr r="0" g="0" b="0"/>
+      </a:lnRef>
+      <a:fillRef idx="1">
+        <a:scrgbClr r="0" g="0" b="0"/>
+      </a:fillRef>
+      <a:effectRef idx="0">
+        <a:scrgbClr r="0" g="0" b="0"/>
+      </a:effectRef>
+      <a:fontRef idx="minor">
+        <a:schemeClr val="lt1"/>
+      </a:fontRef>
+    </dgm:style>
+  </dgm:styleLbl>
+  <dgm:styleLbl name="asst1">
+    <dgm:scene3d>
+      <a:camera prst="orthographicFront"/>
+      <a:lightRig rig="threePt" dir="t"/>
+    </dgm:scene3d>
+    <dgm:sp3d/>
+    <dgm:txPr/>
+    <dgm:style>
+      <a:lnRef idx="2">
+        <a:scrgbClr r="0" g="0" b="0"/>
+      </a:lnRef>
+      <a:fillRef idx="1">
+        <a:scrgbClr r="0" g="0" b="0"/>
+      </a:fillRef>
+      <a:effectRef idx="0">
+        <a:scrgbClr r="0" g="0" b="0"/>
+      </a:effectRef>
+      <a:fontRef idx="minor">
+        <a:schemeClr val="lt1"/>
+      </a:fontRef>
+    </dgm:style>
+  </dgm:styleLbl>
+  <dgm:styleLbl name="asst2">
+    <dgm:scene3d>
+      <a:camera prst="orthographicFront"/>
+      <a:lightRig rig="threePt" dir="t"/>
+    </dgm:scene3d>
+    <dgm:sp3d/>
+    <dgm:txPr/>
+    <dgm:style>
+      <a:lnRef idx="2">
+        <a:scrgbClr r="0" g="0" b="0"/>
+      </a:lnRef>
+      <a:fillRef idx="1">
+        <a:scrgbClr r="0" g="0" b="0"/>
+      </a:fillRef>
+      <a:effectRef idx="0">
+        <a:scrgbClr r="0" g="0" b="0"/>
+      </a:effectRef>
+      <a:fontRef idx="minor">
+        <a:schemeClr val="lt1"/>
+      </a:fontRef>
+    </dgm:style>
+  </dgm:styleLbl>
+  <dgm:styleLbl name="asst3">
+    <dgm:scene3d>
+      <a:camera prst="orthographicFront"/>
+      <a:lightRig rig="threePt" dir="t"/>
+    </dgm:scene3d>
+    <dgm:sp3d/>
+    <dgm:txPr/>
+    <dgm:style>
+      <a:lnRef idx="2">
+        <a:scrgbClr r="0" g="0" b="0"/>
+      </a:lnRef>
+      <a:fillRef idx="1">
+        <a:scrgbClr r="0" g="0" b="0"/>
+      </a:fillRef>
+      <a:effectRef idx="0">
+        <a:scrgbClr r="0" g="0" b="0"/>
+      </a:effectRef>
+      <a:fontRef idx="minor">
+        <a:schemeClr val="lt1"/>
+      </a:fontRef>
+    </dgm:style>
+  </dgm:styleLbl>
+  <dgm:styleLbl name="asst4">
+    <dgm:scene3d>
+      <a:camera prst="orthographicFront"/>
+      <a:lightRig rig="threePt" dir="t"/>
+    </dgm:scene3d>
+    <dgm:sp3d/>
+    <dgm:txPr/>
+    <dgm:style>
+      <a:lnRef idx="2">
+        <a:scrgbClr r="0" g="0" b="0"/>
+      </a:lnRef>
+      <a:fillRef idx="1">
+        <a:scrgbClr r="0" g="0" b="0"/>
+      </a:fillRef>
+      <a:effectRef idx="0">
+        <a:scrgbClr r="0" g="0" b="0"/>
+      </a:effectRef>
+      <a:fontRef idx="minor">
+        <a:schemeClr val="lt1"/>
+      </a:fontRef>
+    </dgm:style>
+  </dgm:styleLbl>
+  <dgm:styleLbl name="parChTrans2D1">
+    <dgm:scene3d>
+      <a:camera prst="orthographicFront"/>
+      <a:lightRig rig="threePt" dir="t"/>
+    </dgm:scene3d>
+    <dgm:sp3d/>
+    <dgm:txPr/>
+    <dgm:style>
+      <a:lnRef idx="2">
+        <a:scrgbClr r="0" g="0" b="0"/>
+      </a:lnRef>
+      <a:fillRef idx="1">
+        <a:scrgbClr r="0" g="0" b="0"/>
+      </a:fillRef>
+      <a:effectRef idx="0">
+        <a:scrgbClr r="0" g="0" b="0"/>
+      </a:effectRef>
+      <a:fontRef idx="minor">
+        <a:schemeClr val="lt1"/>
+      </a:fontRef>
+    </dgm:style>
+  </dgm:styleLbl>
+  <dgm:styleLbl name="parChTrans2D2">
+    <dgm:scene3d>
+      <a:camera prst="orthographicFront"/>
+      <a:lightRig rig="threePt" dir="t"/>
+    </dgm:scene3d>
+    <dgm:sp3d/>
+    <dgm:txPr/>
+    <dgm:style>
+      <a:lnRef idx="2">
+        <a:scrgbClr r="0" g="0" b="0"/>
+      </a:lnRef>
+      <a:fillRef idx="1">
+        <a:scrgbClr r="0" g="0" b="0"/>
+      </a:fillRef>
+      <a:effectRef idx="0">
+        <a:scrgbClr r="0" g="0" b="0"/>
+      </a:effectRef>
+      <a:fontRef idx="minor">
+        <a:schemeClr val="lt1"/>
+      </a:fontRef>
+    </dgm:style>
+  </dgm:styleLbl>
+  <dgm:styleLbl name="parChTrans2D3">
+    <dgm:scene3d>
+      <a:camera prst="orthographicFront"/>
+      <a:lightRig rig="threePt" dir="t"/>
+    </dgm:scene3d>
+    <dgm:sp3d/>
+    <dgm:txPr/>
+    <dgm:style>
+      <a:lnRef idx="2">
+        <a:scrgbClr r="0" g="0" b="0"/>
+      </a:lnRef>
+      <a:fillRef idx="1">
+        <a:scrgbClr r="0" g="0" b="0"/>
+      </a:fillRef>
+      <a:effectRef idx="0">
+        <a:scrgbClr r="0" g="0" b="0"/>
+      </a:effectRef>
+      <a:fontRef idx="minor">
+        <a:schemeClr val="lt1"/>
+      </a:fontRef>
+    </dgm:style>
+  </dgm:styleLbl>
+  <dgm:styleLbl name="parChTrans2D4">
+    <dgm:scene3d>
+      <a:camera prst="orthographicFront"/>
+      <a:lightRig rig="threePt" dir="t"/>
+    </dgm:scene3d>
+    <dgm:sp3d/>
+    <dgm:txPr/>
+    <dgm:style>
+      <a:lnRef idx="2">
+        <a:scrgbClr r="0" g="0" b="0"/>
+      </a:lnRef>
+      <a:fillRef idx="1">
+        <a:scrgbClr r="0" g="0" b="0"/>
+      </a:fillRef>
+      <a:effectRef idx="0">
+        <a:scrgbClr r="0" g="0" b="0"/>
+      </a:effectRef>
+      <a:fontRef idx="minor">
+        <a:schemeClr val="lt1"/>
+      </a:fontRef>
+    </dgm:style>
+  </dgm:styleLbl>
+  <dgm:styleLbl name="parChTrans1D1">
+    <dgm:scene3d>
+      <a:camera prst="orthographicFront"/>
+      <a:lightRig rig="threePt" dir="t"/>
+    </dgm:scene3d>
+    <dgm:sp3d/>
+    <dgm:txPr/>
+    <dgm:style>
+      <a:lnRef idx="2">
+        <a:scrgbClr r="0" g="0" b="0"/>
+      </a:lnRef>
+      <a:fillRef idx="0">
+        <a:scrgbClr r="0" g="0" b="0"/>
+      </a:fillRef>
+      <a:effectRef idx="0">
+        <a:scrgbClr r="0" g="0" b="0"/>
+      </a:effectRef>
+      <a:fontRef idx="minor"/>
+    </dgm:style>
+  </dgm:styleLbl>
+  <dgm:styleLbl name="parChTrans1D2">
+    <dgm:scene3d>
+      <a:camera prst="orthographicFront"/>
+      <a:lightRig rig="threePt" dir="t"/>
+    </dgm:scene3d>
+    <dgm:sp3d/>
+    <dgm:txPr/>
+    <dgm:style>
+      <a:lnRef idx="2">
+        <a:scrgbClr r="0" g="0" b="0"/>
+      </a:lnRef>
+      <a:fillRef idx="0">
+        <a:scrgbClr r="0" g="0" b="0"/>
+      </a:fillRef>
+      <a:effectRef idx="0">
+        <a:scrgbClr r="0" g="0" b="0"/>
+      </a:effectRef>
+      <a:fontRef idx="minor"/>
+    </dgm:style>
+  </dgm:styleLbl>
+  <dgm:styleLbl name="parChTrans1D3">
+    <dgm:scene3d>
+      <a:camera prst="orthographicFront"/>
+      <a:lightRig rig="threePt" dir="t"/>
+    </dgm:scene3d>
+    <dgm:sp3d/>
+    <dgm:txPr/>
+    <dgm:style>
+      <a:lnRef idx="2">
+        <a:scrgbClr r="0" g="0" b="0"/>
+      </a:lnRef>
+      <a:fillRef idx="0">
+        <a:scrgbClr r="0" g="0" b="0"/>
+      </a:fillRef>
+      <a:effectRef idx="0">
+        <a:scrgbClr r="0" g="0" b="0"/>
+      </a:effectRef>
+      <a:fontRef idx="minor"/>
+    </dgm:style>
+  </dgm:styleLbl>
+  <dgm:styleLbl name="parChTrans1D4">
+    <dgm:scene3d>
+      <a:camera prst="orthographicFront"/>
+      <a:lightRig rig="threePt" dir="t"/>
+    </dgm:scene3d>
+    <dgm:sp3d/>
+    <dgm:txPr/>
+    <dgm:style>
+      <a:lnRef idx="2">
+        <a:scrgbClr r="0" g="0" b="0"/>
+      </a:lnRef>
+      <a:fillRef idx="0">
+        <a:scrgbClr r="0" g="0" b="0"/>
+      </a:fillRef>
+      <a:effectRef idx="0">
+        <a:scrgbClr r="0" g="0" b="0"/>
+      </a:effectRef>
+      <a:fontRef idx="minor"/>
+    </dgm:style>
+  </dgm:styleLbl>
+  <dgm:styleLbl name="fgAcc1">
+    <dgm:scene3d>
+      <a:camera prst="orthographicFront"/>
+      <a:lightRig rig="threePt" dir="t"/>
+    </dgm:scene3d>
+    <dgm:sp3d/>
+    <dgm:txPr/>
+    <dgm:style>
+      <a:lnRef idx="2">
+        <a:scrgbClr r="0" g="0" b="0"/>
+      </a:lnRef>
+      <a:fillRef idx="1">
+        <a:scrgbClr r="0" g="0" b="0"/>
+      </a:fillRef>
+      <a:effectRef idx="0">
+        <a:scrgbClr r="0" g="0" b="0"/>
+      </a:effectRef>
+      <a:fontRef idx="minor"/>
+    </dgm:style>
+  </dgm:styleLbl>
+  <dgm:styleLbl name="conFgAcc1">
+    <dgm:scene3d>
+      <a:camera prst="orthographicFront"/>
+      <a:lightRig rig="threePt" dir="t"/>
+    </dgm:scene3d>
+    <dgm:sp3d/>
+    <dgm:txPr/>
+    <dgm:style>
+      <a:lnRef idx="2">
+        <a:scrgbClr r="0" g="0" b="0"/>
+      </a:lnRef>
+      <a:fillRef idx="1">
+        <a:scrgbClr r="0" g="0" b="0"/>
+      </a:fillRef>
+      <a:effectRef idx="0">
+        <a:scrgbClr r="0" g="0" b="0"/>
+      </a:effectRef>
+      <a:fontRef idx="minor"/>
+    </dgm:style>
+  </dgm:styleLbl>
+  <dgm:styleLbl name="alignAcc1">
+    <dgm:scene3d>
+      <a:camera prst="orthographicFront"/>
+      <a:lightRig rig="threePt" dir="t"/>
+    </dgm:scene3d>
+    <dgm:sp3d/>
+    <dgm:txPr/>
+    <dgm:style>
+      <a:lnRef idx="2">
+        <a:scrgbClr r="0" g="0" b="0"/>
+      </a:lnRef>
+      <a:fillRef idx="1">
+        <a:scrgbClr r="0" g="0" b="0"/>
+      </a:fillRef>
+      <a:effectRef idx="0">
+        <a:scrgbClr r="0" g="0" b="0"/>
+      </a:effectRef>
+      <a:fontRef idx="minor"/>
+    </dgm:style>
+  </dgm:styleLbl>
+  <dgm:styleLbl name="trAlignAcc1">
+    <dgm:scene3d>
+      <a:camera prst="orthographicFront"/>
+      <a:lightRig rig="threePt" dir="t"/>
+    </dgm:scene3d>
+    <dgm:sp3d/>
+    <dgm:txPr/>
+    <dgm:style>
+      <a:lnRef idx="1">
+        <a:scrgbClr r="0" g="0" b="0"/>
+      </a:lnRef>
+      <a:fillRef idx="1">
+        <a:scrgbClr r="0" g="0" b="0"/>
+      </a:fillRef>
+      <a:effectRef idx="0">
+        <a:scrgbClr r="0" g="0" b="0"/>
+      </a:effectRef>
+      <a:fontRef idx="minor"/>
+    </dgm:style>
+  </dgm:styleLbl>
+  <dgm:styleLbl name="bgAcc1">
+    <dgm:scene3d>
+      <a:camera prst="orthographicFront"/>
+      <a:lightRig rig="threePt" dir="t"/>
+    </dgm:scene3d>
+    <dgm:sp3d/>
+    <dgm:txPr/>
+    <dgm:style>
+      <a:lnRef idx="2">
+        <a:scrgbClr r="0" g="0" b="0"/>
+      </a:lnRef>
+      <a:fillRef idx="1">
+        <a:scrgbClr r="0" g="0" b="0"/>
+      </a:fillRef>
+      <a:effectRef idx="0">
+        <a:scrgbClr r="0" g="0" b="0"/>
+      </a:effectRef>
+      <a:fontRef idx="minor"/>
+    </dgm:style>
+  </dgm:styleLbl>
+  <dgm:styleLbl name="solidFgAcc1">
+    <dgm:scene3d>
+      <a:camera prst="orthographicFront"/>
+      <a:lightRig rig="threePt" dir="t"/>
+    </dgm:scene3d>
+    <dgm:sp3d/>
+    <dgm:txPr/>
+    <dgm:style>
+      <a:lnRef idx="2">
+        <a:scrgbClr r="0" g="0" b="0"/>
+      </a:lnRef>
+      <a:fillRef idx="1">
+        <a:scrgbClr r="0" g="0" b="0"/>
+      </a:fillRef>
+      <a:effectRef idx="0">
+        <a:scrgbClr r="0" g="0" b="0"/>
+      </a:effectRef>
+      <a:fontRef idx="minor"/>
+    </dgm:style>
+  </dgm:styleLbl>
+  <dgm:styleLbl name="solidAlignAcc1">
+    <dgm:scene3d>
+      <a:camera prst="orthographicFront"/>
+      <a:lightRig rig="threePt" dir="t"/>
+    </dgm:scene3d>
+    <dgm:sp3d/>
+    <dgm:txPr/>
+    <dgm:style>
+      <a:lnRef idx="2">
+        <a:scrgbClr r="0" g="0" b="0"/>
+      </a:lnRef>
+      <a:fillRef idx="1">
+        <a:scrgbClr r="0" g="0" b="0"/>
+      </a:fillRef>
+      <a:effectRef idx="0">
+        <a:scrgbClr r="0" g="0" b="0"/>
+      </a:effectRef>
+      <a:fontRef idx="minor"/>
+    </dgm:style>
+  </dgm:styleLbl>
+  <dgm:styleLbl name="solidBgAcc1">
+    <dgm:scene3d>
+      <a:camera prst="orthographicFront"/>
+      <a:lightRig rig="threePt" dir="t"/>
+    </dgm:scene3d>
+    <dgm:sp3d/>
+    <dgm:txPr/>
+    <dgm:style>
+      <a:lnRef idx="2">
+        <a:scrgbClr r="0" g="0" b="0"/>
+      </a:lnRef>
+      <a:fillRef idx="1">
+        <a:scrgbClr r="0" g="0" b="0"/>
+      </a:fillRef>
+      <a:effectRef idx="0">
+        <a:scrgbClr r="0" g="0" b="0"/>
+      </a:effectRef>
+      <a:fontRef idx="minor"/>
+    </dgm:style>
+  </dgm:styleLbl>
+  <dgm:styleLbl name="fgAccFollowNode1">
+    <dgm:scene3d>
+      <a:camera prst="orthographicFront"/>
+      <a:lightRig rig="threePt" dir="t"/>
+    </dgm:scene3d>
+    <dgm:sp3d/>
+    <dgm:txPr/>
+    <dgm:style>
+      <a:lnRef idx="2">
+        <a:scrgbClr r="0" g="0" b="0"/>
+      </a:lnRef>
+      <a:fillRef idx="1">
+        <a:scrgbClr r="0" g="0" b="0"/>
+      </a:fillRef>
+      <a:effectRef idx="0">
+        <a:scrgbClr r="0" g="0" b="0"/>
+      </a:effectRef>
+      <a:fontRef idx="minor"/>
+    </dgm:style>
+  </dgm:styleLbl>
+  <dgm:styleLbl name="alignAccFollowNode1">
+    <dgm:scene3d>
+      <a:camera prst="orthographicFront"/>
+      <a:lightRig rig="threePt" dir="t"/>
+    </dgm:scene3d>
+    <dgm:sp3d/>
+    <dgm:txPr/>
+    <dgm:style>
+      <a:lnRef idx="2">
+        <a:scrgbClr r="0" g="0" b="0"/>
+      </a:lnRef>
+      <a:fillRef idx="1">
+        <a:scrgbClr r="0" g="0" b="0"/>
+      </a:fillRef>
+      <a:effectRef idx="0">
+        <a:scrgbClr r="0" g="0" b="0"/>
+      </a:effectRef>
+      <a:fontRef idx="minor"/>
+    </dgm:style>
+  </dgm:styleLbl>
+  <dgm:styleLbl name="bgAccFollowNode1">
+    <dgm:scene3d>
+      <a:camera prst="orthographicFront"/>
+      <a:lightRig rig="threePt" dir="t"/>
+    </dgm:scene3d>
+    <dgm:sp3d/>
+    <dgm:txPr/>
+    <dgm:style>
+      <a:lnRef idx="2">
+        <a:scrgbClr r="0" g="0" b="0"/>
+      </a:lnRef>
+      <a:fillRef idx="1">
+        <a:scrgbClr r="0" g="0" b="0"/>
+      </a:fillRef>
+      <a:effectRef idx="0">
+        <a:scrgbClr r="0" g="0" b="0"/>
+      </a:effectRef>
+      <a:fontRef idx="minor"/>
+    </dgm:style>
+  </dgm:styleLbl>
+  <dgm:styleLbl name="fgAcc0">
+    <dgm:scene3d>
+      <a:camera prst="orthographicFront"/>
+      <a:lightRig rig="threePt" dir="t"/>
+    </dgm:scene3d>
+    <dgm:sp3d/>
+    <dgm:txPr/>
+    <dgm:style>
+      <a:lnRef idx="2">
+        <a:scrgbClr r="0" g="0" b="0"/>
+      </a:lnRef>
+      <a:fillRef idx="1">
+        <a:scrgbClr r="0" g="0" b="0"/>
+      </a:fillRef>
+      <a:effectRef idx="0">
+        <a:scrgbClr r="0" g="0" b="0"/>
+      </a:effectRef>
+      <a:fontRef idx="minor"/>
+    </dgm:style>
+  </dgm:styleLbl>
+  <dgm:styleLbl name="fgAcc2">
+    <dgm:scene3d>
+      <a:camera prst="orthographicFront"/>
+      <a:lightRig rig="threePt" dir="t"/>
+    </dgm:scene3d>
+    <dgm:sp3d/>
+    <dgm:txPr/>
+    <dgm:style>
+      <a:lnRef idx="2">
+        <a:scrgbClr r="0" g="0" b="0"/>
+      </a:lnRef>
+      <a:fillRef idx="1">
+        <a:scrgbClr r="0" g="0" b="0"/>
+      </a:fillRef>
+      <a:effectRef idx="0">
+        <a:scrgbClr r="0" g="0" b="0"/>
+      </a:effectRef>
+      <a:fontRef idx="minor"/>
+    </dgm:style>
+  </dgm:styleLbl>
+  <dgm:styleLbl name="fgAcc3">
+    <dgm:scene3d>
+      <a:camera prst="orthographicFront"/>
+      <a:lightRig rig="threePt" dir="t"/>
+    </dgm:scene3d>
+    <dgm:sp3d/>
+    <dgm:txPr/>
+    <dgm:style>
+      <a:lnRef idx="2">
+        <a:scrgbClr r="0" g="0" b="0"/>
+      </a:lnRef>
+      <a:fillRef idx="1">
+        <a:scrgbClr r="0" g="0" b="0"/>
+      </a:fillRef>
+      <a:effectRef idx="0">
+        <a:scrgbClr r="0" g="0" b="0"/>
+      </a:effectRef>
+      <a:fontRef idx="minor"/>
+    </dgm:style>
+  </dgm:styleLbl>
+  <dgm:styleLbl name="fgAcc4">
+    <dgm:scene3d>
+      <a:camera prst="orthographicFront"/>
+      <a:lightRig rig="threePt" dir="t"/>
+    </dgm:scene3d>
+    <dgm:sp3d/>
+    <dgm:txPr/>
+    <dgm:style>
+      <a:lnRef idx="2">
+        <a:scrgbClr r="0" g="0" b="0"/>
+      </a:lnRef>
+      <a:fillRef idx="1">
+        <a:scrgbClr r="0" g="0" b="0"/>
+      </a:fillRef>
+      <a:effectRef idx="0">
+        <a:scrgbClr r="0" g="0" b="0"/>
+      </a:effectRef>
+      <a:fontRef idx="minor"/>
+    </dgm:style>
+  </dgm:styleLbl>
+  <dgm:styleLbl name="bgShp">
+    <dgm:scene3d>
+      <a:camera prst="orthographicFront"/>
+      <a:lightRig rig="threePt" dir="t"/>
+    </dgm:scene3d>
+    <dgm:sp3d/>
+    <dgm:txPr/>
+    <dgm:style>
+      <a:lnRef idx="0">
+        <a:scrgbClr r="0" g="0" b="0"/>
+      </a:lnRef>
+      <a:fillRef idx="1">
+        <a:scrgbClr r="0" g="0" b="0"/>
+      </a:fillRef>
+      <a:effectRef idx="0">
+        <a:scrgbClr r="0" g="0" b="0"/>
+      </a:effectRef>
+      <a:fontRef idx="minor"/>
+    </dgm:style>
+  </dgm:styleLbl>
+  <dgm:styleLbl name="dkBgShp">
+    <dgm:scene3d>
+      <a:camera prst="orthographicFront"/>
+      <a:lightRig rig="threePt" dir="t"/>
+    </dgm:scene3d>
+    <dgm:sp3d/>
+    <dgm:txPr/>
+    <dgm:style>
+      <a:lnRef idx="0">
+        <a:scrgbClr r="0" g="0" b="0"/>
+      </a:lnRef>
+      <a:fillRef idx="1">
+        <a:scrgbClr r="0" g="0" b="0"/>
+      </a:fillRef>
+      <a:effectRef idx="0">
+        <a:scrgbClr r="0" g="0" b="0"/>
+      </a:effectRef>
+      <a:fontRef idx="minor"/>
+    </dgm:style>
+  </dgm:styleLbl>
+  <dgm:styleLbl name="trBgShp">
+    <dgm:scene3d>
+      <a:camera prst="orthographicFront"/>
+      <a:lightRig rig="threePt" dir="t"/>
+    </dgm:scene3d>
+    <dgm:sp3d/>
+    <dgm:txPr/>
+    <dgm:style>
+      <a:lnRef idx="0">
+        <a:scrgbClr r="0" g="0" b="0"/>
+      </a:lnRef>
+      <a:fillRef idx="1">
+        <a:scrgbClr r="0" g="0" b="0"/>
+      </a:fillRef>
+      <a:effectRef idx="0">
+        <a:scrgbClr r="0" g="0" b="0"/>
+      </a:effectRef>
+      <a:fontRef idx="minor"/>
+    </dgm:style>
+  </dgm:styleLbl>
+  <dgm:styleLbl name="fgShp">
+    <dgm:scene3d>
+      <a:camera prst="orthographicFront"/>
+      <a:lightRig rig="threePt" dir="t"/>
+    </dgm:scene3d>
+    <dgm:sp3d/>
+    <dgm:txPr/>
+    <dgm:style>
+      <a:lnRef idx="2">
+        <a:scrgbClr r="0" g="0" b="0"/>
+      </a:lnRef>
+      <a:fillRef idx="1">
+        <a:scrgbClr r="0" g="0" b="0"/>
+      </a:fillRef>
+      <a:effectRef idx="0">
+        <a:scrgbClr r="0" g="0" b="0"/>
+      </a:effectRef>
+      <a:fontRef idx="minor"/>
+    </dgm:style>
+  </dgm:styleLbl>
+  <dgm:styleLbl name="revTx">
+    <dgm:scene3d>
+      <a:camera prst="orthographicFront"/>
+      <a:lightRig rig="threePt" dir="t"/>
+    </dgm:scene3d>
+    <dgm:sp3d/>
+    <dgm:txPr/>
+    <dgm:style>
+      <a:lnRef idx="0">
+        <a:scrgbClr r="0" g="0" b="0"/>
+      </a:lnRef>
+      <a:fillRef idx="0">
+        <a:scrgbClr r="0" g="0" b="0"/>
+      </a:fillRef>
+      <a:effectRef idx="0">
+        <a:scrgbClr r="0" g="0" b="0"/>
+      </a:effectRef>
+      <a:fontRef idx="minor"/>
+    </dgm:style>
+  </dgm:styleLbl>
+</dgm:styleDef>
 </file>
 
 <file path=ppt/slideLayouts/slideLayout1.xml><?xml version="1.0" encoding="utf-8"?>
@@ -262,7 +6852,7 @@
           <a:p>
             <a:fld id="{C7D7D456-559D-4696-BBB8-8507F6F5D093}" type="datetimeFigureOut">
               <a:rPr lang="fr-FR" smtClean="0"/>
-              <a:t>02/03/2026</a:t>
+              <a:t>10/03/2026</a:t>
             </a:fld>
             <a:endParaRPr lang="fr-FR"/>
           </a:p>
@@ -460,7 +7050,7 @@
           <a:p>
             <a:fld id="{C7D7D456-559D-4696-BBB8-8507F6F5D093}" type="datetimeFigureOut">
               <a:rPr lang="fr-FR" smtClean="0"/>
-              <a:t>02/03/2026</a:t>
+              <a:t>10/03/2026</a:t>
             </a:fld>
             <a:endParaRPr lang="fr-FR"/>
           </a:p>
@@ -668,7 +7258,7 @@
           <a:p>
             <a:fld id="{C7D7D456-559D-4696-BBB8-8507F6F5D093}" type="datetimeFigureOut">
               <a:rPr lang="fr-FR" smtClean="0"/>
-              <a:t>02/03/2026</a:t>
+              <a:t>10/03/2026</a:t>
             </a:fld>
             <a:endParaRPr lang="fr-FR"/>
           </a:p>
@@ -866,7 +7456,7 @@
           <a:p>
             <a:fld id="{C7D7D456-559D-4696-BBB8-8507F6F5D093}" type="datetimeFigureOut">
               <a:rPr lang="fr-FR" smtClean="0"/>
-              <a:t>02/03/2026</a:t>
+              <a:t>10/03/2026</a:t>
             </a:fld>
             <a:endParaRPr lang="fr-FR"/>
           </a:p>
@@ -1141,7 +7731,7 @@
           <a:p>
             <a:fld id="{C7D7D456-559D-4696-BBB8-8507F6F5D093}" type="datetimeFigureOut">
               <a:rPr lang="fr-FR" smtClean="0"/>
-              <a:t>02/03/2026</a:t>
+              <a:t>10/03/2026</a:t>
             </a:fld>
             <a:endParaRPr lang="fr-FR"/>
           </a:p>
@@ -1406,7 +7996,7 @@
           <a:p>
             <a:fld id="{C7D7D456-559D-4696-BBB8-8507F6F5D093}" type="datetimeFigureOut">
               <a:rPr lang="fr-FR" smtClean="0"/>
-              <a:t>02/03/2026</a:t>
+              <a:t>10/03/2026</a:t>
             </a:fld>
             <a:endParaRPr lang="fr-FR"/>
           </a:p>
@@ -1818,7 +8408,7 @@
           <a:p>
             <a:fld id="{C7D7D456-559D-4696-BBB8-8507F6F5D093}" type="datetimeFigureOut">
               <a:rPr lang="fr-FR" smtClean="0"/>
-              <a:t>02/03/2026</a:t>
+              <a:t>10/03/2026</a:t>
             </a:fld>
             <a:endParaRPr lang="fr-FR"/>
           </a:p>
@@ -1959,7 +8549,7 @@
           <a:p>
             <a:fld id="{C7D7D456-559D-4696-BBB8-8507F6F5D093}" type="datetimeFigureOut">
               <a:rPr lang="fr-FR" smtClean="0"/>
-              <a:t>02/03/2026</a:t>
+              <a:t>10/03/2026</a:t>
             </a:fld>
             <a:endParaRPr lang="fr-FR"/>
           </a:p>
@@ -2072,7 +8662,7 @@
           <a:p>
             <a:fld id="{C7D7D456-559D-4696-BBB8-8507F6F5D093}" type="datetimeFigureOut">
               <a:rPr lang="fr-FR" smtClean="0"/>
-              <a:t>02/03/2026</a:t>
+              <a:t>10/03/2026</a:t>
             </a:fld>
             <a:endParaRPr lang="fr-FR"/>
           </a:p>
@@ -2383,7 +8973,7 @@
           <a:p>
             <a:fld id="{C7D7D456-559D-4696-BBB8-8507F6F5D093}" type="datetimeFigureOut">
               <a:rPr lang="fr-FR" smtClean="0"/>
-              <a:t>02/03/2026</a:t>
+              <a:t>10/03/2026</a:t>
             </a:fld>
             <a:endParaRPr lang="fr-FR"/>
           </a:p>
@@ -2671,7 +9261,7 @@
           <a:p>
             <a:fld id="{C7D7D456-559D-4696-BBB8-8507F6F5D093}" type="datetimeFigureOut">
               <a:rPr lang="fr-FR" smtClean="0"/>
-              <a:t>02/03/2026</a:t>
+              <a:t>10/03/2026</a:t>
             </a:fld>
             <a:endParaRPr lang="fr-FR"/>
           </a:p>
@@ -2912,7 +9502,7 @@
           <a:p>
             <a:fld id="{C7D7D456-559D-4696-BBB8-8507F6F5D093}" type="datetimeFigureOut">
               <a:rPr lang="fr-FR" smtClean="0"/>
-              <a:t>02/03/2026</a:t>
+              <a:t>10/03/2026</a:t>
             </a:fld>
             <a:endParaRPr lang="fr-FR"/>
           </a:p>
@@ -3605,36 +10195,6 @@
           </a:p>
         </p:txBody>
       </p:sp>
-      <p:pic>
-        <p:nvPicPr>
-          <p:cNvPr id="6" name="Image 5" descr="Une image contenant texte, nombre&#10;&#10;Le contenu généré par l’IA peut être incorrect.">
-            <a:extLst>
-              <a:ext uri="{FF2B5EF4-FFF2-40B4-BE49-F238E27FC236}">
-                <a16:creationId xmlns:a16="http://schemas.microsoft.com/office/drawing/2014/main" id="{0A22EE21-ABA5-7FB8-AE40-54724A84FAE8}"/>
-              </a:ext>
-            </a:extLst>
-          </p:cNvPr>
-          <p:cNvPicPr>
-            <a:picLocks noChangeAspect="1"/>
-          </p:cNvPicPr>
-          <p:nvPr/>
-        </p:nvPicPr>
-        <p:blipFill>
-          <a:blip r:embed="rId2"/>
-          <a:stretch>
-            <a:fillRect/>
-          </a:stretch>
-        </p:blipFill>
-        <p:spPr>
-          <a:xfrm>
-            <a:off x="913677" y="637785"/>
-            <a:ext cx="10364646" cy="5582429"/>
-          </a:xfrm>
-          <a:prstGeom prst="rect">
-            <a:avLst/>
-          </a:prstGeom>
-        </p:spPr>
-      </p:pic>
     </p:spTree>
     <p:extLst>
       <p:ext uri="{BB962C8B-B14F-4D97-AF65-F5344CB8AC3E}">
@@ -5120,6 +11680,220 @@
           <p:cNvPr id="2" name="Titre 1">
             <a:extLst>
               <a:ext uri="{FF2B5EF4-FFF2-40B4-BE49-F238E27FC236}">
+                <a16:creationId xmlns:a16="http://schemas.microsoft.com/office/drawing/2014/main" id="{0C8A73F0-0173-D9F7-CE91-5E10CC99790E}"/>
+              </a:ext>
+            </a:extLst>
+          </p:cNvPr>
+          <p:cNvSpPr>
+            <a:spLocks noGrp="1"/>
+          </p:cNvSpPr>
+          <p:nvPr>
+            <p:ph type="title"/>
+          </p:nvPr>
+        </p:nvSpPr>
+        <p:spPr/>
+        <p:txBody>
+          <a:bodyPr/>
+          <a:lstStyle/>
+          <a:p>
+            <a:r>
+              <a:rPr lang="fr-FR" dirty="0"/>
+              <a:t>Etapes : hébergement sur le cloud (via streamlit.io)</a:t>
+            </a:r>
+          </a:p>
+        </p:txBody>
+      </p:sp>
+      <p:sp>
+        <p:nvSpPr>
+          <p:cNvPr id="3" name="Espace réservé du contenu 2">
+            <a:extLst>
+              <a:ext uri="{FF2B5EF4-FFF2-40B4-BE49-F238E27FC236}">
+                <a16:creationId xmlns:a16="http://schemas.microsoft.com/office/drawing/2014/main" id="{0C7F0CE0-CA19-E3AC-6D6F-2A775556E04B}"/>
+              </a:ext>
+            </a:extLst>
+          </p:cNvPr>
+          <p:cNvSpPr>
+            <a:spLocks noGrp="1"/>
+          </p:cNvSpPr>
+          <p:nvPr>
+            <p:ph idx="1"/>
+          </p:nvPr>
+        </p:nvSpPr>
+        <p:spPr/>
+        <p:txBody>
+          <a:bodyPr/>
+          <a:lstStyle/>
+          <a:p>
+            <a:r>
+              <a:rPr lang="fr-FR" dirty="0"/>
+              <a:t>Concernant l’hébergement des modèles sur le cloud, j’utilise </a:t>
+            </a:r>
+            <a:r>
+              <a:rPr lang="fr-FR" dirty="0" err="1"/>
+              <a:t>Huggingface</a:t>
+            </a:r>
+            <a:r>
+              <a:rPr lang="fr-FR" dirty="0"/>
+              <a:t> pour les modèles et le </a:t>
+            </a:r>
+            <a:r>
+              <a:rPr lang="fr-FR" dirty="0" err="1"/>
+              <a:t>dataset</a:t>
+            </a:r>
+            <a:r>
+              <a:rPr lang="fr-FR" dirty="0"/>
+              <a:t> des images en créant un csv de métadonnées pour les graphiques, métriques globales et EDA des images</a:t>
+            </a:r>
+          </a:p>
+          <a:p>
+            <a:r>
+              <a:rPr lang="fr-FR" dirty="0"/>
+              <a:t>Pour les images hébergées sur </a:t>
+            </a:r>
+            <a:r>
+              <a:rPr lang="fr-FR" dirty="0" err="1"/>
+              <a:t>huggingface</a:t>
+            </a:r>
+            <a:r>
+              <a:rPr lang="fr-FR" dirty="0"/>
+              <a:t>, l’app ne </a:t>
+            </a:r>
+            <a:r>
+              <a:rPr lang="fr-FR"/>
+              <a:t>téléchargera qu’un </a:t>
+            </a:r>
+            <a:r>
+              <a:rPr lang="fr-FR" dirty="0"/>
+              <a:t>échantillon d’images à la demande quand l’utilisateur sélectionnera une race de chiens  </a:t>
+            </a:r>
+          </a:p>
+        </p:txBody>
+      </p:sp>
+    </p:spTree>
+    <p:extLst>
+      <p:ext uri="{BB962C8B-B14F-4D97-AF65-F5344CB8AC3E}">
+        <p14:creationId xmlns:p14="http://schemas.microsoft.com/office/powerpoint/2010/main" val="4181619831"/>
+      </p:ext>
+    </p:extLst>
+  </p:cSld>
+  <p:clrMapOvr>
+    <a:masterClrMapping/>
+  </p:clrMapOvr>
+</p:sld>
+</file>
+
+<file path=ppt/slides/slide5.xml><?xml version="1.0" encoding="utf-8"?>
+<p:sld xmlns:a="http://schemas.openxmlformats.org/drawingml/2006/main" xmlns:r="http://schemas.openxmlformats.org/officeDocument/2006/relationships" xmlns:p="http://schemas.openxmlformats.org/presentationml/2006/main">
+  <p:cSld>
+    <p:spTree>
+      <p:nvGrpSpPr>
+        <p:cNvPr id="1" name=""/>
+        <p:cNvGrpSpPr/>
+        <p:nvPr/>
+      </p:nvGrpSpPr>
+      <p:grpSpPr>
+        <a:xfrm>
+          <a:off x="0" y="0"/>
+          <a:ext cx="0" cy="0"/>
+          <a:chOff x="0" y="0"/>
+          <a:chExt cx="0" cy="0"/>
+        </a:xfrm>
+      </p:grpSpPr>
+      <p:sp>
+        <p:nvSpPr>
+          <p:cNvPr id="2" name="Titre 1">
+            <a:extLst>
+              <a:ext uri="{FF2B5EF4-FFF2-40B4-BE49-F238E27FC236}">
+                <a16:creationId xmlns:a16="http://schemas.microsoft.com/office/drawing/2014/main" id="{66E174E2-8E15-BF12-4136-4BE79BF39A6C}"/>
+              </a:ext>
+            </a:extLst>
+          </p:cNvPr>
+          <p:cNvSpPr>
+            <a:spLocks noGrp="1"/>
+          </p:cNvSpPr>
+          <p:nvPr>
+            <p:ph type="title"/>
+          </p:nvPr>
+        </p:nvSpPr>
+        <p:spPr/>
+        <p:txBody>
+          <a:bodyPr/>
+          <a:lstStyle/>
+          <a:p>
+            <a:pPr algn="ctr"/>
+            <a:r>
+              <a:rPr lang="fr-FR" dirty="0"/>
+              <a:t>Accessibilité WCAG 2.1</a:t>
+            </a:r>
+          </a:p>
+        </p:txBody>
+      </p:sp>
+      <p:sp>
+        <p:nvSpPr>
+          <p:cNvPr id="3" name="Espace réservé du contenu 2">
+            <a:extLst>
+              <a:ext uri="{FF2B5EF4-FFF2-40B4-BE49-F238E27FC236}">
+                <a16:creationId xmlns:a16="http://schemas.microsoft.com/office/drawing/2014/main" id="{AC00C878-BA53-D60B-A5B4-AFEF01264AB6}"/>
+              </a:ext>
+            </a:extLst>
+          </p:cNvPr>
+          <p:cNvSpPr>
+            <a:spLocks noGrp="1"/>
+          </p:cNvSpPr>
+          <p:nvPr>
+            <p:ph idx="1"/>
+          </p:nvPr>
+        </p:nvSpPr>
+        <p:spPr/>
+        <p:txBody>
+          <a:bodyPr/>
+          <a:lstStyle/>
+          <a:p>
+            <a:r>
+              <a:rPr lang="fr-FR" dirty="0"/>
+              <a:t>WCAG_COLORS : mise en place d’une palette de couleurs adaptées aux personnes ayant une mauvaise vue (contraste sur fond blanc) </a:t>
+            </a:r>
+          </a:p>
+          <a:p>
+            <a:endParaRPr lang="fr-FR" dirty="0"/>
+          </a:p>
+        </p:txBody>
+      </p:sp>
+    </p:spTree>
+    <p:extLst>
+      <p:ext uri="{BB962C8B-B14F-4D97-AF65-F5344CB8AC3E}">
+        <p14:creationId xmlns:p14="http://schemas.microsoft.com/office/powerpoint/2010/main" val="2793218826"/>
+      </p:ext>
+    </p:extLst>
+  </p:cSld>
+  <p:clrMapOvr>
+    <a:masterClrMapping/>
+  </p:clrMapOvr>
+</p:sld>
+</file>
+
+<file path=ppt/slides/slide6.xml><?xml version="1.0" encoding="utf-8"?>
+<p:sld xmlns:a="http://schemas.openxmlformats.org/drawingml/2006/main" xmlns:r="http://schemas.openxmlformats.org/officeDocument/2006/relationships" xmlns:p="http://schemas.openxmlformats.org/presentationml/2006/main">
+  <p:cSld>
+    <p:spTree>
+      <p:nvGrpSpPr>
+        <p:cNvPr id="1" name=""/>
+        <p:cNvGrpSpPr/>
+        <p:nvPr/>
+      </p:nvGrpSpPr>
+      <p:grpSpPr>
+        <a:xfrm>
+          <a:off x="0" y="0"/>
+          <a:ext cx="0" cy="0"/>
+          <a:chOff x="0" y="0"/>
+          <a:chExt cx="0" cy="0"/>
+        </a:xfrm>
+      </p:grpSpPr>
+      <p:sp>
+        <p:nvSpPr>
+          <p:cNvPr id="2" name="Titre 1">
+            <a:extLst>
+              <a:ext uri="{FF2B5EF4-FFF2-40B4-BE49-F238E27FC236}">
                 <a16:creationId xmlns:a16="http://schemas.microsoft.com/office/drawing/2014/main" id="{2D1D6C9A-9485-1509-BB74-24A4C9BA3301}"/>
               </a:ext>
             </a:extLst>
@@ -5176,6 +11950,356 @@
     <p:extLst>
       <p:ext uri="{BB962C8B-B14F-4D97-AF65-F5344CB8AC3E}">
         <p14:creationId xmlns:p14="http://schemas.microsoft.com/office/powerpoint/2010/main" val="175545954"/>
+      </p:ext>
+    </p:extLst>
+  </p:cSld>
+  <p:clrMapOvr>
+    <a:masterClrMapping/>
+  </p:clrMapOvr>
+</p:sld>
+</file>
+
+<file path=ppt/slides/slide7.xml><?xml version="1.0" encoding="utf-8"?>
+<p:sld xmlns:a="http://schemas.openxmlformats.org/drawingml/2006/main" xmlns:r="http://schemas.openxmlformats.org/officeDocument/2006/relationships" xmlns:p="http://schemas.openxmlformats.org/presentationml/2006/main">
+  <p:cSld>
+    <p:spTree>
+      <p:nvGrpSpPr>
+        <p:cNvPr id="1" name=""/>
+        <p:cNvGrpSpPr/>
+        <p:nvPr/>
+      </p:nvGrpSpPr>
+      <p:grpSpPr>
+        <a:xfrm>
+          <a:off x="0" y="0"/>
+          <a:ext cx="0" cy="0"/>
+          <a:chOff x="0" y="0"/>
+          <a:chExt cx="0" cy="0"/>
+        </a:xfrm>
+      </p:grpSpPr>
+      <p:sp>
+        <p:nvSpPr>
+          <p:cNvPr id="2" name="Titre 1">
+            <a:extLst>
+              <a:ext uri="{FF2B5EF4-FFF2-40B4-BE49-F238E27FC236}">
+                <a16:creationId xmlns:a16="http://schemas.microsoft.com/office/drawing/2014/main" id="{7EDD736D-FBA9-2573-95C7-302E878971D2}"/>
+              </a:ext>
+            </a:extLst>
+          </p:cNvPr>
+          <p:cNvSpPr>
+            <a:spLocks noGrp="1"/>
+          </p:cNvSpPr>
+          <p:nvPr>
+            <p:ph type="title"/>
+          </p:nvPr>
+        </p:nvSpPr>
+        <p:spPr>
+          <a:xfrm>
+            <a:off x="838199" y="365125"/>
+            <a:ext cx="11194473" cy="1325563"/>
+          </a:xfrm>
+        </p:spPr>
+        <p:txBody>
+          <a:bodyPr>
+            <a:normAutofit/>
+          </a:bodyPr>
+          <a:lstStyle/>
+          <a:p>
+            <a:r>
+              <a:rPr lang="fr-FR" sz="4000" dirty="0"/>
+              <a:t>3 </a:t>
+            </a:r>
+            <a:r>
+              <a:rPr lang="fr-FR" sz="4000" dirty="0" err="1"/>
+              <a:t>Preds</a:t>
+            </a:r>
+            <a:r>
+              <a:rPr lang="fr-FR" sz="4000" dirty="0"/>
+              <a:t> – Minus/</a:t>
+            </a:r>
+            <a:r>
+              <a:rPr lang="fr-FR" sz="4000" dirty="0" err="1"/>
+              <a:t>Cortexexog</a:t>
+            </a:r>
+            <a:r>
+              <a:rPr lang="fr-FR" sz="4000" dirty="0"/>
+              <a:t>/</a:t>
+            </a:r>
+            <a:r>
+              <a:rPr lang="fr-FR" sz="4000" dirty="0" err="1"/>
+              <a:t>cortexexogetmajtarifs</a:t>
+            </a:r>
+            <a:endParaRPr lang="fr-FR" sz="4000" dirty="0"/>
+          </a:p>
+        </p:txBody>
+      </p:sp>
+      <p:graphicFrame>
+        <p:nvGraphicFramePr>
+          <p:cNvPr id="4" name="Espace réservé du contenu 3">
+            <a:extLst>
+              <a:ext uri="{FF2B5EF4-FFF2-40B4-BE49-F238E27FC236}">
+                <a16:creationId xmlns:a16="http://schemas.microsoft.com/office/drawing/2014/main" id="{BC0751E7-9E21-C1A2-968F-292FD68B432F}"/>
+              </a:ext>
+            </a:extLst>
+          </p:cNvPr>
+          <p:cNvGraphicFramePr>
+            <a:graphicFrameLocks noGrp="1"/>
+          </p:cNvGraphicFramePr>
+          <p:nvPr>
+            <p:ph idx="1"/>
+            <p:extLst>
+              <p:ext uri="{D42A27DB-BD31-4B8C-83A1-F6EECF244321}">
+                <p14:modId xmlns:p14="http://schemas.microsoft.com/office/powerpoint/2010/main" val="1829801910"/>
+              </p:ext>
+            </p:extLst>
+          </p:nvPr>
+        </p:nvGraphicFramePr>
+        <p:xfrm>
+          <a:off x="838200" y="1825625"/>
+          <a:ext cx="10515600" cy="4351338"/>
+        </p:xfrm>
+        <a:graphic>
+          <a:graphicData uri="http://schemas.openxmlformats.org/drawingml/2006/diagram">
+            <dgm:relIds xmlns:dgm="http://schemas.openxmlformats.org/drawingml/2006/diagram" xmlns:r="http://schemas.openxmlformats.org/officeDocument/2006/relationships" r:dm="rId2" r:lo="rId3" r:qs="rId4" r:cs="rId5"/>
+          </a:graphicData>
+        </a:graphic>
+      </p:graphicFrame>
+    </p:spTree>
+    <p:extLst>
+      <p:ext uri="{BB962C8B-B14F-4D97-AF65-F5344CB8AC3E}">
+        <p14:creationId xmlns:p14="http://schemas.microsoft.com/office/powerpoint/2010/main" val="2863822698"/>
+      </p:ext>
+    </p:extLst>
+  </p:cSld>
+  <p:clrMapOvr>
+    <a:masterClrMapping/>
+  </p:clrMapOvr>
+</p:sld>
+</file>
+
+<file path=ppt/slides/slide8.xml><?xml version="1.0" encoding="utf-8"?>
+<p:sld xmlns:a="http://schemas.openxmlformats.org/drawingml/2006/main" xmlns:r="http://schemas.openxmlformats.org/officeDocument/2006/relationships" xmlns:p="http://schemas.openxmlformats.org/presentationml/2006/main">
+  <p:cSld>
+    <p:spTree>
+      <p:nvGrpSpPr>
+        <p:cNvPr id="1" name="">
+          <a:extLst>
+            <a:ext uri="{FF2B5EF4-FFF2-40B4-BE49-F238E27FC236}">
+              <a16:creationId xmlns:a16="http://schemas.microsoft.com/office/drawing/2014/main" id="{D8E62CA1-1BCA-D352-C809-253D3DBAF06D}"/>
+            </a:ext>
+          </a:extLst>
+        </p:cNvPr>
+        <p:cNvGrpSpPr/>
+        <p:nvPr/>
+      </p:nvGrpSpPr>
+      <p:grpSpPr>
+        <a:xfrm>
+          <a:off x="0" y="0"/>
+          <a:ext cx="0" cy="0"/>
+          <a:chOff x="0" y="0"/>
+          <a:chExt cx="0" cy="0"/>
+        </a:xfrm>
+      </p:grpSpPr>
+      <p:sp>
+        <p:nvSpPr>
+          <p:cNvPr id="2" name="Titre 1">
+            <a:extLst>
+              <a:ext uri="{FF2B5EF4-FFF2-40B4-BE49-F238E27FC236}">
+                <a16:creationId xmlns:a16="http://schemas.microsoft.com/office/drawing/2014/main" id="{F06A5466-B928-0E22-3AEA-8B614887CECB}"/>
+              </a:ext>
+            </a:extLst>
+          </p:cNvPr>
+          <p:cNvSpPr>
+            <a:spLocks noGrp="1"/>
+          </p:cNvSpPr>
+          <p:nvPr>
+            <p:ph type="title"/>
+          </p:nvPr>
+        </p:nvSpPr>
+        <p:spPr>
+          <a:xfrm>
+            <a:off x="838199" y="365125"/>
+            <a:ext cx="11194473" cy="1325563"/>
+          </a:xfrm>
+        </p:spPr>
+        <p:txBody>
+          <a:bodyPr>
+            <a:normAutofit/>
+          </a:bodyPr>
+          <a:lstStyle/>
+          <a:p>
+            <a:r>
+              <a:rPr lang="fr-FR" sz="4000" dirty="0"/>
+              <a:t>3 </a:t>
+            </a:r>
+            <a:r>
+              <a:rPr lang="fr-FR" sz="4000" dirty="0" err="1"/>
+              <a:t>Preds</a:t>
+            </a:r>
+            <a:r>
+              <a:rPr lang="fr-FR" sz="4000" dirty="0"/>
+              <a:t> – Minus/</a:t>
+            </a:r>
+            <a:r>
+              <a:rPr lang="fr-FR" sz="4000" dirty="0" err="1"/>
+              <a:t>Cortexexog</a:t>
+            </a:r>
+            <a:r>
+              <a:rPr lang="fr-FR" sz="4000" dirty="0"/>
+              <a:t>/</a:t>
+            </a:r>
+            <a:r>
+              <a:rPr lang="fr-FR" sz="4000" dirty="0" err="1"/>
+              <a:t>cortexexogetmajtarifs</a:t>
+            </a:r>
+            <a:endParaRPr lang="fr-FR" sz="4000" dirty="0"/>
+          </a:p>
+        </p:txBody>
+      </p:sp>
+      <p:graphicFrame>
+        <p:nvGraphicFramePr>
+          <p:cNvPr id="4" name="Espace réservé du contenu 3">
+            <a:extLst>
+              <a:ext uri="{FF2B5EF4-FFF2-40B4-BE49-F238E27FC236}">
+                <a16:creationId xmlns:a16="http://schemas.microsoft.com/office/drawing/2014/main" id="{3AF8E698-815D-764C-5D21-B3851970D994}"/>
+              </a:ext>
+            </a:extLst>
+          </p:cNvPr>
+          <p:cNvGraphicFramePr>
+            <a:graphicFrameLocks noGrp="1"/>
+          </p:cNvGraphicFramePr>
+          <p:nvPr>
+            <p:ph idx="1"/>
+            <p:extLst>
+              <p:ext uri="{D42A27DB-BD31-4B8C-83A1-F6EECF244321}">
+                <p14:modId xmlns:p14="http://schemas.microsoft.com/office/powerpoint/2010/main" val="3008337760"/>
+              </p:ext>
+            </p:extLst>
+          </p:nvPr>
+        </p:nvGraphicFramePr>
+        <p:xfrm>
+          <a:off x="838200" y="1825625"/>
+          <a:ext cx="10515600" cy="4351338"/>
+        </p:xfrm>
+        <a:graphic>
+          <a:graphicData uri="http://schemas.openxmlformats.org/drawingml/2006/diagram">
+            <dgm:relIds xmlns:dgm="http://schemas.openxmlformats.org/drawingml/2006/diagram" xmlns:r="http://schemas.openxmlformats.org/officeDocument/2006/relationships" r:dm="rId2" r:lo="rId3" r:qs="rId4" r:cs="rId5"/>
+          </a:graphicData>
+        </a:graphic>
+      </p:graphicFrame>
+    </p:spTree>
+    <p:extLst>
+      <p:ext uri="{BB962C8B-B14F-4D97-AF65-F5344CB8AC3E}">
+        <p14:creationId xmlns:p14="http://schemas.microsoft.com/office/powerpoint/2010/main" val="2209504242"/>
+      </p:ext>
+    </p:extLst>
+  </p:cSld>
+  <p:clrMapOvr>
+    <a:masterClrMapping/>
+  </p:clrMapOvr>
+</p:sld>
+</file>
+
+<file path=ppt/slides/slide9.xml><?xml version="1.0" encoding="utf-8"?>
+<p:sld xmlns:a="http://schemas.openxmlformats.org/drawingml/2006/main" xmlns:r="http://schemas.openxmlformats.org/officeDocument/2006/relationships" xmlns:p="http://schemas.openxmlformats.org/presentationml/2006/main">
+  <p:cSld>
+    <p:spTree>
+      <p:nvGrpSpPr>
+        <p:cNvPr id="1" name=""/>
+        <p:cNvGrpSpPr/>
+        <p:nvPr/>
+      </p:nvGrpSpPr>
+      <p:grpSpPr>
+        <a:xfrm>
+          <a:off x="0" y="0"/>
+          <a:ext cx="0" cy="0"/>
+          <a:chOff x="0" y="0"/>
+          <a:chExt cx="0" cy="0"/>
+        </a:xfrm>
+      </p:grpSpPr>
+      <p:sp>
+        <p:nvSpPr>
+          <p:cNvPr id="2" name="Titre 1">
+            <a:extLst>
+              <a:ext uri="{FF2B5EF4-FFF2-40B4-BE49-F238E27FC236}">
+                <a16:creationId xmlns:a16="http://schemas.microsoft.com/office/drawing/2014/main" id="{C2990802-57C7-874D-D60F-9F3704186207}"/>
+              </a:ext>
+            </a:extLst>
+          </p:cNvPr>
+          <p:cNvSpPr>
+            <a:spLocks noGrp="1"/>
+          </p:cNvSpPr>
+          <p:nvPr>
+            <p:ph type="title"/>
+          </p:nvPr>
+        </p:nvSpPr>
+        <p:spPr/>
+        <p:txBody>
+          <a:bodyPr/>
+          <a:lstStyle/>
+          <a:p>
+            <a:endParaRPr lang="fr-FR"/>
+          </a:p>
+        </p:txBody>
+      </p:sp>
+      <p:sp>
+        <p:nvSpPr>
+          <p:cNvPr id="3" name="Espace réservé du contenu 2">
+            <a:extLst>
+              <a:ext uri="{FF2B5EF4-FFF2-40B4-BE49-F238E27FC236}">
+                <a16:creationId xmlns:a16="http://schemas.microsoft.com/office/drawing/2014/main" id="{72555C79-D237-224A-5D47-455016DA7C25}"/>
+              </a:ext>
+            </a:extLst>
+          </p:cNvPr>
+          <p:cNvSpPr>
+            <a:spLocks noGrp="1"/>
+          </p:cNvSpPr>
+          <p:nvPr>
+            <p:ph idx="1"/>
+          </p:nvPr>
+        </p:nvSpPr>
+        <p:spPr/>
+        <p:txBody>
+          <a:bodyPr/>
+          <a:lstStyle/>
+          <a:p>
+            <a:endParaRPr lang="fr-FR"/>
+          </a:p>
+        </p:txBody>
+      </p:sp>
+      <p:pic>
+        <p:nvPicPr>
+          <p:cNvPr id="6" name="Image 5" descr="Une image contenant texte, nombre&#10;&#10;Le contenu généré par l’IA peut être incorrect.">
+            <a:extLst>
+              <a:ext uri="{FF2B5EF4-FFF2-40B4-BE49-F238E27FC236}">
+                <a16:creationId xmlns:a16="http://schemas.microsoft.com/office/drawing/2014/main" id="{0A22EE21-ABA5-7FB8-AE40-54724A84FAE8}"/>
+              </a:ext>
+            </a:extLst>
+          </p:cNvPr>
+          <p:cNvPicPr>
+            <a:picLocks noChangeAspect="1"/>
+          </p:cNvPicPr>
+          <p:nvPr/>
+        </p:nvPicPr>
+        <p:blipFill>
+          <a:blip r:embed="rId2"/>
+          <a:stretch>
+            <a:fillRect/>
+          </a:stretch>
+        </p:blipFill>
+        <p:spPr>
+          <a:xfrm>
+            <a:off x="913677" y="637785"/>
+            <a:ext cx="10364646" cy="5582429"/>
+          </a:xfrm>
+          <a:prstGeom prst="rect">
+            <a:avLst/>
+          </a:prstGeom>
+        </p:spPr>
+      </p:pic>
+    </p:spTree>
+    <p:extLst>
+      <p:ext uri="{BB962C8B-B14F-4D97-AF65-F5344CB8AC3E}">
+        <p14:creationId xmlns:p14="http://schemas.microsoft.com/office/powerpoint/2010/main" val="1460081716"/>
       </p:ext>
     </p:extLst>
   </p:cSld>
